--- a/试听课_从景别到剪辑.pptx
+++ b/试听课_从景别到剪辑.pptx
@@ -515,7 +515,7 @@
           <a:lstStyle/>
           <a:p>
             <a:r>
-              <a:t>停10秒。🗣️"今天用一个小时，从拍摄到剪辑的完整流程。不讲理论，直接看案例看操作。"</a:t>
+              <a:t>停2秒扫一眼全场。今天我想用一个小时，带大家过一遍——从拍摄到剪辑的完整流程。不讲理论，直接看案例、看画面、看操作。三个部分——景别：你离拍摄对象多远。运镜：你怎么移动手机。剪辑：把拍好的东西变成一条片子。从静态到动态到成片。一个小时。</a:t>
             </a:r>
           </a:p>
         </p:txBody>
@@ -585,7 +585,7 @@
           <a:lstStyle/>
           <a:p>
             <a:r>
-              <a:t>🗣️剪映演示。"分割剪刀，删除垃圾桶，排序长按拖，修剪拖两端。"</a:t>
+              <a:t>剪映投屏演示。分割剪刀图标切成两段。删除垃圾桶不要的删掉。排序长按拖动改变顺序。修剪拖两端手柄去头去尾。四个操作80%操作就这四个。不用学几百个功能先练熟。</a:t>
             </a:r>
           </a:p>
         </p:txBody>
@@ -655,7 +655,7 @@
           <a:lstStyle/>
           <a:p>
             <a:r>
-              <a:t>🗣️演示叠化。"不需要几十种转场，叠化一个够了。用在情绪切换。"</a:t>
+              <a:t>转场两个镜头之间的过渡。最实用叠化前画面慢慢消失后画面慢慢出现。两个片段中间白色小方块点开选叠化拉时长。画面过渡很自然没有花里胡哨。什么时候用情绪切换现实切回忆现在切过去。不需要几十种转场叠化一个够了电影院一半转场都是叠化。</a:t>
             </a:r>
           </a:p>
         </p:txBody>
@@ -725,7 +725,7 @@
           <a:lstStyle/>
           <a:p>
             <a:r>
-              <a:t>🗣️重点10分钟。演示全流程。"点自动踩点→黄点是重拍→拉画面到黄点→卡上了。我第一次发现感觉自己白剪了两年。"</a:t>
+              <a:t>最重要段落多讲会儿。踩点画面跟着BGM鼓点走。两步：点自动踩点黄点出来每一个黄点就是一个重拍剪映帮你数好了。把画面拖到黄点上黄点在哪画面切到哪。播放卡上了。我第一次发现感觉自己白剪了两年。踩点不是天赋是你有没有点这个按钮。切太快手动拖黄点太碎删几个黄点完全可控。</a:t>
             </a:r>
           </a:p>
         </p:txBody>
@@ -795,7 +795,7 @@
           <a:lstStyle/>
           <a:p>
             <a:r>
-              <a:t>🗣️全程演示8分钟。"从头做一条。几分钟。"</a:t>
+              <a:t>从头完整做一条。导入素材分割删不要的排序调顺序转场加叠化BGM选鼓点清晰的音量30%。踩点自动踩点拉画面到黄点。预览导出。几分钟一条卡点视频。不需要会所有功能导入分割转场BGM踩点这几个就能独立做出一条完整片子。</a:t>
             </a:r>
           </a:p>
         </p:txBody>
@@ -865,7 +865,7 @@
           <a:lstStyle/>
           <a:p>
             <a:r>
-              <a:t>🗣️收尾4分钟。"三段。没有捷径但有方法。好谢谢。"</a:t>
+              <a:t>一个小时三段。景别远全中近特镜头越近代入越强想让观众看什么就用什么景别。运镜推摇跟慢稳别抖不需要炫技。剪辑分割转场踩点软件帮你做了大部分工作你只需要知道什么时候切。拍摄和剪辑不是学软件是学什么时候用什么。景别什么时候推近运镜什么时候跟剪辑什么时候切。这个感觉多看多拍多剪没有捷径但有方法。今天讲的三段就是方法的起点。好谢谢。停2秒点头结束。</a:t>
             </a:r>
           </a:p>
         </p:txBody>
@@ -935,7 +935,7 @@
           <a:lstStyle/>
           <a:p>
             <a:r>
-              <a:t>1分钟。三段预告：①景别-拍什么 ②运镜-怎么动 ③剪辑-怎么剪。</a:t>
+              <a:t>景别——你刷到的每一条短视频远景全景中景近景特写全都有。你以为随便拍的其实已经在用景别了只是不知道它叫什么。运镜——推摇跟三招。剪辑——同样的素材不同的人剪出来完全不一样。进入第一部分。</a:t>
             </a:r>
           </a:p>
         </p:txBody>
@@ -1005,7 +1005,7 @@
           <a:lstStyle/>
           <a:p>
             <a:r>
-              <a:t>🗣️指着每张图说一句。每句1分钟。"远景看环境，全景看全身，中景讲故事，近景传情绪，特写放大招。记住口诀。"</a:t>
+              <a:t>远景肖申克。人物小环境大。交代背景营造氛围。远景看环境。全景功夫猪笼城寨。全身加环境谁在哪干什么。全景看全身。中景那些年教室对话。膝盖以上最自然最常用。中景讲故事。近景少年的你哭戏。胸部以上看清表情感受情绪。近景传情绪。特写泰坦尼克号手。只有一个局部放大最重要细节。特写放大招。口诀远全中近特越近代入越强。想让观众看环境拉远看情绪推近。</a:t>
             </a:r>
           </a:p>
         </p:txBody>
@@ -1075,7 +1075,7 @@
           <a:lstStyle/>
           <a:p>
             <a:r>
-              <a:t>🗣️"同一个场景不同景别感觉完全不同。拍视频就是控制观众注意力。"</a:t>
+              <a:t>同一人左边远景很小很孤独右边近景能看到表情。同一个房间左边全景看到整个空间右边特写只看到桌上的杯子。口播博主中景拉近距离美食博主特写咬下去那一口。拍视频就是控制观众注意力。</a:t>
             </a:r>
           </a:p>
         </p:txBody>
@@ -1145,7 +1145,7 @@
           <a:lstStyle/>
           <a:p>
             <a:r>
-              <a:t>🗣️"景别就这一句口诀。接下来动态的——运镜。"</a:t>
+              <a:t>每一条片子都在用景别。你以为拍得好的人有什么秘诀第一步就是选对了景别。接下来动态的——运镜。</a:t>
             </a:r>
           </a:p>
         </p:txBody>
@@ -1215,7 +1215,7 @@
           <a:lstStyle/>
           <a:p>
             <a:r>
-              <a:t>🗣️"运镜三招：推摇跟。推靠近，摇环顾，跟代入。"</a:t>
+              <a:t>运镜三招推摇跟。推手机靠近聚焦。摇原地转动环顾。跟跟着主体代入。三个字推摇跟。看实战。</a:t>
             </a:r>
           </a:p>
         </p:txBody>
@@ -1285,7 +1285,7 @@
           <a:lstStyle/>
           <a:p>
             <a:r>
-              <a:t>🗣️每段播放后说一句。"推=压迫感，摇=现场感，跟=代入感。"</a:t>
+              <a:t>沉默的羔羊推镜汉尼拔出场压迫感推镜作用聚焦。重庆森林摇镜现场感好像你站在那个房间里摇镜作用环顾。谍影重重跟拍代入感你就是追他的人或被追的人跟镜作用代入。推聚焦摇环顾跟代入三种完全不同的感觉。</a:t>
             </a:r>
           </a:p>
         </p:txBody>
@@ -1355,7 +1355,7 @@
           <a:lstStyle/>
           <a:p>
             <a:r>
-              <a:t>🗣️"运镜最重要的法则。一个稳的固定镜头比十个晃的运镜强。"</a:t>
+              <a:t>运镜最重要的法则稳。晃不如不动走不稳就先站着拍。一个稳的固定镜头比十个晃的运镜强一百倍。初学者三个字慢稳别抖。你不需要拍出谍影重重只需要做到观众不晕。拍摄讲完了接下来剪辑。</a:t>
             </a:r>
           </a:p>
         </p:txBody>
@@ -1425,7 +1425,7 @@
           <a:lstStyle/>
           <a:p>
             <a:r>
-              <a:t>🗣️"拍摄讲完了。接下来剪映实操。"</a:t>
+              <a:t>景别运镜是拍摄底层逻辑。接下来剪映实操。切到剪映投屏。</a:t>
             </a:r>
           </a:p>
         </p:txBody>
@@ -4447,8 +4447,8 @@
         </p:nvSpPr>
         <p:spPr>
           <a:xfrm>
-            <a:off x="731520" y="1280160"/>
-            <a:ext cx="10698480" cy="12700"/>
+            <a:off x="256032" y="201168"/>
+            <a:ext cx="11676888" cy="12700"/>
           </a:xfrm>
           <a:prstGeom prst="rect">
             <a:avLst/>
@@ -4490,8 +4490,8 @@
         </p:nvSpPr>
         <p:spPr>
           <a:xfrm>
-            <a:off x="731520" y="5394960"/>
-            <a:ext cx="10698480" cy="12700"/>
+            <a:off x="256032" y="6565392"/>
+            <a:ext cx="11676888" cy="12700"/>
           </a:xfrm>
           <a:prstGeom prst="rect">
             <a:avLst/>
@@ -4527,14 +4527,272 @@
       </p:sp>
       <p:sp>
         <p:nvSpPr>
-          <p:cNvPr id="4" name="TextBox 3"/>
+          <p:cNvPr id="4" name="Rectangle 3"/>
+          <p:cNvSpPr/>
+          <p:nvPr/>
+        </p:nvSpPr>
+        <p:spPr>
+          <a:xfrm>
+            <a:off x="256032" y="201168"/>
+            <a:ext cx="12700" cy="6364224"/>
+          </a:xfrm>
+          <a:prstGeom prst="rect">
+            <a:avLst/>
+          </a:prstGeom>
+          <a:solidFill>
+            <a:srgbClr val="D4AF37"/>
+          </a:solidFill>
+          <a:ln>
+            <a:noFill/>
+          </a:ln>
+        </p:spPr>
+        <p:style>
+          <a:lnRef idx="1">
+            <a:schemeClr val="accent1"/>
+          </a:lnRef>
+          <a:fillRef idx="3">
+            <a:schemeClr val="accent1"/>
+          </a:fillRef>
+          <a:effectRef idx="2">
+            <a:schemeClr val="accent1"/>
+          </a:effectRef>
+          <a:fontRef idx="minor">
+            <a:schemeClr val="lt1"/>
+          </a:fontRef>
+        </p:style>
+        <p:txBody>
+          <a:bodyPr rtlCol="0" anchor="ctr"/>
+          <a:lstStyle/>
+          <a:p>
+            <a:pPr algn="ctr"/>
+          </a:p>
+        </p:txBody>
+      </p:sp>
+      <p:sp>
+        <p:nvSpPr>
+          <p:cNvPr id="5" name="Rectangle 4"/>
+          <p:cNvSpPr/>
+          <p:nvPr/>
+        </p:nvSpPr>
+        <p:spPr>
+          <a:xfrm>
+            <a:off x="11932920" y="201168"/>
+            <a:ext cx="12700" cy="6364224"/>
+          </a:xfrm>
+          <a:prstGeom prst="rect">
+            <a:avLst/>
+          </a:prstGeom>
+          <a:solidFill>
+            <a:srgbClr val="D4AF37"/>
+          </a:solidFill>
+          <a:ln>
+            <a:noFill/>
+          </a:ln>
+        </p:spPr>
+        <p:style>
+          <a:lnRef idx="1">
+            <a:schemeClr val="accent1"/>
+          </a:lnRef>
+          <a:fillRef idx="3">
+            <a:schemeClr val="accent1"/>
+          </a:fillRef>
+          <a:effectRef idx="2">
+            <a:schemeClr val="accent1"/>
+          </a:effectRef>
+          <a:fontRef idx="minor">
+            <a:schemeClr val="lt1"/>
+          </a:fontRef>
+        </p:style>
+        <p:txBody>
+          <a:bodyPr rtlCol="0" anchor="ctr"/>
+          <a:lstStyle/>
+          <a:p>
+            <a:pPr algn="ctr"/>
+          </a:p>
+        </p:txBody>
+      </p:sp>
+      <p:sp>
+        <p:nvSpPr>
+          <p:cNvPr id="6" name="Rectangle 5"/>
+          <p:cNvSpPr/>
+          <p:nvPr/>
+        </p:nvSpPr>
+        <p:spPr>
+          <a:xfrm>
+            <a:off x="320040" y="365760"/>
+            <a:ext cx="54864" cy="5760720"/>
+          </a:xfrm>
+          <a:prstGeom prst="rect">
+            <a:avLst/>
+          </a:prstGeom>
+          <a:solidFill>
+            <a:srgbClr val="D4AF37"/>
+          </a:solidFill>
+          <a:ln>
+            <a:noFill/>
+          </a:ln>
+        </p:spPr>
+        <p:style>
+          <a:lnRef idx="1">
+            <a:schemeClr val="accent1"/>
+          </a:lnRef>
+          <a:fillRef idx="3">
+            <a:schemeClr val="accent1"/>
+          </a:fillRef>
+          <a:effectRef idx="2">
+            <a:schemeClr val="accent1"/>
+          </a:effectRef>
+          <a:fontRef idx="minor">
+            <a:schemeClr val="lt1"/>
+          </a:fontRef>
+        </p:style>
+        <p:txBody>
+          <a:bodyPr rtlCol="0" anchor="ctr"/>
+          <a:lstStyle/>
+          <a:p>
+            <a:pPr algn="ctr"/>
+          </a:p>
+        </p:txBody>
+      </p:sp>
+      <p:sp>
+        <p:nvSpPr>
+          <p:cNvPr id="7" name="Rectangle 6"/>
+          <p:cNvSpPr/>
+          <p:nvPr/>
+        </p:nvSpPr>
+        <p:spPr>
+          <a:xfrm>
+            <a:off x="448056" y="365760"/>
+            <a:ext cx="12700" cy="5760720"/>
+          </a:xfrm>
+          <a:prstGeom prst="rect">
+            <a:avLst/>
+          </a:prstGeom>
+          <a:solidFill>
+            <a:srgbClr val="2A2A3E"/>
+          </a:solidFill>
+          <a:ln>
+            <a:noFill/>
+          </a:ln>
+        </p:spPr>
+        <p:style>
+          <a:lnRef idx="1">
+            <a:schemeClr val="accent1"/>
+          </a:lnRef>
+          <a:fillRef idx="3">
+            <a:schemeClr val="accent1"/>
+          </a:fillRef>
+          <a:effectRef idx="2">
+            <a:schemeClr val="accent1"/>
+          </a:effectRef>
+          <a:fontRef idx="minor">
+            <a:schemeClr val="lt1"/>
+          </a:fontRef>
+        </p:style>
+        <p:txBody>
+          <a:bodyPr rtlCol="0" anchor="ctr"/>
+          <a:lstStyle/>
+          <a:p>
+            <a:pPr algn="ctr"/>
+          </a:p>
+        </p:txBody>
+      </p:sp>
+      <p:sp>
+        <p:nvSpPr>
+          <p:cNvPr id="8" name="Rectangle 7"/>
+          <p:cNvSpPr/>
+          <p:nvPr/>
+        </p:nvSpPr>
+        <p:spPr>
+          <a:xfrm>
+            <a:off x="1097280" y="1417320"/>
+            <a:ext cx="9966960" cy="12700"/>
+          </a:xfrm>
+          <a:prstGeom prst="rect">
+            <a:avLst/>
+          </a:prstGeom>
+          <a:solidFill>
+            <a:srgbClr val="D4AF37"/>
+          </a:solidFill>
+          <a:ln>
+            <a:noFill/>
+          </a:ln>
+        </p:spPr>
+        <p:style>
+          <a:lnRef idx="1">
+            <a:schemeClr val="accent1"/>
+          </a:lnRef>
+          <a:fillRef idx="3">
+            <a:schemeClr val="accent1"/>
+          </a:fillRef>
+          <a:effectRef idx="2">
+            <a:schemeClr val="accent1"/>
+          </a:effectRef>
+          <a:fontRef idx="minor">
+            <a:schemeClr val="lt1"/>
+          </a:fontRef>
+        </p:style>
+        <p:txBody>
+          <a:bodyPr rtlCol="0" anchor="ctr"/>
+          <a:lstStyle/>
+          <a:p>
+            <a:pPr algn="ctr"/>
+          </a:p>
+        </p:txBody>
+      </p:sp>
+      <p:sp>
+        <p:nvSpPr>
+          <p:cNvPr id="9" name="Rectangle 8"/>
+          <p:cNvSpPr/>
+          <p:nvPr/>
+        </p:nvSpPr>
+        <p:spPr>
+          <a:xfrm>
+            <a:off x="1097280" y="5349240"/>
+            <a:ext cx="9966960" cy="12700"/>
+          </a:xfrm>
+          <a:prstGeom prst="rect">
+            <a:avLst/>
+          </a:prstGeom>
+          <a:solidFill>
+            <a:srgbClr val="D4AF37"/>
+          </a:solidFill>
+          <a:ln>
+            <a:noFill/>
+          </a:ln>
+        </p:spPr>
+        <p:style>
+          <a:lnRef idx="1">
+            <a:schemeClr val="accent1"/>
+          </a:lnRef>
+          <a:fillRef idx="3">
+            <a:schemeClr val="accent1"/>
+          </a:fillRef>
+          <a:effectRef idx="2">
+            <a:schemeClr val="accent1"/>
+          </a:effectRef>
+          <a:fontRef idx="minor">
+            <a:schemeClr val="lt1"/>
+          </a:fontRef>
+        </p:style>
+        <p:txBody>
+          <a:bodyPr rtlCol="0" anchor="ctr"/>
+          <a:lstStyle/>
+          <a:p>
+            <a:pPr algn="ctr"/>
+          </a:p>
+        </p:txBody>
+      </p:sp>
+      <p:sp>
+        <p:nvSpPr>
+          <p:cNvPr id="10" name="TextBox 9"/>
           <p:cNvSpPr txBox="1"/>
           <p:nvPr/>
         </p:nvSpPr>
         <p:spPr>
           <a:xfrm>
-            <a:off x="731520" y="1005840"/>
-            <a:ext cx="10698480" cy="320040"/>
+            <a:off x="914400" y="1051560"/>
+            <a:ext cx="10332720" cy="320040"/>
           </a:xfrm>
           <a:prstGeom prst="rect">
             <a:avLst/>
@@ -4556,21 +4814,64 @@
                 <a:latin typeface="Arial"/>
                 <a:ea typeface="Arial"/>
               </a:rPr>
-              <a:t>GUANGYINGMENG  ·  MASTERCLASS</a:t>
-            </a:r>
-          </a:p>
-        </p:txBody>
-      </p:sp>
-      <p:sp>
-        <p:nvSpPr>
-          <p:cNvPr id="5" name="TextBox 4"/>
+              <a:t>GUANGYINGMENG  ·  CINEMA MASTERCLASS</a:t>
+            </a:r>
+          </a:p>
+        </p:txBody>
+      </p:sp>
+      <p:sp>
+        <p:nvSpPr>
+          <p:cNvPr id="11" name="Rectangle 10"/>
+          <p:cNvSpPr/>
+          <p:nvPr/>
+        </p:nvSpPr>
+        <p:spPr>
+          <a:xfrm>
+            <a:off x="2286000" y="2011680"/>
+            <a:ext cx="7589520" cy="1371600"/>
+          </a:xfrm>
+          <a:prstGeom prst="rect">
+            <a:avLst/>
+          </a:prstGeom>
+          <a:solidFill>
+            <a:srgbClr val="2A2A3E"/>
+          </a:solidFill>
+          <a:ln>
+            <a:noFill/>
+          </a:ln>
+        </p:spPr>
+        <p:style>
+          <a:lnRef idx="1">
+            <a:schemeClr val="accent1"/>
+          </a:lnRef>
+          <a:fillRef idx="3">
+            <a:schemeClr val="accent1"/>
+          </a:fillRef>
+          <a:effectRef idx="2">
+            <a:schemeClr val="accent1"/>
+          </a:effectRef>
+          <a:fontRef idx="minor">
+            <a:schemeClr val="lt1"/>
+          </a:fontRef>
+        </p:style>
+        <p:txBody>
+          <a:bodyPr rtlCol="0" anchor="ctr"/>
+          <a:lstStyle/>
+          <a:p>
+            <a:pPr algn="ctr"/>
+          </a:p>
+        </p:txBody>
+      </p:sp>
+      <p:sp>
+        <p:nvSpPr>
+          <p:cNvPr id="12" name="TextBox 11"/>
           <p:cNvSpPr txBox="1"/>
           <p:nvPr/>
         </p:nvSpPr>
         <p:spPr>
           <a:xfrm>
-            <a:off x="731520" y="2194560"/>
-            <a:ext cx="10698480" cy="914400"/>
+            <a:off x="731520" y="2148840"/>
+            <a:ext cx="10698480" cy="1005840"/>
           </a:xfrm>
           <a:prstGeom prst="rect">
             <a:avLst/>
@@ -4599,13 +4900,13 @@
       </p:sp>
       <p:sp>
         <p:nvSpPr>
-          <p:cNvPr id="6" name="TextBox 5"/>
+          <p:cNvPr id="13" name="TextBox 12"/>
           <p:cNvSpPr txBox="1"/>
           <p:nvPr/>
         </p:nvSpPr>
         <p:spPr>
           <a:xfrm>
-            <a:off x="731520" y="3291840"/>
+            <a:off x="731520" y="3520440"/>
             <a:ext cx="10698480" cy="502920"/>
           </a:xfrm>
           <a:prstGeom prst="rect">
@@ -4635,14 +4936,14 @@
       </p:sp>
       <p:sp>
         <p:nvSpPr>
-          <p:cNvPr id="7" name="TextBox 6"/>
+          <p:cNvPr id="14" name="TextBox 13"/>
           <p:cNvSpPr txBox="1"/>
           <p:nvPr/>
         </p:nvSpPr>
         <p:spPr>
           <a:xfrm>
             <a:off x="731520" y="4754880"/>
-            <a:ext cx="10698480" cy="411480"/>
+            <a:ext cx="10698480" cy="365760"/>
           </a:xfrm>
           <a:prstGeom prst="rect">
             <a:avLst/>
@@ -4671,14 +4972,57 @@
       </p:sp>
       <p:sp>
         <p:nvSpPr>
-          <p:cNvPr id="8" name="TextBox 7"/>
+          <p:cNvPr id="15" name="Rectangle 14"/>
+          <p:cNvSpPr/>
+          <p:nvPr/>
+        </p:nvSpPr>
+        <p:spPr>
+          <a:xfrm>
+            <a:off x="457200" y="6355080"/>
+            <a:ext cx="11247120" cy="12700"/>
+          </a:xfrm>
+          <a:prstGeom prst="rect">
+            <a:avLst/>
+          </a:prstGeom>
+          <a:solidFill>
+            <a:srgbClr val="D4AF37"/>
+          </a:solidFill>
+          <a:ln>
+            <a:noFill/>
+          </a:ln>
+        </p:spPr>
+        <p:style>
+          <a:lnRef idx="1">
+            <a:schemeClr val="accent1"/>
+          </a:lnRef>
+          <a:fillRef idx="3">
+            <a:schemeClr val="accent1"/>
+          </a:fillRef>
+          <a:effectRef idx="2">
+            <a:schemeClr val="accent1"/>
+          </a:effectRef>
+          <a:fontRef idx="minor">
+            <a:schemeClr val="lt1"/>
+          </a:fontRef>
+        </p:style>
+        <p:txBody>
+          <a:bodyPr rtlCol="0" anchor="ctr"/>
+          <a:lstStyle/>
+          <a:p>
+            <a:pPr algn="ctr"/>
+          </a:p>
+        </p:txBody>
+      </p:sp>
+      <p:sp>
+        <p:nvSpPr>
+          <p:cNvPr id="16" name="TextBox 15"/>
           <p:cNvSpPr txBox="1"/>
           <p:nvPr/>
         </p:nvSpPr>
         <p:spPr>
           <a:xfrm>
-            <a:off x="7772400" y="6446520"/>
-            <a:ext cx="4114800" cy="320040"/>
+            <a:off x="7589520" y="6419088"/>
+            <a:ext cx="4297680" cy="292608"/>
           </a:xfrm>
           <a:prstGeom prst="rect">
             <a:avLst/>
@@ -4695,56 +5039,13 @@
             <a:r>
               <a:rPr sz="1000" b="0">
                 <a:solidFill>
-                  <a:srgbClr val="AAAAAA"/>
+                  <a:srgbClr val="A8A8B0"/>
                 </a:solidFill>
                 <a:latin typeface="Arial"/>
                 <a:ea typeface="Arial"/>
               </a:rPr>
               <a:t>光影盟特训营  ·  1/14</a:t>
             </a:r>
-          </a:p>
-        </p:txBody>
-      </p:sp>
-      <p:sp>
-        <p:nvSpPr>
-          <p:cNvPr id="9" name="Rectangle 8"/>
-          <p:cNvSpPr/>
-          <p:nvPr/>
-        </p:nvSpPr>
-        <p:spPr>
-          <a:xfrm>
-            <a:off x="457200" y="6400800"/>
-            <a:ext cx="11247120" cy="12700"/>
-          </a:xfrm>
-          <a:prstGeom prst="rect">
-            <a:avLst/>
-          </a:prstGeom>
-          <a:solidFill>
-            <a:srgbClr val="D4AF37"/>
-          </a:solidFill>
-          <a:ln>
-            <a:noFill/>
-          </a:ln>
-        </p:spPr>
-        <p:style>
-          <a:lnRef idx="1">
-            <a:schemeClr val="accent1"/>
-          </a:lnRef>
-          <a:fillRef idx="3">
-            <a:schemeClr val="accent1"/>
-          </a:fillRef>
-          <a:effectRef idx="2">
-            <a:schemeClr val="accent1"/>
-          </a:effectRef>
-          <a:fontRef idx="minor">
-            <a:schemeClr val="lt1"/>
-          </a:fontRef>
-        </p:style>
-        <p:txBody>
-          <a:bodyPr rtlCol="0" anchor="ctr"/>
-          <a:lstStyle/>
-          <a:p>
-            <a:pPr algn="ctr"/>
           </a:p>
         </p:txBody>
       </p:sp>
@@ -4776,14 +5077,272 @@
       <p:grpSpPr/>
       <p:sp>
         <p:nvSpPr>
-          <p:cNvPr id="2" name="TextBox 1"/>
+          <p:cNvPr id="2" name="Rectangle 1"/>
+          <p:cNvSpPr/>
+          <p:nvPr/>
+        </p:nvSpPr>
+        <p:spPr>
+          <a:xfrm>
+            <a:off x="256032" y="201168"/>
+            <a:ext cx="11676888" cy="12700"/>
+          </a:xfrm>
+          <a:prstGeom prst="rect">
+            <a:avLst/>
+          </a:prstGeom>
+          <a:solidFill>
+            <a:srgbClr val="D4AF37"/>
+          </a:solidFill>
+          <a:ln>
+            <a:noFill/>
+          </a:ln>
+        </p:spPr>
+        <p:style>
+          <a:lnRef idx="1">
+            <a:schemeClr val="accent1"/>
+          </a:lnRef>
+          <a:fillRef idx="3">
+            <a:schemeClr val="accent1"/>
+          </a:fillRef>
+          <a:effectRef idx="2">
+            <a:schemeClr val="accent1"/>
+          </a:effectRef>
+          <a:fontRef idx="minor">
+            <a:schemeClr val="lt1"/>
+          </a:fontRef>
+        </p:style>
+        <p:txBody>
+          <a:bodyPr rtlCol="0" anchor="ctr"/>
+          <a:lstStyle/>
+          <a:p>
+            <a:pPr algn="ctr"/>
+          </a:p>
+        </p:txBody>
+      </p:sp>
+      <p:sp>
+        <p:nvSpPr>
+          <p:cNvPr id="3" name="Rectangle 2"/>
+          <p:cNvSpPr/>
+          <p:nvPr/>
+        </p:nvSpPr>
+        <p:spPr>
+          <a:xfrm>
+            <a:off x="256032" y="6565392"/>
+            <a:ext cx="11676888" cy="12700"/>
+          </a:xfrm>
+          <a:prstGeom prst="rect">
+            <a:avLst/>
+          </a:prstGeom>
+          <a:solidFill>
+            <a:srgbClr val="D4AF37"/>
+          </a:solidFill>
+          <a:ln>
+            <a:noFill/>
+          </a:ln>
+        </p:spPr>
+        <p:style>
+          <a:lnRef idx="1">
+            <a:schemeClr val="accent1"/>
+          </a:lnRef>
+          <a:fillRef idx="3">
+            <a:schemeClr val="accent1"/>
+          </a:fillRef>
+          <a:effectRef idx="2">
+            <a:schemeClr val="accent1"/>
+          </a:effectRef>
+          <a:fontRef idx="minor">
+            <a:schemeClr val="lt1"/>
+          </a:fontRef>
+        </p:style>
+        <p:txBody>
+          <a:bodyPr rtlCol="0" anchor="ctr"/>
+          <a:lstStyle/>
+          <a:p>
+            <a:pPr algn="ctr"/>
+          </a:p>
+        </p:txBody>
+      </p:sp>
+      <p:sp>
+        <p:nvSpPr>
+          <p:cNvPr id="4" name="Rectangle 3"/>
+          <p:cNvSpPr/>
+          <p:nvPr/>
+        </p:nvSpPr>
+        <p:spPr>
+          <a:xfrm>
+            <a:off x="256032" y="201168"/>
+            <a:ext cx="12700" cy="6364224"/>
+          </a:xfrm>
+          <a:prstGeom prst="rect">
+            <a:avLst/>
+          </a:prstGeom>
+          <a:solidFill>
+            <a:srgbClr val="D4AF37"/>
+          </a:solidFill>
+          <a:ln>
+            <a:noFill/>
+          </a:ln>
+        </p:spPr>
+        <p:style>
+          <a:lnRef idx="1">
+            <a:schemeClr val="accent1"/>
+          </a:lnRef>
+          <a:fillRef idx="3">
+            <a:schemeClr val="accent1"/>
+          </a:fillRef>
+          <a:effectRef idx="2">
+            <a:schemeClr val="accent1"/>
+          </a:effectRef>
+          <a:fontRef idx="minor">
+            <a:schemeClr val="lt1"/>
+          </a:fontRef>
+        </p:style>
+        <p:txBody>
+          <a:bodyPr rtlCol="0" anchor="ctr"/>
+          <a:lstStyle/>
+          <a:p>
+            <a:pPr algn="ctr"/>
+          </a:p>
+        </p:txBody>
+      </p:sp>
+      <p:sp>
+        <p:nvSpPr>
+          <p:cNvPr id="5" name="Rectangle 4"/>
+          <p:cNvSpPr/>
+          <p:nvPr/>
+        </p:nvSpPr>
+        <p:spPr>
+          <a:xfrm>
+            <a:off x="11932920" y="201168"/>
+            <a:ext cx="12700" cy="6364224"/>
+          </a:xfrm>
+          <a:prstGeom prst="rect">
+            <a:avLst/>
+          </a:prstGeom>
+          <a:solidFill>
+            <a:srgbClr val="D4AF37"/>
+          </a:solidFill>
+          <a:ln>
+            <a:noFill/>
+          </a:ln>
+        </p:spPr>
+        <p:style>
+          <a:lnRef idx="1">
+            <a:schemeClr val="accent1"/>
+          </a:lnRef>
+          <a:fillRef idx="3">
+            <a:schemeClr val="accent1"/>
+          </a:fillRef>
+          <a:effectRef idx="2">
+            <a:schemeClr val="accent1"/>
+          </a:effectRef>
+          <a:fontRef idx="minor">
+            <a:schemeClr val="lt1"/>
+          </a:fontRef>
+        </p:style>
+        <p:txBody>
+          <a:bodyPr rtlCol="0" anchor="ctr"/>
+          <a:lstStyle/>
+          <a:p>
+            <a:pPr algn="ctr"/>
+          </a:p>
+        </p:txBody>
+      </p:sp>
+      <p:sp>
+        <p:nvSpPr>
+          <p:cNvPr id="6" name="Rectangle 5"/>
+          <p:cNvSpPr/>
+          <p:nvPr/>
+        </p:nvSpPr>
+        <p:spPr>
+          <a:xfrm>
+            <a:off x="320040" y="365760"/>
+            <a:ext cx="54864" cy="5760720"/>
+          </a:xfrm>
+          <a:prstGeom prst="rect">
+            <a:avLst/>
+          </a:prstGeom>
+          <a:solidFill>
+            <a:srgbClr val="D4AF37"/>
+          </a:solidFill>
+          <a:ln>
+            <a:noFill/>
+          </a:ln>
+        </p:spPr>
+        <p:style>
+          <a:lnRef idx="1">
+            <a:schemeClr val="accent1"/>
+          </a:lnRef>
+          <a:fillRef idx="3">
+            <a:schemeClr val="accent1"/>
+          </a:fillRef>
+          <a:effectRef idx="2">
+            <a:schemeClr val="accent1"/>
+          </a:effectRef>
+          <a:fontRef idx="minor">
+            <a:schemeClr val="lt1"/>
+          </a:fontRef>
+        </p:style>
+        <p:txBody>
+          <a:bodyPr rtlCol="0" anchor="ctr"/>
+          <a:lstStyle/>
+          <a:p>
+            <a:pPr algn="ctr"/>
+          </a:p>
+        </p:txBody>
+      </p:sp>
+      <p:sp>
+        <p:nvSpPr>
+          <p:cNvPr id="7" name="Rectangle 6"/>
+          <p:cNvSpPr/>
+          <p:nvPr/>
+        </p:nvSpPr>
+        <p:spPr>
+          <a:xfrm>
+            <a:off x="448056" y="365760"/>
+            <a:ext cx="12700" cy="5760720"/>
+          </a:xfrm>
+          <a:prstGeom prst="rect">
+            <a:avLst/>
+          </a:prstGeom>
+          <a:solidFill>
+            <a:srgbClr val="2A2A3E"/>
+          </a:solidFill>
+          <a:ln>
+            <a:noFill/>
+          </a:ln>
+        </p:spPr>
+        <p:style>
+          <a:lnRef idx="1">
+            <a:schemeClr val="accent1"/>
+          </a:lnRef>
+          <a:fillRef idx="3">
+            <a:schemeClr val="accent1"/>
+          </a:fillRef>
+          <a:effectRef idx="2">
+            <a:schemeClr val="accent1"/>
+          </a:effectRef>
+          <a:fontRef idx="minor">
+            <a:schemeClr val="lt1"/>
+          </a:fontRef>
+        </p:style>
+        <p:txBody>
+          <a:bodyPr rtlCol="0" anchor="ctr"/>
+          <a:lstStyle/>
+          <a:p>
+            <a:pPr algn="ctr"/>
+          </a:p>
+        </p:txBody>
+      </p:sp>
+      <p:sp>
+        <p:nvSpPr>
+          <p:cNvPr id="8" name="TextBox 7"/>
           <p:cNvSpPr txBox="1"/>
           <p:nvPr/>
         </p:nvSpPr>
         <p:spPr>
           <a:xfrm>
-            <a:off x="548640" y="292608"/>
-            <a:ext cx="10972800" cy="640080"/>
+            <a:off x="640080" y="292608"/>
+            <a:ext cx="10789920" cy="594360"/>
           </a:xfrm>
           <a:prstGeom prst="rect">
             <a:avLst/>
@@ -4812,14 +5371,14 @@
       </p:sp>
       <p:sp>
         <p:nvSpPr>
-          <p:cNvPr id="3" name="Rectangle 2"/>
-          <p:cNvSpPr/>
-          <p:nvPr/>
-        </p:nvSpPr>
-        <p:spPr>
-          <a:xfrm>
-            <a:off x="548640" y="932688"/>
-            <a:ext cx="2011680" cy="31750"/>
+          <p:cNvPr id="9" name="Rectangle 8"/>
+          <p:cNvSpPr/>
+          <p:nvPr/>
+        </p:nvSpPr>
+        <p:spPr>
+          <a:xfrm>
+            <a:off x="640080" y="896112"/>
+            <a:ext cx="2194560" cy="31750"/>
           </a:xfrm>
           <a:prstGeom prst="rect">
             <a:avLst/>
@@ -4855,14 +5414,57 @@
       </p:sp>
       <p:sp>
         <p:nvSpPr>
-          <p:cNvPr id="4" name="Rounded Rectangle 3"/>
-          <p:cNvSpPr/>
-          <p:nvPr/>
-        </p:nvSpPr>
-        <p:spPr>
-          <a:xfrm>
-            <a:off x="929487" y="1188720"/>
-            <a:ext cx="2377440" cy="3200400"/>
+          <p:cNvPr id="10" name="Rectangle 9"/>
+          <p:cNvSpPr/>
+          <p:nvPr/>
+        </p:nvSpPr>
+        <p:spPr>
+          <a:xfrm>
+            <a:off x="3017520" y="896112"/>
+            <a:ext cx="8503920" cy="9525"/>
+          </a:xfrm>
+          <a:prstGeom prst="rect">
+            <a:avLst/>
+          </a:prstGeom>
+          <a:solidFill>
+            <a:srgbClr val="D4AF37"/>
+          </a:solidFill>
+          <a:ln>
+            <a:noFill/>
+          </a:ln>
+        </p:spPr>
+        <p:style>
+          <a:lnRef idx="1">
+            <a:schemeClr val="accent1"/>
+          </a:lnRef>
+          <a:fillRef idx="3">
+            <a:schemeClr val="accent1"/>
+          </a:fillRef>
+          <a:effectRef idx="2">
+            <a:schemeClr val="accent1"/>
+          </a:effectRef>
+          <a:fontRef idx="minor">
+            <a:schemeClr val="lt1"/>
+          </a:fontRef>
+        </p:style>
+        <p:txBody>
+          <a:bodyPr rtlCol="0" anchor="ctr"/>
+          <a:lstStyle/>
+          <a:p>
+            <a:pPr algn="ctr"/>
+          </a:p>
+        </p:txBody>
+      </p:sp>
+      <p:sp>
+        <p:nvSpPr>
+          <p:cNvPr id="11" name="Rounded Rectangle 10"/>
+          <p:cNvSpPr/>
+          <p:nvPr/>
+        </p:nvSpPr>
+        <p:spPr>
+          <a:xfrm>
+            <a:off x="865479" y="1188720"/>
+            <a:ext cx="2423160" cy="3154680"/>
           </a:xfrm>
           <a:prstGeom prst="roundRect">
             <a:avLst>
@@ -4901,7 +5503,7 @@
             <a:r>
               <a:rPr sz="1400" b="0">
                 <a:solidFill>
-                  <a:srgbClr val="AAAAAA"/>
+                  <a:srgbClr val="A8A8B0"/>
                 </a:solidFill>
                 <a:latin typeface="Arial"/>
                 <a:ea typeface="Arial"/>
@@ -4913,14 +5515,14 @@
       </p:sp>
       <p:sp>
         <p:nvSpPr>
-          <p:cNvPr id="5" name="Rectangle 4"/>
-          <p:cNvSpPr/>
-          <p:nvPr/>
-        </p:nvSpPr>
-        <p:spPr>
-          <a:xfrm>
-            <a:off x="929487" y="1188720"/>
-            <a:ext cx="2377440" cy="256032"/>
+          <p:cNvPr id="12" name="Rectangle 11"/>
+          <p:cNvSpPr/>
+          <p:nvPr/>
+        </p:nvSpPr>
+        <p:spPr>
+          <a:xfrm>
+            <a:off x="865479" y="1188720"/>
+            <a:ext cx="2423160" cy="237744"/>
           </a:xfrm>
           <a:prstGeom prst="rect">
             <a:avLst/>
@@ -4956,14 +5558,14 @@
       </p:sp>
       <p:sp>
         <p:nvSpPr>
-          <p:cNvPr id="6" name="TextBox 5"/>
+          <p:cNvPr id="13" name="TextBox 12"/>
           <p:cNvSpPr txBox="1"/>
           <p:nvPr/>
         </p:nvSpPr>
         <p:spPr>
           <a:xfrm>
-            <a:off x="929487" y="4480560"/>
-            <a:ext cx="2377440" cy="320040"/>
+            <a:off x="865479" y="4434840"/>
+            <a:ext cx="2423160" cy="320040"/>
           </a:xfrm>
           <a:prstGeom prst="rect">
             <a:avLst/>
@@ -4992,14 +5594,14 @@
       </p:sp>
       <p:sp>
         <p:nvSpPr>
-          <p:cNvPr id="7" name="Rounded Rectangle 6"/>
-          <p:cNvSpPr/>
-          <p:nvPr/>
-        </p:nvSpPr>
-        <p:spPr>
-          <a:xfrm>
-            <a:off x="3581247" y="1188720"/>
-            <a:ext cx="2377440" cy="3200400"/>
+          <p:cNvPr id="14" name="Rounded Rectangle 13"/>
+          <p:cNvSpPr/>
+          <p:nvPr/>
+        </p:nvSpPr>
+        <p:spPr>
+          <a:xfrm>
+            <a:off x="3544671" y="1188720"/>
+            <a:ext cx="2423160" cy="3154680"/>
           </a:xfrm>
           <a:prstGeom prst="roundRect">
             <a:avLst>
@@ -5038,7 +5640,7 @@
             <a:r>
               <a:rPr sz="1400" b="0">
                 <a:solidFill>
-                  <a:srgbClr val="AAAAAA"/>
+                  <a:srgbClr val="A8A8B0"/>
                 </a:solidFill>
                 <a:latin typeface="Arial"/>
                 <a:ea typeface="Arial"/>
@@ -5050,14 +5652,14 @@
       </p:sp>
       <p:sp>
         <p:nvSpPr>
-          <p:cNvPr id="8" name="Rectangle 7"/>
-          <p:cNvSpPr/>
-          <p:nvPr/>
-        </p:nvSpPr>
-        <p:spPr>
-          <a:xfrm>
-            <a:off x="3581247" y="1188720"/>
-            <a:ext cx="2377440" cy="256032"/>
+          <p:cNvPr id="15" name="Rectangle 14"/>
+          <p:cNvSpPr/>
+          <p:nvPr/>
+        </p:nvSpPr>
+        <p:spPr>
+          <a:xfrm>
+            <a:off x="3544671" y="1188720"/>
+            <a:ext cx="2423160" cy="237744"/>
           </a:xfrm>
           <a:prstGeom prst="rect">
             <a:avLst/>
@@ -5093,14 +5695,14 @@
       </p:sp>
       <p:sp>
         <p:nvSpPr>
-          <p:cNvPr id="9" name="TextBox 8"/>
+          <p:cNvPr id="16" name="TextBox 15"/>
           <p:cNvSpPr txBox="1"/>
           <p:nvPr/>
         </p:nvSpPr>
         <p:spPr>
           <a:xfrm>
-            <a:off x="3581247" y="4480560"/>
-            <a:ext cx="2377440" cy="320040"/>
+            <a:off x="3544671" y="4434840"/>
+            <a:ext cx="2423160" cy="320040"/>
           </a:xfrm>
           <a:prstGeom prst="rect">
             <a:avLst/>
@@ -5129,14 +5731,14 @@
       </p:sp>
       <p:sp>
         <p:nvSpPr>
-          <p:cNvPr id="10" name="Rounded Rectangle 9"/>
-          <p:cNvSpPr/>
-          <p:nvPr/>
-        </p:nvSpPr>
-        <p:spPr>
-          <a:xfrm>
-            <a:off x="6233007" y="1188720"/>
-            <a:ext cx="2377440" cy="3200400"/>
+          <p:cNvPr id="17" name="Rounded Rectangle 16"/>
+          <p:cNvSpPr/>
+          <p:nvPr/>
+        </p:nvSpPr>
+        <p:spPr>
+          <a:xfrm>
+            <a:off x="6223863" y="1188720"/>
+            <a:ext cx="2423160" cy="3154680"/>
           </a:xfrm>
           <a:prstGeom prst="roundRect">
             <a:avLst>
@@ -5175,7 +5777,7 @@
             <a:r>
               <a:rPr sz="1400" b="0">
                 <a:solidFill>
-                  <a:srgbClr val="AAAAAA"/>
+                  <a:srgbClr val="A8A8B0"/>
                 </a:solidFill>
                 <a:latin typeface="Arial"/>
                 <a:ea typeface="Arial"/>
@@ -5187,14 +5789,14 @@
       </p:sp>
       <p:sp>
         <p:nvSpPr>
-          <p:cNvPr id="11" name="Rectangle 10"/>
-          <p:cNvSpPr/>
-          <p:nvPr/>
-        </p:nvSpPr>
-        <p:spPr>
-          <a:xfrm>
-            <a:off x="6233007" y="1188720"/>
-            <a:ext cx="2377440" cy="256032"/>
+          <p:cNvPr id="18" name="Rectangle 17"/>
+          <p:cNvSpPr/>
+          <p:nvPr/>
+        </p:nvSpPr>
+        <p:spPr>
+          <a:xfrm>
+            <a:off x="6223863" y="1188720"/>
+            <a:ext cx="2423160" cy="237744"/>
           </a:xfrm>
           <a:prstGeom prst="rect">
             <a:avLst/>
@@ -5230,14 +5832,14 @@
       </p:sp>
       <p:sp>
         <p:nvSpPr>
-          <p:cNvPr id="12" name="TextBox 11"/>
+          <p:cNvPr id="19" name="TextBox 18"/>
           <p:cNvSpPr txBox="1"/>
           <p:nvPr/>
         </p:nvSpPr>
         <p:spPr>
           <a:xfrm>
-            <a:off x="6233007" y="4480560"/>
-            <a:ext cx="2377440" cy="320040"/>
+            <a:off x="6223863" y="4434840"/>
+            <a:ext cx="2423160" cy="320040"/>
           </a:xfrm>
           <a:prstGeom prst="rect">
             <a:avLst/>
@@ -5266,14 +5868,14 @@
       </p:sp>
       <p:sp>
         <p:nvSpPr>
-          <p:cNvPr id="13" name="Rounded Rectangle 12"/>
-          <p:cNvSpPr/>
-          <p:nvPr/>
-        </p:nvSpPr>
-        <p:spPr>
-          <a:xfrm>
-            <a:off x="8884767" y="1188720"/>
-            <a:ext cx="2377440" cy="3200400"/>
+          <p:cNvPr id="20" name="Rounded Rectangle 19"/>
+          <p:cNvSpPr/>
+          <p:nvPr/>
+        </p:nvSpPr>
+        <p:spPr>
+          <a:xfrm>
+            <a:off x="8903055" y="1188720"/>
+            <a:ext cx="2423160" cy="3154680"/>
           </a:xfrm>
           <a:prstGeom prst="roundRect">
             <a:avLst>
@@ -5312,7 +5914,7 @@
             <a:r>
               <a:rPr sz="1400" b="0">
                 <a:solidFill>
-                  <a:srgbClr val="AAAAAA"/>
+                  <a:srgbClr val="A8A8B0"/>
                 </a:solidFill>
                 <a:latin typeface="Arial"/>
                 <a:ea typeface="Arial"/>
@@ -5324,14 +5926,14 @@
       </p:sp>
       <p:sp>
         <p:nvSpPr>
-          <p:cNvPr id="14" name="Rectangle 13"/>
-          <p:cNvSpPr/>
-          <p:nvPr/>
-        </p:nvSpPr>
-        <p:spPr>
-          <a:xfrm>
-            <a:off x="8884767" y="1188720"/>
-            <a:ext cx="2377440" cy="256032"/>
+          <p:cNvPr id="21" name="Rectangle 20"/>
+          <p:cNvSpPr/>
+          <p:nvPr/>
+        </p:nvSpPr>
+        <p:spPr>
+          <a:xfrm>
+            <a:off x="8903055" y="1188720"/>
+            <a:ext cx="2423160" cy="237744"/>
           </a:xfrm>
           <a:prstGeom prst="rect">
             <a:avLst/>
@@ -5367,14 +5969,14 @@
       </p:sp>
       <p:sp>
         <p:nvSpPr>
-          <p:cNvPr id="15" name="TextBox 14"/>
+          <p:cNvPr id="22" name="TextBox 21"/>
           <p:cNvSpPr txBox="1"/>
           <p:nvPr/>
         </p:nvSpPr>
         <p:spPr>
           <a:xfrm>
-            <a:off x="8884767" y="4480560"/>
-            <a:ext cx="2377440" cy="320040"/>
+            <a:off x="8903055" y="4434840"/>
+            <a:ext cx="2423160" cy="320040"/>
           </a:xfrm>
           <a:prstGeom prst="rect">
             <a:avLst/>
@@ -5403,14 +6005,14 @@
       </p:sp>
       <p:sp>
         <p:nvSpPr>
-          <p:cNvPr id="16" name="TextBox 15"/>
+          <p:cNvPr id="23" name="TextBox 22"/>
           <p:cNvSpPr txBox="1"/>
           <p:nvPr/>
         </p:nvSpPr>
         <p:spPr>
           <a:xfrm>
-            <a:off x="548640" y="5394960"/>
-            <a:ext cx="10972800" cy="502920"/>
+            <a:off x="640080" y="5349240"/>
+            <a:ext cx="10881360" cy="502920"/>
           </a:xfrm>
           <a:prstGeom prst="rect">
             <a:avLst/>
@@ -5439,14 +6041,57 @@
       </p:sp>
       <p:sp>
         <p:nvSpPr>
-          <p:cNvPr id="17" name="TextBox 16"/>
+          <p:cNvPr id="24" name="Rectangle 23"/>
+          <p:cNvSpPr/>
+          <p:nvPr/>
+        </p:nvSpPr>
+        <p:spPr>
+          <a:xfrm>
+            <a:off x="457200" y="6355080"/>
+            <a:ext cx="11247120" cy="12700"/>
+          </a:xfrm>
+          <a:prstGeom prst="rect">
+            <a:avLst/>
+          </a:prstGeom>
+          <a:solidFill>
+            <a:srgbClr val="D4AF37"/>
+          </a:solidFill>
+          <a:ln>
+            <a:noFill/>
+          </a:ln>
+        </p:spPr>
+        <p:style>
+          <a:lnRef idx="1">
+            <a:schemeClr val="accent1"/>
+          </a:lnRef>
+          <a:fillRef idx="3">
+            <a:schemeClr val="accent1"/>
+          </a:fillRef>
+          <a:effectRef idx="2">
+            <a:schemeClr val="accent1"/>
+          </a:effectRef>
+          <a:fontRef idx="minor">
+            <a:schemeClr val="lt1"/>
+          </a:fontRef>
+        </p:style>
+        <p:txBody>
+          <a:bodyPr rtlCol="0" anchor="ctr"/>
+          <a:lstStyle/>
+          <a:p>
+            <a:pPr algn="ctr"/>
+          </a:p>
+        </p:txBody>
+      </p:sp>
+      <p:sp>
+        <p:nvSpPr>
+          <p:cNvPr id="25" name="TextBox 24"/>
           <p:cNvSpPr txBox="1"/>
           <p:nvPr/>
         </p:nvSpPr>
         <p:spPr>
           <a:xfrm>
-            <a:off x="7772400" y="6446520"/>
-            <a:ext cx="4114800" cy="320040"/>
+            <a:off x="7589520" y="6419088"/>
+            <a:ext cx="4297680" cy="292608"/>
           </a:xfrm>
           <a:prstGeom prst="rect">
             <a:avLst/>
@@ -5463,56 +6108,13 @@
             <a:r>
               <a:rPr sz="1000" b="0">
                 <a:solidFill>
-                  <a:srgbClr val="AAAAAA"/>
+                  <a:srgbClr val="A8A8B0"/>
                 </a:solidFill>
                 <a:latin typeface="Arial"/>
                 <a:ea typeface="Arial"/>
               </a:rPr>
               <a:t>光影盟特训营  ·  10/14</a:t>
             </a:r>
-          </a:p>
-        </p:txBody>
-      </p:sp>
-      <p:sp>
-        <p:nvSpPr>
-          <p:cNvPr id="18" name="Rectangle 17"/>
-          <p:cNvSpPr/>
-          <p:nvPr/>
-        </p:nvSpPr>
-        <p:spPr>
-          <a:xfrm>
-            <a:off x="457200" y="6400800"/>
-            <a:ext cx="11247120" cy="12700"/>
-          </a:xfrm>
-          <a:prstGeom prst="rect">
-            <a:avLst/>
-          </a:prstGeom>
-          <a:solidFill>
-            <a:srgbClr val="D4AF37"/>
-          </a:solidFill>
-          <a:ln>
-            <a:noFill/>
-          </a:ln>
-        </p:spPr>
-        <p:style>
-          <a:lnRef idx="1">
-            <a:schemeClr val="accent1"/>
-          </a:lnRef>
-          <a:fillRef idx="3">
-            <a:schemeClr val="accent1"/>
-          </a:fillRef>
-          <a:effectRef idx="2">
-            <a:schemeClr val="accent1"/>
-          </a:effectRef>
-          <a:fontRef idx="minor">
-            <a:schemeClr val="lt1"/>
-          </a:fontRef>
-        </p:style>
-        <p:txBody>
-          <a:bodyPr rtlCol="0" anchor="ctr"/>
-          <a:lstStyle/>
-          <a:p>
-            <a:pPr algn="ctr"/>
           </a:p>
         </p:txBody>
       </p:sp>
@@ -5544,14 +6146,272 @@
       <p:grpSpPr/>
       <p:sp>
         <p:nvSpPr>
-          <p:cNvPr id="2" name="TextBox 1"/>
+          <p:cNvPr id="2" name="Rectangle 1"/>
+          <p:cNvSpPr/>
+          <p:nvPr/>
+        </p:nvSpPr>
+        <p:spPr>
+          <a:xfrm>
+            <a:off x="256032" y="201168"/>
+            <a:ext cx="11676888" cy="12700"/>
+          </a:xfrm>
+          <a:prstGeom prst="rect">
+            <a:avLst/>
+          </a:prstGeom>
+          <a:solidFill>
+            <a:srgbClr val="D4AF37"/>
+          </a:solidFill>
+          <a:ln>
+            <a:noFill/>
+          </a:ln>
+        </p:spPr>
+        <p:style>
+          <a:lnRef idx="1">
+            <a:schemeClr val="accent1"/>
+          </a:lnRef>
+          <a:fillRef idx="3">
+            <a:schemeClr val="accent1"/>
+          </a:fillRef>
+          <a:effectRef idx="2">
+            <a:schemeClr val="accent1"/>
+          </a:effectRef>
+          <a:fontRef idx="minor">
+            <a:schemeClr val="lt1"/>
+          </a:fontRef>
+        </p:style>
+        <p:txBody>
+          <a:bodyPr rtlCol="0" anchor="ctr"/>
+          <a:lstStyle/>
+          <a:p>
+            <a:pPr algn="ctr"/>
+          </a:p>
+        </p:txBody>
+      </p:sp>
+      <p:sp>
+        <p:nvSpPr>
+          <p:cNvPr id="3" name="Rectangle 2"/>
+          <p:cNvSpPr/>
+          <p:nvPr/>
+        </p:nvSpPr>
+        <p:spPr>
+          <a:xfrm>
+            <a:off x="256032" y="6565392"/>
+            <a:ext cx="11676888" cy="12700"/>
+          </a:xfrm>
+          <a:prstGeom prst="rect">
+            <a:avLst/>
+          </a:prstGeom>
+          <a:solidFill>
+            <a:srgbClr val="D4AF37"/>
+          </a:solidFill>
+          <a:ln>
+            <a:noFill/>
+          </a:ln>
+        </p:spPr>
+        <p:style>
+          <a:lnRef idx="1">
+            <a:schemeClr val="accent1"/>
+          </a:lnRef>
+          <a:fillRef idx="3">
+            <a:schemeClr val="accent1"/>
+          </a:fillRef>
+          <a:effectRef idx="2">
+            <a:schemeClr val="accent1"/>
+          </a:effectRef>
+          <a:fontRef idx="minor">
+            <a:schemeClr val="lt1"/>
+          </a:fontRef>
+        </p:style>
+        <p:txBody>
+          <a:bodyPr rtlCol="0" anchor="ctr"/>
+          <a:lstStyle/>
+          <a:p>
+            <a:pPr algn="ctr"/>
+          </a:p>
+        </p:txBody>
+      </p:sp>
+      <p:sp>
+        <p:nvSpPr>
+          <p:cNvPr id="4" name="Rectangle 3"/>
+          <p:cNvSpPr/>
+          <p:nvPr/>
+        </p:nvSpPr>
+        <p:spPr>
+          <a:xfrm>
+            <a:off x="256032" y="201168"/>
+            <a:ext cx="12700" cy="6364224"/>
+          </a:xfrm>
+          <a:prstGeom prst="rect">
+            <a:avLst/>
+          </a:prstGeom>
+          <a:solidFill>
+            <a:srgbClr val="D4AF37"/>
+          </a:solidFill>
+          <a:ln>
+            <a:noFill/>
+          </a:ln>
+        </p:spPr>
+        <p:style>
+          <a:lnRef idx="1">
+            <a:schemeClr val="accent1"/>
+          </a:lnRef>
+          <a:fillRef idx="3">
+            <a:schemeClr val="accent1"/>
+          </a:fillRef>
+          <a:effectRef idx="2">
+            <a:schemeClr val="accent1"/>
+          </a:effectRef>
+          <a:fontRef idx="minor">
+            <a:schemeClr val="lt1"/>
+          </a:fontRef>
+        </p:style>
+        <p:txBody>
+          <a:bodyPr rtlCol="0" anchor="ctr"/>
+          <a:lstStyle/>
+          <a:p>
+            <a:pPr algn="ctr"/>
+          </a:p>
+        </p:txBody>
+      </p:sp>
+      <p:sp>
+        <p:nvSpPr>
+          <p:cNvPr id="5" name="Rectangle 4"/>
+          <p:cNvSpPr/>
+          <p:nvPr/>
+        </p:nvSpPr>
+        <p:spPr>
+          <a:xfrm>
+            <a:off x="11932920" y="201168"/>
+            <a:ext cx="12700" cy="6364224"/>
+          </a:xfrm>
+          <a:prstGeom prst="rect">
+            <a:avLst/>
+          </a:prstGeom>
+          <a:solidFill>
+            <a:srgbClr val="D4AF37"/>
+          </a:solidFill>
+          <a:ln>
+            <a:noFill/>
+          </a:ln>
+        </p:spPr>
+        <p:style>
+          <a:lnRef idx="1">
+            <a:schemeClr val="accent1"/>
+          </a:lnRef>
+          <a:fillRef idx="3">
+            <a:schemeClr val="accent1"/>
+          </a:fillRef>
+          <a:effectRef idx="2">
+            <a:schemeClr val="accent1"/>
+          </a:effectRef>
+          <a:fontRef idx="minor">
+            <a:schemeClr val="lt1"/>
+          </a:fontRef>
+        </p:style>
+        <p:txBody>
+          <a:bodyPr rtlCol="0" anchor="ctr"/>
+          <a:lstStyle/>
+          <a:p>
+            <a:pPr algn="ctr"/>
+          </a:p>
+        </p:txBody>
+      </p:sp>
+      <p:sp>
+        <p:nvSpPr>
+          <p:cNvPr id="6" name="Rectangle 5"/>
+          <p:cNvSpPr/>
+          <p:nvPr/>
+        </p:nvSpPr>
+        <p:spPr>
+          <a:xfrm>
+            <a:off x="320040" y="365760"/>
+            <a:ext cx="54864" cy="5760720"/>
+          </a:xfrm>
+          <a:prstGeom prst="rect">
+            <a:avLst/>
+          </a:prstGeom>
+          <a:solidFill>
+            <a:srgbClr val="D4AF37"/>
+          </a:solidFill>
+          <a:ln>
+            <a:noFill/>
+          </a:ln>
+        </p:spPr>
+        <p:style>
+          <a:lnRef idx="1">
+            <a:schemeClr val="accent1"/>
+          </a:lnRef>
+          <a:fillRef idx="3">
+            <a:schemeClr val="accent1"/>
+          </a:fillRef>
+          <a:effectRef idx="2">
+            <a:schemeClr val="accent1"/>
+          </a:effectRef>
+          <a:fontRef idx="minor">
+            <a:schemeClr val="lt1"/>
+          </a:fontRef>
+        </p:style>
+        <p:txBody>
+          <a:bodyPr rtlCol="0" anchor="ctr"/>
+          <a:lstStyle/>
+          <a:p>
+            <a:pPr algn="ctr"/>
+          </a:p>
+        </p:txBody>
+      </p:sp>
+      <p:sp>
+        <p:nvSpPr>
+          <p:cNvPr id="7" name="Rectangle 6"/>
+          <p:cNvSpPr/>
+          <p:nvPr/>
+        </p:nvSpPr>
+        <p:spPr>
+          <a:xfrm>
+            <a:off x="448056" y="365760"/>
+            <a:ext cx="12700" cy="5760720"/>
+          </a:xfrm>
+          <a:prstGeom prst="rect">
+            <a:avLst/>
+          </a:prstGeom>
+          <a:solidFill>
+            <a:srgbClr val="2A2A3E"/>
+          </a:solidFill>
+          <a:ln>
+            <a:noFill/>
+          </a:ln>
+        </p:spPr>
+        <p:style>
+          <a:lnRef idx="1">
+            <a:schemeClr val="accent1"/>
+          </a:lnRef>
+          <a:fillRef idx="3">
+            <a:schemeClr val="accent1"/>
+          </a:fillRef>
+          <a:effectRef idx="2">
+            <a:schemeClr val="accent1"/>
+          </a:effectRef>
+          <a:fontRef idx="minor">
+            <a:schemeClr val="lt1"/>
+          </a:fontRef>
+        </p:style>
+        <p:txBody>
+          <a:bodyPr rtlCol="0" anchor="ctr"/>
+          <a:lstStyle/>
+          <a:p>
+            <a:pPr algn="ctr"/>
+          </a:p>
+        </p:txBody>
+      </p:sp>
+      <p:sp>
+        <p:nvSpPr>
+          <p:cNvPr id="8" name="TextBox 7"/>
           <p:cNvSpPr txBox="1"/>
           <p:nvPr/>
         </p:nvSpPr>
         <p:spPr>
           <a:xfrm>
-            <a:off x="548640" y="292608"/>
-            <a:ext cx="10972800" cy="640080"/>
+            <a:off x="640080" y="292608"/>
+            <a:ext cx="10789920" cy="594360"/>
           </a:xfrm>
           <a:prstGeom prst="rect">
             <a:avLst/>
@@ -5580,14 +6440,14 @@
       </p:sp>
       <p:sp>
         <p:nvSpPr>
-          <p:cNvPr id="3" name="Rectangle 2"/>
-          <p:cNvSpPr/>
-          <p:nvPr/>
-        </p:nvSpPr>
-        <p:spPr>
-          <a:xfrm>
-            <a:off x="548640" y="932688"/>
-            <a:ext cx="2011680" cy="31750"/>
+          <p:cNvPr id="9" name="Rectangle 8"/>
+          <p:cNvSpPr/>
+          <p:nvPr/>
+        </p:nvSpPr>
+        <p:spPr>
+          <a:xfrm>
+            <a:off x="640080" y="896112"/>
+            <a:ext cx="2194560" cy="31750"/>
           </a:xfrm>
           <a:prstGeom prst="rect">
             <a:avLst/>
@@ -5623,20 +6483,63 @@
       </p:sp>
       <p:sp>
         <p:nvSpPr>
-          <p:cNvPr id="4" name="Rectangle 3"/>
-          <p:cNvSpPr/>
-          <p:nvPr/>
-        </p:nvSpPr>
-        <p:spPr>
-          <a:xfrm>
-            <a:off x="2286000" y="1280160"/>
-            <a:ext cx="7589520" cy="3474720"/>
-          </a:xfrm>
-          <a:prstGeom prst="rect">
-            <a:avLst/>
-          </a:prstGeom>
-          <a:solidFill>
-            <a:srgbClr val="202035"/>
+          <p:cNvPr id="10" name="Rectangle 9"/>
+          <p:cNvSpPr/>
+          <p:nvPr/>
+        </p:nvSpPr>
+        <p:spPr>
+          <a:xfrm>
+            <a:off x="3017520" y="896112"/>
+            <a:ext cx="8503920" cy="9525"/>
+          </a:xfrm>
+          <a:prstGeom prst="rect">
+            <a:avLst/>
+          </a:prstGeom>
+          <a:solidFill>
+            <a:srgbClr val="D4AF37"/>
+          </a:solidFill>
+          <a:ln>
+            <a:noFill/>
+          </a:ln>
+        </p:spPr>
+        <p:style>
+          <a:lnRef idx="1">
+            <a:schemeClr val="accent1"/>
+          </a:lnRef>
+          <a:fillRef idx="3">
+            <a:schemeClr val="accent1"/>
+          </a:fillRef>
+          <a:effectRef idx="2">
+            <a:schemeClr val="accent1"/>
+          </a:effectRef>
+          <a:fontRef idx="minor">
+            <a:schemeClr val="lt1"/>
+          </a:fontRef>
+        </p:style>
+        <p:txBody>
+          <a:bodyPr rtlCol="0" anchor="ctr"/>
+          <a:lstStyle/>
+          <a:p>
+            <a:pPr algn="ctr"/>
+          </a:p>
+        </p:txBody>
+      </p:sp>
+      <p:sp>
+        <p:nvSpPr>
+          <p:cNvPr id="11" name="Rectangle 10"/>
+          <p:cNvSpPr/>
+          <p:nvPr/>
+        </p:nvSpPr>
+        <p:spPr>
+          <a:xfrm>
+            <a:off x="2194560" y="1280160"/>
+            <a:ext cx="7772400" cy="3474720"/>
+          </a:xfrm>
+          <a:prstGeom prst="rect">
+            <a:avLst/>
+          </a:prstGeom>
+          <a:solidFill>
+            <a:srgbClr val="121222"/>
           </a:solidFill>
           <a:ln w="25400" cap="flat">
             <a:solidFill>
@@ -5667,7 +6570,7 @@
             <a:r>
               <a:rPr sz="1400" b="0">
                 <a:solidFill>
-                  <a:srgbClr val="AAAAAA"/>
+                  <a:srgbClr val="A8A8B0"/>
                 </a:solidFill>
                 <a:latin typeface="Arial"/>
                 <a:ea typeface="Arial"/>
@@ -5679,14 +6582,14 @@
       </p:sp>
       <p:sp>
         <p:nvSpPr>
-          <p:cNvPr id="5" name="TextBox 4"/>
+          <p:cNvPr id="12" name="TextBox 11"/>
           <p:cNvSpPr txBox="1"/>
           <p:nvPr/>
         </p:nvSpPr>
         <p:spPr>
           <a:xfrm>
-            <a:off x="548640" y="5029200"/>
-            <a:ext cx="10972800" cy="502920"/>
+            <a:off x="640080" y="5029200"/>
+            <a:ext cx="10881360" cy="502920"/>
           </a:xfrm>
           <a:prstGeom prst="rect">
             <a:avLst/>
@@ -5715,14 +6618,57 @@
       </p:sp>
       <p:sp>
         <p:nvSpPr>
-          <p:cNvPr id="6" name="TextBox 5"/>
+          <p:cNvPr id="13" name="Rectangle 12"/>
+          <p:cNvSpPr/>
+          <p:nvPr/>
+        </p:nvSpPr>
+        <p:spPr>
+          <a:xfrm>
+            <a:off x="457200" y="6355080"/>
+            <a:ext cx="11247120" cy="12700"/>
+          </a:xfrm>
+          <a:prstGeom prst="rect">
+            <a:avLst/>
+          </a:prstGeom>
+          <a:solidFill>
+            <a:srgbClr val="D4AF37"/>
+          </a:solidFill>
+          <a:ln>
+            <a:noFill/>
+          </a:ln>
+        </p:spPr>
+        <p:style>
+          <a:lnRef idx="1">
+            <a:schemeClr val="accent1"/>
+          </a:lnRef>
+          <a:fillRef idx="3">
+            <a:schemeClr val="accent1"/>
+          </a:fillRef>
+          <a:effectRef idx="2">
+            <a:schemeClr val="accent1"/>
+          </a:effectRef>
+          <a:fontRef idx="minor">
+            <a:schemeClr val="lt1"/>
+          </a:fontRef>
+        </p:style>
+        <p:txBody>
+          <a:bodyPr rtlCol="0" anchor="ctr"/>
+          <a:lstStyle/>
+          <a:p>
+            <a:pPr algn="ctr"/>
+          </a:p>
+        </p:txBody>
+      </p:sp>
+      <p:sp>
+        <p:nvSpPr>
+          <p:cNvPr id="14" name="TextBox 13"/>
           <p:cNvSpPr txBox="1"/>
           <p:nvPr/>
         </p:nvSpPr>
         <p:spPr>
           <a:xfrm>
-            <a:off x="7772400" y="6446520"/>
-            <a:ext cx="4114800" cy="320040"/>
+            <a:off x="7589520" y="6419088"/>
+            <a:ext cx="4297680" cy="292608"/>
           </a:xfrm>
           <a:prstGeom prst="rect">
             <a:avLst/>
@@ -5739,56 +6685,13 @@
             <a:r>
               <a:rPr sz="1000" b="0">
                 <a:solidFill>
-                  <a:srgbClr val="AAAAAA"/>
+                  <a:srgbClr val="A8A8B0"/>
                 </a:solidFill>
                 <a:latin typeface="Arial"/>
                 <a:ea typeface="Arial"/>
               </a:rPr>
               <a:t>光影盟特训营  ·  11/14</a:t>
             </a:r>
-          </a:p>
-        </p:txBody>
-      </p:sp>
-      <p:sp>
-        <p:nvSpPr>
-          <p:cNvPr id="7" name="Rectangle 6"/>
-          <p:cNvSpPr/>
-          <p:nvPr/>
-        </p:nvSpPr>
-        <p:spPr>
-          <a:xfrm>
-            <a:off x="457200" y="6400800"/>
-            <a:ext cx="11247120" cy="12700"/>
-          </a:xfrm>
-          <a:prstGeom prst="rect">
-            <a:avLst/>
-          </a:prstGeom>
-          <a:solidFill>
-            <a:srgbClr val="D4AF37"/>
-          </a:solidFill>
-          <a:ln>
-            <a:noFill/>
-          </a:ln>
-        </p:spPr>
-        <p:style>
-          <a:lnRef idx="1">
-            <a:schemeClr val="accent1"/>
-          </a:lnRef>
-          <a:fillRef idx="3">
-            <a:schemeClr val="accent1"/>
-          </a:fillRef>
-          <a:effectRef idx="2">
-            <a:schemeClr val="accent1"/>
-          </a:effectRef>
-          <a:fontRef idx="minor">
-            <a:schemeClr val="lt1"/>
-          </a:fontRef>
-        </p:style>
-        <p:txBody>
-          <a:bodyPr rtlCol="0" anchor="ctr"/>
-          <a:lstStyle/>
-          <a:p>
-            <a:pPr algn="ctr"/>
           </a:p>
         </p:txBody>
       </p:sp>
@@ -5820,14 +6723,272 @@
       <p:grpSpPr/>
       <p:sp>
         <p:nvSpPr>
-          <p:cNvPr id="2" name="TextBox 1"/>
+          <p:cNvPr id="2" name="Rectangle 1"/>
+          <p:cNvSpPr/>
+          <p:nvPr/>
+        </p:nvSpPr>
+        <p:spPr>
+          <a:xfrm>
+            <a:off x="256032" y="201168"/>
+            <a:ext cx="11676888" cy="12700"/>
+          </a:xfrm>
+          <a:prstGeom prst="rect">
+            <a:avLst/>
+          </a:prstGeom>
+          <a:solidFill>
+            <a:srgbClr val="D4AF37"/>
+          </a:solidFill>
+          <a:ln>
+            <a:noFill/>
+          </a:ln>
+        </p:spPr>
+        <p:style>
+          <a:lnRef idx="1">
+            <a:schemeClr val="accent1"/>
+          </a:lnRef>
+          <a:fillRef idx="3">
+            <a:schemeClr val="accent1"/>
+          </a:fillRef>
+          <a:effectRef idx="2">
+            <a:schemeClr val="accent1"/>
+          </a:effectRef>
+          <a:fontRef idx="minor">
+            <a:schemeClr val="lt1"/>
+          </a:fontRef>
+        </p:style>
+        <p:txBody>
+          <a:bodyPr rtlCol="0" anchor="ctr"/>
+          <a:lstStyle/>
+          <a:p>
+            <a:pPr algn="ctr"/>
+          </a:p>
+        </p:txBody>
+      </p:sp>
+      <p:sp>
+        <p:nvSpPr>
+          <p:cNvPr id="3" name="Rectangle 2"/>
+          <p:cNvSpPr/>
+          <p:nvPr/>
+        </p:nvSpPr>
+        <p:spPr>
+          <a:xfrm>
+            <a:off x="256032" y="6565392"/>
+            <a:ext cx="11676888" cy="12700"/>
+          </a:xfrm>
+          <a:prstGeom prst="rect">
+            <a:avLst/>
+          </a:prstGeom>
+          <a:solidFill>
+            <a:srgbClr val="D4AF37"/>
+          </a:solidFill>
+          <a:ln>
+            <a:noFill/>
+          </a:ln>
+        </p:spPr>
+        <p:style>
+          <a:lnRef idx="1">
+            <a:schemeClr val="accent1"/>
+          </a:lnRef>
+          <a:fillRef idx="3">
+            <a:schemeClr val="accent1"/>
+          </a:fillRef>
+          <a:effectRef idx="2">
+            <a:schemeClr val="accent1"/>
+          </a:effectRef>
+          <a:fontRef idx="minor">
+            <a:schemeClr val="lt1"/>
+          </a:fontRef>
+        </p:style>
+        <p:txBody>
+          <a:bodyPr rtlCol="0" anchor="ctr"/>
+          <a:lstStyle/>
+          <a:p>
+            <a:pPr algn="ctr"/>
+          </a:p>
+        </p:txBody>
+      </p:sp>
+      <p:sp>
+        <p:nvSpPr>
+          <p:cNvPr id="4" name="Rectangle 3"/>
+          <p:cNvSpPr/>
+          <p:nvPr/>
+        </p:nvSpPr>
+        <p:spPr>
+          <a:xfrm>
+            <a:off x="256032" y="201168"/>
+            <a:ext cx="12700" cy="6364224"/>
+          </a:xfrm>
+          <a:prstGeom prst="rect">
+            <a:avLst/>
+          </a:prstGeom>
+          <a:solidFill>
+            <a:srgbClr val="D4AF37"/>
+          </a:solidFill>
+          <a:ln>
+            <a:noFill/>
+          </a:ln>
+        </p:spPr>
+        <p:style>
+          <a:lnRef idx="1">
+            <a:schemeClr val="accent1"/>
+          </a:lnRef>
+          <a:fillRef idx="3">
+            <a:schemeClr val="accent1"/>
+          </a:fillRef>
+          <a:effectRef idx="2">
+            <a:schemeClr val="accent1"/>
+          </a:effectRef>
+          <a:fontRef idx="minor">
+            <a:schemeClr val="lt1"/>
+          </a:fontRef>
+        </p:style>
+        <p:txBody>
+          <a:bodyPr rtlCol="0" anchor="ctr"/>
+          <a:lstStyle/>
+          <a:p>
+            <a:pPr algn="ctr"/>
+          </a:p>
+        </p:txBody>
+      </p:sp>
+      <p:sp>
+        <p:nvSpPr>
+          <p:cNvPr id="5" name="Rectangle 4"/>
+          <p:cNvSpPr/>
+          <p:nvPr/>
+        </p:nvSpPr>
+        <p:spPr>
+          <a:xfrm>
+            <a:off x="11932920" y="201168"/>
+            <a:ext cx="12700" cy="6364224"/>
+          </a:xfrm>
+          <a:prstGeom prst="rect">
+            <a:avLst/>
+          </a:prstGeom>
+          <a:solidFill>
+            <a:srgbClr val="D4AF37"/>
+          </a:solidFill>
+          <a:ln>
+            <a:noFill/>
+          </a:ln>
+        </p:spPr>
+        <p:style>
+          <a:lnRef idx="1">
+            <a:schemeClr val="accent1"/>
+          </a:lnRef>
+          <a:fillRef idx="3">
+            <a:schemeClr val="accent1"/>
+          </a:fillRef>
+          <a:effectRef idx="2">
+            <a:schemeClr val="accent1"/>
+          </a:effectRef>
+          <a:fontRef idx="minor">
+            <a:schemeClr val="lt1"/>
+          </a:fontRef>
+        </p:style>
+        <p:txBody>
+          <a:bodyPr rtlCol="0" anchor="ctr"/>
+          <a:lstStyle/>
+          <a:p>
+            <a:pPr algn="ctr"/>
+          </a:p>
+        </p:txBody>
+      </p:sp>
+      <p:sp>
+        <p:nvSpPr>
+          <p:cNvPr id="6" name="Rectangle 5"/>
+          <p:cNvSpPr/>
+          <p:nvPr/>
+        </p:nvSpPr>
+        <p:spPr>
+          <a:xfrm>
+            <a:off x="320040" y="365760"/>
+            <a:ext cx="54864" cy="5760720"/>
+          </a:xfrm>
+          <a:prstGeom prst="rect">
+            <a:avLst/>
+          </a:prstGeom>
+          <a:solidFill>
+            <a:srgbClr val="D4AF37"/>
+          </a:solidFill>
+          <a:ln>
+            <a:noFill/>
+          </a:ln>
+        </p:spPr>
+        <p:style>
+          <a:lnRef idx="1">
+            <a:schemeClr val="accent1"/>
+          </a:lnRef>
+          <a:fillRef idx="3">
+            <a:schemeClr val="accent1"/>
+          </a:fillRef>
+          <a:effectRef idx="2">
+            <a:schemeClr val="accent1"/>
+          </a:effectRef>
+          <a:fontRef idx="minor">
+            <a:schemeClr val="lt1"/>
+          </a:fontRef>
+        </p:style>
+        <p:txBody>
+          <a:bodyPr rtlCol="0" anchor="ctr"/>
+          <a:lstStyle/>
+          <a:p>
+            <a:pPr algn="ctr"/>
+          </a:p>
+        </p:txBody>
+      </p:sp>
+      <p:sp>
+        <p:nvSpPr>
+          <p:cNvPr id="7" name="Rectangle 6"/>
+          <p:cNvSpPr/>
+          <p:nvPr/>
+        </p:nvSpPr>
+        <p:spPr>
+          <a:xfrm>
+            <a:off x="448056" y="365760"/>
+            <a:ext cx="12700" cy="5760720"/>
+          </a:xfrm>
+          <a:prstGeom prst="rect">
+            <a:avLst/>
+          </a:prstGeom>
+          <a:solidFill>
+            <a:srgbClr val="2A2A3E"/>
+          </a:solidFill>
+          <a:ln>
+            <a:noFill/>
+          </a:ln>
+        </p:spPr>
+        <p:style>
+          <a:lnRef idx="1">
+            <a:schemeClr val="accent1"/>
+          </a:lnRef>
+          <a:fillRef idx="3">
+            <a:schemeClr val="accent1"/>
+          </a:fillRef>
+          <a:effectRef idx="2">
+            <a:schemeClr val="accent1"/>
+          </a:effectRef>
+          <a:fontRef idx="minor">
+            <a:schemeClr val="lt1"/>
+          </a:fontRef>
+        </p:style>
+        <p:txBody>
+          <a:bodyPr rtlCol="0" anchor="ctr"/>
+          <a:lstStyle/>
+          <a:p>
+            <a:pPr algn="ctr"/>
+          </a:p>
+        </p:txBody>
+      </p:sp>
+      <p:sp>
+        <p:nvSpPr>
+          <p:cNvPr id="8" name="TextBox 7"/>
           <p:cNvSpPr txBox="1"/>
           <p:nvPr/>
         </p:nvSpPr>
         <p:spPr>
           <a:xfrm>
-            <a:off x="548640" y="292608"/>
-            <a:ext cx="10972800" cy="640080"/>
+            <a:off x="640080" y="292608"/>
+            <a:ext cx="10789920" cy="594360"/>
           </a:xfrm>
           <a:prstGeom prst="rect">
             <a:avLst/>
@@ -5856,14 +7017,14 @@
       </p:sp>
       <p:sp>
         <p:nvSpPr>
-          <p:cNvPr id="3" name="Rectangle 2"/>
-          <p:cNvSpPr/>
-          <p:nvPr/>
-        </p:nvSpPr>
-        <p:spPr>
-          <a:xfrm>
-            <a:off x="548640" y="932688"/>
-            <a:ext cx="2011680" cy="31750"/>
+          <p:cNvPr id="9" name="Rectangle 8"/>
+          <p:cNvSpPr/>
+          <p:nvPr/>
+        </p:nvSpPr>
+        <p:spPr>
+          <a:xfrm>
+            <a:off x="640080" y="896112"/>
+            <a:ext cx="2194560" cy="31750"/>
           </a:xfrm>
           <a:prstGeom prst="rect">
             <a:avLst/>
@@ -5899,14 +7060,57 @@
       </p:sp>
       <p:sp>
         <p:nvSpPr>
-          <p:cNvPr id="4" name="Rounded Rectangle 3"/>
-          <p:cNvSpPr/>
-          <p:nvPr/>
-        </p:nvSpPr>
-        <p:spPr>
-          <a:xfrm>
-            <a:off x="838047" y="1143000"/>
-            <a:ext cx="3291840" cy="2926080"/>
+          <p:cNvPr id="10" name="Rectangle 9"/>
+          <p:cNvSpPr/>
+          <p:nvPr/>
+        </p:nvSpPr>
+        <p:spPr>
+          <a:xfrm>
+            <a:off x="3017520" y="896112"/>
+            <a:ext cx="8503920" cy="9525"/>
+          </a:xfrm>
+          <a:prstGeom prst="rect">
+            <a:avLst/>
+          </a:prstGeom>
+          <a:solidFill>
+            <a:srgbClr val="D4AF37"/>
+          </a:solidFill>
+          <a:ln>
+            <a:noFill/>
+          </a:ln>
+        </p:spPr>
+        <p:style>
+          <a:lnRef idx="1">
+            <a:schemeClr val="accent1"/>
+          </a:lnRef>
+          <a:fillRef idx="3">
+            <a:schemeClr val="accent1"/>
+          </a:fillRef>
+          <a:effectRef idx="2">
+            <a:schemeClr val="accent1"/>
+          </a:effectRef>
+          <a:fontRef idx="minor">
+            <a:schemeClr val="lt1"/>
+          </a:fontRef>
+        </p:style>
+        <p:txBody>
+          <a:bodyPr rtlCol="0" anchor="ctr"/>
+          <a:lstStyle/>
+          <a:p>
+            <a:pPr algn="ctr"/>
+          </a:p>
+        </p:txBody>
+      </p:sp>
+      <p:sp>
+        <p:nvSpPr>
+          <p:cNvPr id="11" name="Rounded Rectangle 10"/>
+          <p:cNvSpPr/>
+          <p:nvPr/>
+        </p:nvSpPr>
+        <p:spPr>
+          <a:xfrm>
+            <a:off x="796899" y="1143000"/>
+            <a:ext cx="3337560" cy="2880360"/>
           </a:xfrm>
           <a:prstGeom prst="roundRect">
             <a:avLst>
@@ -5945,7 +7149,7 @@
             <a:r>
               <a:rPr sz="1400" b="0">
                 <a:solidFill>
-                  <a:srgbClr val="AAAAAA"/>
+                  <a:srgbClr val="A8A8B0"/>
                 </a:solidFill>
                 <a:latin typeface="Arial"/>
                 <a:ea typeface="Arial"/>
@@ -5957,14 +7161,14 @@
       </p:sp>
       <p:sp>
         <p:nvSpPr>
-          <p:cNvPr id="5" name="Rectangle 4"/>
-          <p:cNvSpPr/>
-          <p:nvPr/>
-        </p:nvSpPr>
-        <p:spPr>
-          <a:xfrm>
-            <a:off x="838047" y="1143000"/>
-            <a:ext cx="3291840" cy="234086"/>
+          <p:cNvPr id="12" name="Rectangle 11"/>
+          <p:cNvSpPr/>
+          <p:nvPr/>
+        </p:nvSpPr>
+        <p:spPr>
+          <a:xfrm>
+            <a:off x="796899" y="1143000"/>
+            <a:ext cx="3337560" cy="230428"/>
           </a:xfrm>
           <a:prstGeom prst="rect">
             <a:avLst/>
@@ -6000,14 +7204,14 @@
       </p:sp>
       <p:sp>
         <p:nvSpPr>
-          <p:cNvPr id="6" name="Rounded Rectangle 5"/>
-          <p:cNvSpPr/>
-          <p:nvPr/>
-        </p:nvSpPr>
-        <p:spPr>
-          <a:xfrm>
-            <a:off x="4449927" y="1143000"/>
-            <a:ext cx="3291840" cy="2926080"/>
+          <p:cNvPr id="13" name="Rounded Rectangle 12"/>
+          <p:cNvSpPr/>
+          <p:nvPr/>
+        </p:nvSpPr>
+        <p:spPr>
+          <a:xfrm>
+            <a:off x="4427067" y="1143000"/>
+            <a:ext cx="3337560" cy="2880360"/>
           </a:xfrm>
           <a:prstGeom prst="roundRect">
             <a:avLst>
@@ -6046,7 +7250,7 @@
             <a:r>
               <a:rPr sz="1400" b="0">
                 <a:solidFill>
-                  <a:srgbClr val="AAAAAA"/>
+                  <a:srgbClr val="A8A8B0"/>
                 </a:solidFill>
                 <a:latin typeface="Arial"/>
                 <a:ea typeface="Arial"/>
@@ -6058,14 +7262,14 @@
       </p:sp>
       <p:sp>
         <p:nvSpPr>
-          <p:cNvPr id="7" name="Rectangle 6"/>
-          <p:cNvSpPr/>
-          <p:nvPr/>
-        </p:nvSpPr>
-        <p:spPr>
-          <a:xfrm>
-            <a:off x="4449927" y="1143000"/>
-            <a:ext cx="3291840" cy="234086"/>
+          <p:cNvPr id="14" name="Rectangle 13"/>
+          <p:cNvSpPr/>
+          <p:nvPr/>
+        </p:nvSpPr>
+        <p:spPr>
+          <a:xfrm>
+            <a:off x="4427067" y="1143000"/>
+            <a:ext cx="3337560" cy="230428"/>
           </a:xfrm>
           <a:prstGeom prst="rect">
             <a:avLst/>
@@ -6101,14 +7305,14 @@
       </p:sp>
       <p:sp>
         <p:nvSpPr>
-          <p:cNvPr id="8" name="Rounded Rectangle 7"/>
-          <p:cNvSpPr/>
-          <p:nvPr/>
-        </p:nvSpPr>
-        <p:spPr>
-          <a:xfrm>
-            <a:off x="8061807" y="1143000"/>
-            <a:ext cx="3291840" cy="2926080"/>
+          <p:cNvPr id="15" name="Rounded Rectangle 14"/>
+          <p:cNvSpPr/>
+          <p:nvPr/>
+        </p:nvSpPr>
+        <p:spPr>
+          <a:xfrm>
+            <a:off x="8057235" y="1143000"/>
+            <a:ext cx="3337560" cy="2880360"/>
           </a:xfrm>
           <a:prstGeom prst="roundRect">
             <a:avLst>
@@ -6147,7 +7351,7 @@
             <a:r>
               <a:rPr sz="1400" b="0">
                 <a:solidFill>
-                  <a:srgbClr val="AAAAAA"/>
+                  <a:srgbClr val="A8A8B0"/>
                 </a:solidFill>
                 <a:latin typeface="Arial"/>
                 <a:ea typeface="Arial"/>
@@ -6159,14 +7363,14 @@
       </p:sp>
       <p:sp>
         <p:nvSpPr>
-          <p:cNvPr id="9" name="Rectangle 8"/>
-          <p:cNvSpPr/>
-          <p:nvPr/>
-        </p:nvSpPr>
-        <p:spPr>
-          <a:xfrm>
-            <a:off x="8061807" y="1143000"/>
-            <a:ext cx="3291840" cy="234086"/>
+          <p:cNvPr id="16" name="Rectangle 15"/>
+          <p:cNvSpPr/>
+          <p:nvPr/>
+        </p:nvSpPr>
+        <p:spPr>
+          <a:xfrm>
+            <a:off x="8057235" y="1143000"/>
+            <a:ext cx="3337560" cy="230428"/>
           </a:xfrm>
           <a:prstGeom prst="rect">
             <a:avLst/>
@@ -6202,14 +7406,14 @@
       </p:sp>
       <p:sp>
         <p:nvSpPr>
-          <p:cNvPr id="10" name="TextBox 9"/>
+          <p:cNvPr id="17" name="TextBox 16"/>
           <p:cNvSpPr txBox="1"/>
           <p:nvPr/>
         </p:nvSpPr>
         <p:spPr>
           <a:xfrm>
-            <a:off x="548640" y="4297680"/>
-            <a:ext cx="10972800" cy="365760"/>
+            <a:off x="548640" y="4251960"/>
+            <a:ext cx="11064240" cy="365760"/>
           </a:xfrm>
           <a:prstGeom prst="rect">
             <a:avLst/>
@@ -6238,14 +7442,14 @@
       </p:sp>
       <p:sp>
         <p:nvSpPr>
-          <p:cNvPr id="11" name="TextBox 10"/>
+          <p:cNvPr id="18" name="TextBox 17"/>
           <p:cNvSpPr txBox="1"/>
           <p:nvPr/>
         </p:nvSpPr>
         <p:spPr>
           <a:xfrm>
-            <a:off x="548640" y="4846320"/>
-            <a:ext cx="10972800" cy="640080"/>
+            <a:off x="548640" y="4754880"/>
+            <a:ext cx="11064240" cy="640080"/>
           </a:xfrm>
           <a:prstGeom prst="rect">
             <a:avLst/>
@@ -6274,14 +7478,57 @@
       </p:sp>
       <p:sp>
         <p:nvSpPr>
-          <p:cNvPr id="12" name="TextBox 11"/>
+          <p:cNvPr id="19" name="Rectangle 18"/>
+          <p:cNvSpPr/>
+          <p:nvPr/>
+        </p:nvSpPr>
+        <p:spPr>
+          <a:xfrm>
+            <a:off x="457200" y="6355080"/>
+            <a:ext cx="11247120" cy="12700"/>
+          </a:xfrm>
+          <a:prstGeom prst="rect">
+            <a:avLst/>
+          </a:prstGeom>
+          <a:solidFill>
+            <a:srgbClr val="D4AF37"/>
+          </a:solidFill>
+          <a:ln>
+            <a:noFill/>
+          </a:ln>
+        </p:spPr>
+        <p:style>
+          <a:lnRef idx="1">
+            <a:schemeClr val="accent1"/>
+          </a:lnRef>
+          <a:fillRef idx="3">
+            <a:schemeClr val="accent1"/>
+          </a:fillRef>
+          <a:effectRef idx="2">
+            <a:schemeClr val="accent1"/>
+          </a:effectRef>
+          <a:fontRef idx="minor">
+            <a:schemeClr val="lt1"/>
+          </a:fontRef>
+        </p:style>
+        <p:txBody>
+          <a:bodyPr rtlCol="0" anchor="ctr"/>
+          <a:lstStyle/>
+          <a:p>
+            <a:pPr algn="ctr"/>
+          </a:p>
+        </p:txBody>
+      </p:sp>
+      <p:sp>
+        <p:nvSpPr>
+          <p:cNvPr id="20" name="TextBox 19"/>
           <p:cNvSpPr txBox="1"/>
           <p:nvPr/>
         </p:nvSpPr>
         <p:spPr>
           <a:xfrm>
-            <a:off x="7772400" y="6446520"/>
-            <a:ext cx="4114800" cy="320040"/>
+            <a:off x="7589520" y="6419088"/>
+            <a:ext cx="4297680" cy="292608"/>
           </a:xfrm>
           <a:prstGeom prst="rect">
             <a:avLst/>
@@ -6298,56 +7545,13 @@
             <a:r>
               <a:rPr sz="1000" b="0">
                 <a:solidFill>
-                  <a:srgbClr val="AAAAAA"/>
+                  <a:srgbClr val="A8A8B0"/>
                 </a:solidFill>
                 <a:latin typeface="Arial"/>
                 <a:ea typeface="Arial"/>
               </a:rPr>
               <a:t>光影盟特训营  ·  12/14</a:t>
             </a:r>
-          </a:p>
-        </p:txBody>
-      </p:sp>
-      <p:sp>
-        <p:nvSpPr>
-          <p:cNvPr id="13" name="Rectangle 12"/>
-          <p:cNvSpPr/>
-          <p:nvPr/>
-        </p:nvSpPr>
-        <p:spPr>
-          <a:xfrm>
-            <a:off x="457200" y="6400800"/>
-            <a:ext cx="11247120" cy="12700"/>
-          </a:xfrm>
-          <a:prstGeom prst="rect">
-            <a:avLst/>
-          </a:prstGeom>
-          <a:solidFill>
-            <a:srgbClr val="D4AF37"/>
-          </a:solidFill>
-          <a:ln>
-            <a:noFill/>
-          </a:ln>
-        </p:spPr>
-        <p:style>
-          <a:lnRef idx="1">
-            <a:schemeClr val="accent1"/>
-          </a:lnRef>
-          <a:fillRef idx="3">
-            <a:schemeClr val="accent1"/>
-          </a:fillRef>
-          <a:effectRef idx="2">
-            <a:schemeClr val="accent1"/>
-          </a:effectRef>
-          <a:fontRef idx="minor">
-            <a:schemeClr val="lt1"/>
-          </a:fontRef>
-        </p:style>
-        <p:txBody>
-          <a:bodyPr rtlCol="0" anchor="ctr"/>
-          <a:lstStyle/>
-          <a:p>
-            <a:pPr algn="ctr"/>
           </a:p>
         </p:txBody>
       </p:sp>
@@ -6379,14 +7583,272 @@
       <p:grpSpPr/>
       <p:sp>
         <p:nvSpPr>
-          <p:cNvPr id="2" name="TextBox 1"/>
+          <p:cNvPr id="2" name="Rectangle 1"/>
+          <p:cNvSpPr/>
+          <p:nvPr/>
+        </p:nvSpPr>
+        <p:spPr>
+          <a:xfrm>
+            <a:off x="256032" y="201168"/>
+            <a:ext cx="11676888" cy="12700"/>
+          </a:xfrm>
+          <a:prstGeom prst="rect">
+            <a:avLst/>
+          </a:prstGeom>
+          <a:solidFill>
+            <a:srgbClr val="D4AF37"/>
+          </a:solidFill>
+          <a:ln>
+            <a:noFill/>
+          </a:ln>
+        </p:spPr>
+        <p:style>
+          <a:lnRef idx="1">
+            <a:schemeClr val="accent1"/>
+          </a:lnRef>
+          <a:fillRef idx="3">
+            <a:schemeClr val="accent1"/>
+          </a:fillRef>
+          <a:effectRef idx="2">
+            <a:schemeClr val="accent1"/>
+          </a:effectRef>
+          <a:fontRef idx="minor">
+            <a:schemeClr val="lt1"/>
+          </a:fontRef>
+        </p:style>
+        <p:txBody>
+          <a:bodyPr rtlCol="0" anchor="ctr"/>
+          <a:lstStyle/>
+          <a:p>
+            <a:pPr algn="ctr"/>
+          </a:p>
+        </p:txBody>
+      </p:sp>
+      <p:sp>
+        <p:nvSpPr>
+          <p:cNvPr id="3" name="Rectangle 2"/>
+          <p:cNvSpPr/>
+          <p:nvPr/>
+        </p:nvSpPr>
+        <p:spPr>
+          <a:xfrm>
+            <a:off x="256032" y="6565392"/>
+            <a:ext cx="11676888" cy="12700"/>
+          </a:xfrm>
+          <a:prstGeom prst="rect">
+            <a:avLst/>
+          </a:prstGeom>
+          <a:solidFill>
+            <a:srgbClr val="D4AF37"/>
+          </a:solidFill>
+          <a:ln>
+            <a:noFill/>
+          </a:ln>
+        </p:spPr>
+        <p:style>
+          <a:lnRef idx="1">
+            <a:schemeClr val="accent1"/>
+          </a:lnRef>
+          <a:fillRef idx="3">
+            <a:schemeClr val="accent1"/>
+          </a:fillRef>
+          <a:effectRef idx="2">
+            <a:schemeClr val="accent1"/>
+          </a:effectRef>
+          <a:fontRef idx="minor">
+            <a:schemeClr val="lt1"/>
+          </a:fontRef>
+        </p:style>
+        <p:txBody>
+          <a:bodyPr rtlCol="0" anchor="ctr"/>
+          <a:lstStyle/>
+          <a:p>
+            <a:pPr algn="ctr"/>
+          </a:p>
+        </p:txBody>
+      </p:sp>
+      <p:sp>
+        <p:nvSpPr>
+          <p:cNvPr id="4" name="Rectangle 3"/>
+          <p:cNvSpPr/>
+          <p:nvPr/>
+        </p:nvSpPr>
+        <p:spPr>
+          <a:xfrm>
+            <a:off x="256032" y="201168"/>
+            <a:ext cx="12700" cy="6364224"/>
+          </a:xfrm>
+          <a:prstGeom prst="rect">
+            <a:avLst/>
+          </a:prstGeom>
+          <a:solidFill>
+            <a:srgbClr val="D4AF37"/>
+          </a:solidFill>
+          <a:ln>
+            <a:noFill/>
+          </a:ln>
+        </p:spPr>
+        <p:style>
+          <a:lnRef idx="1">
+            <a:schemeClr val="accent1"/>
+          </a:lnRef>
+          <a:fillRef idx="3">
+            <a:schemeClr val="accent1"/>
+          </a:fillRef>
+          <a:effectRef idx="2">
+            <a:schemeClr val="accent1"/>
+          </a:effectRef>
+          <a:fontRef idx="minor">
+            <a:schemeClr val="lt1"/>
+          </a:fontRef>
+        </p:style>
+        <p:txBody>
+          <a:bodyPr rtlCol="0" anchor="ctr"/>
+          <a:lstStyle/>
+          <a:p>
+            <a:pPr algn="ctr"/>
+          </a:p>
+        </p:txBody>
+      </p:sp>
+      <p:sp>
+        <p:nvSpPr>
+          <p:cNvPr id="5" name="Rectangle 4"/>
+          <p:cNvSpPr/>
+          <p:nvPr/>
+        </p:nvSpPr>
+        <p:spPr>
+          <a:xfrm>
+            <a:off x="11932920" y="201168"/>
+            <a:ext cx="12700" cy="6364224"/>
+          </a:xfrm>
+          <a:prstGeom prst="rect">
+            <a:avLst/>
+          </a:prstGeom>
+          <a:solidFill>
+            <a:srgbClr val="D4AF37"/>
+          </a:solidFill>
+          <a:ln>
+            <a:noFill/>
+          </a:ln>
+        </p:spPr>
+        <p:style>
+          <a:lnRef idx="1">
+            <a:schemeClr val="accent1"/>
+          </a:lnRef>
+          <a:fillRef idx="3">
+            <a:schemeClr val="accent1"/>
+          </a:fillRef>
+          <a:effectRef idx="2">
+            <a:schemeClr val="accent1"/>
+          </a:effectRef>
+          <a:fontRef idx="minor">
+            <a:schemeClr val="lt1"/>
+          </a:fontRef>
+        </p:style>
+        <p:txBody>
+          <a:bodyPr rtlCol="0" anchor="ctr"/>
+          <a:lstStyle/>
+          <a:p>
+            <a:pPr algn="ctr"/>
+          </a:p>
+        </p:txBody>
+      </p:sp>
+      <p:sp>
+        <p:nvSpPr>
+          <p:cNvPr id="6" name="Rectangle 5"/>
+          <p:cNvSpPr/>
+          <p:nvPr/>
+        </p:nvSpPr>
+        <p:spPr>
+          <a:xfrm>
+            <a:off x="320040" y="365760"/>
+            <a:ext cx="54864" cy="5760720"/>
+          </a:xfrm>
+          <a:prstGeom prst="rect">
+            <a:avLst/>
+          </a:prstGeom>
+          <a:solidFill>
+            <a:srgbClr val="D4AF37"/>
+          </a:solidFill>
+          <a:ln>
+            <a:noFill/>
+          </a:ln>
+        </p:spPr>
+        <p:style>
+          <a:lnRef idx="1">
+            <a:schemeClr val="accent1"/>
+          </a:lnRef>
+          <a:fillRef idx="3">
+            <a:schemeClr val="accent1"/>
+          </a:fillRef>
+          <a:effectRef idx="2">
+            <a:schemeClr val="accent1"/>
+          </a:effectRef>
+          <a:fontRef idx="minor">
+            <a:schemeClr val="lt1"/>
+          </a:fontRef>
+        </p:style>
+        <p:txBody>
+          <a:bodyPr rtlCol="0" anchor="ctr"/>
+          <a:lstStyle/>
+          <a:p>
+            <a:pPr algn="ctr"/>
+          </a:p>
+        </p:txBody>
+      </p:sp>
+      <p:sp>
+        <p:nvSpPr>
+          <p:cNvPr id="7" name="Rectangle 6"/>
+          <p:cNvSpPr/>
+          <p:nvPr/>
+        </p:nvSpPr>
+        <p:spPr>
+          <a:xfrm>
+            <a:off x="448056" y="365760"/>
+            <a:ext cx="12700" cy="5760720"/>
+          </a:xfrm>
+          <a:prstGeom prst="rect">
+            <a:avLst/>
+          </a:prstGeom>
+          <a:solidFill>
+            <a:srgbClr val="2A2A3E"/>
+          </a:solidFill>
+          <a:ln>
+            <a:noFill/>
+          </a:ln>
+        </p:spPr>
+        <p:style>
+          <a:lnRef idx="1">
+            <a:schemeClr val="accent1"/>
+          </a:lnRef>
+          <a:fillRef idx="3">
+            <a:schemeClr val="accent1"/>
+          </a:fillRef>
+          <a:effectRef idx="2">
+            <a:schemeClr val="accent1"/>
+          </a:effectRef>
+          <a:fontRef idx="minor">
+            <a:schemeClr val="lt1"/>
+          </a:fontRef>
+        </p:style>
+        <p:txBody>
+          <a:bodyPr rtlCol="0" anchor="ctr"/>
+          <a:lstStyle/>
+          <a:p>
+            <a:pPr algn="ctr"/>
+          </a:p>
+        </p:txBody>
+      </p:sp>
+      <p:sp>
+        <p:nvSpPr>
+          <p:cNvPr id="8" name="TextBox 7"/>
           <p:cNvSpPr txBox="1"/>
           <p:nvPr/>
         </p:nvSpPr>
         <p:spPr>
           <a:xfrm>
-            <a:off x="548640" y="292608"/>
-            <a:ext cx="10972800" cy="640080"/>
+            <a:off x="640080" y="292608"/>
+            <a:ext cx="10789920" cy="594360"/>
           </a:xfrm>
           <a:prstGeom prst="rect">
             <a:avLst/>
@@ -6415,14 +7877,14 @@
       </p:sp>
       <p:sp>
         <p:nvSpPr>
-          <p:cNvPr id="3" name="Rectangle 2"/>
-          <p:cNvSpPr/>
-          <p:nvPr/>
-        </p:nvSpPr>
-        <p:spPr>
-          <a:xfrm>
-            <a:off x="548640" y="932688"/>
-            <a:ext cx="2011680" cy="31750"/>
+          <p:cNvPr id="9" name="Rectangle 8"/>
+          <p:cNvSpPr/>
+          <p:nvPr/>
+        </p:nvSpPr>
+        <p:spPr>
+          <a:xfrm>
+            <a:off x="640080" y="896112"/>
+            <a:ext cx="2194560" cy="31750"/>
           </a:xfrm>
           <a:prstGeom prst="rect">
             <a:avLst/>
@@ -6458,20 +7920,63 @@
       </p:sp>
       <p:sp>
         <p:nvSpPr>
-          <p:cNvPr id="4" name="Rectangle 3"/>
-          <p:cNvSpPr/>
-          <p:nvPr/>
-        </p:nvSpPr>
-        <p:spPr>
-          <a:xfrm>
-            <a:off x="1097280" y="1371600"/>
-            <a:ext cx="9966960" cy="3657600"/>
-          </a:xfrm>
-          <a:prstGeom prst="rect">
-            <a:avLst/>
-          </a:prstGeom>
-          <a:solidFill>
-            <a:srgbClr val="202035"/>
+          <p:cNvPr id="10" name="Rectangle 9"/>
+          <p:cNvSpPr/>
+          <p:nvPr/>
+        </p:nvSpPr>
+        <p:spPr>
+          <a:xfrm>
+            <a:off x="3017520" y="896112"/>
+            <a:ext cx="8503920" cy="9525"/>
+          </a:xfrm>
+          <a:prstGeom prst="rect">
+            <a:avLst/>
+          </a:prstGeom>
+          <a:solidFill>
+            <a:srgbClr val="D4AF37"/>
+          </a:solidFill>
+          <a:ln>
+            <a:noFill/>
+          </a:ln>
+        </p:spPr>
+        <p:style>
+          <a:lnRef idx="1">
+            <a:schemeClr val="accent1"/>
+          </a:lnRef>
+          <a:fillRef idx="3">
+            <a:schemeClr val="accent1"/>
+          </a:fillRef>
+          <a:effectRef idx="2">
+            <a:schemeClr val="accent1"/>
+          </a:effectRef>
+          <a:fontRef idx="minor">
+            <a:schemeClr val="lt1"/>
+          </a:fontRef>
+        </p:style>
+        <p:txBody>
+          <a:bodyPr rtlCol="0" anchor="ctr"/>
+          <a:lstStyle/>
+          <a:p>
+            <a:pPr algn="ctr"/>
+          </a:p>
+        </p:txBody>
+      </p:sp>
+      <p:sp>
+        <p:nvSpPr>
+          <p:cNvPr id="11" name="Rectangle 10"/>
+          <p:cNvSpPr/>
+          <p:nvPr/>
+        </p:nvSpPr>
+        <p:spPr>
+          <a:xfrm>
+            <a:off x="1051560" y="1325880"/>
+            <a:ext cx="10058400" cy="3749039"/>
+          </a:xfrm>
+          <a:prstGeom prst="rect">
+            <a:avLst/>
+          </a:prstGeom>
+          <a:solidFill>
+            <a:srgbClr val="121222"/>
           </a:solidFill>
           <a:ln w="25400" cap="flat">
             <a:solidFill>
@@ -6500,9 +8005,9 @@
           <a:p>
             <a:pPr algn="ctr"/>
             <a:r>
-              <a:rPr sz="1300" b="0">
+              <a:rPr sz="1200" b="0">
                 <a:solidFill>
-                  <a:srgbClr val="AAAAAA"/>
+                  <a:srgbClr val="A8A8B0"/>
                 </a:solidFill>
                 <a:latin typeface="Arial"/>
                 <a:ea typeface="Arial"/>
@@ -6514,14 +8019,57 @@
       </p:sp>
       <p:sp>
         <p:nvSpPr>
-          <p:cNvPr id="5" name="TextBox 4"/>
+          <p:cNvPr id="12" name="Rectangle 11"/>
+          <p:cNvSpPr/>
+          <p:nvPr/>
+        </p:nvSpPr>
+        <p:spPr>
+          <a:xfrm>
+            <a:off x="457200" y="6355080"/>
+            <a:ext cx="11247120" cy="12700"/>
+          </a:xfrm>
+          <a:prstGeom prst="rect">
+            <a:avLst/>
+          </a:prstGeom>
+          <a:solidFill>
+            <a:srgbClr val="D4AF37"/>
+          </a:solidFill>
+          <a:ln>
+            <a:noFill/>
+          </a:ln>
+        </p:spPr>
+        <p:style>
+          <a:lnRef idx="1">
+            <a:schemeClr val="accent1"/>
+          </a:lnRef>
+          <a:fillRef idx="3">
+            <a:schemeClr val="accent1"/>
+          </a:fillRef>
+          <a:effectRef idx="2">
+            <a:schemeClr val="accent1"/>
+          </a:effectRef>
+          <a:fontRef idx="minor">
+            <a:schemeClr val="lt1"/>
+          </a:fontRef>
+        </p:style>
+        <p:txBody>
+          <a:bodyPr rtlCol="0" anchor="ctr"/>
+          <a:lstStyle/>
+          <a:p>
+            <a:pPr algn="ctr"/>
+          </a:p>
+        </p:txBody>
+      </p:sp>
+      <p:sp>
+        <p:nvSpPr>
+          <p:cNvPr id="13" name="TextBox 12"/>
           <p:cNvSpPr txBox="1"/>
           <p:nvPr/>
         </p:nvSpPr>
         <p:spPr>
           <a:xfrm>
-            <a:off x="7772400" y="6446520"/>
-            <a:ext cx="4114800" cy="320040"/>
+            <a:off x="7589520" y="6419088"/>
+            <a:ext cx="4297680" cy="292608"/>
           </a:xfrm>
           <a:prstGeom prst="rect">
             <a:avLst/>
@@ -6538,56 +8086,13 @@
             <a:r>
               <a:rPr sz="1000" b="0">
                 <a:solidFill>
-                  <a:srgbClr val="AAAAAA"/>
+                  <a:srgbClr val="A8A8B0"/>
                 </a:solidFill>
                 <a:latin typeface="Arial"/>
                 <a:ea typeface="Arial"/>
               </a:rPr>
               <a:t>光影盟特训营  ·  13/14</a:t>
             </a:r>
-          </a:p>
-        </p:txBody>
-      </p:sp>
-      <p:sp>
-        <p:nvSpPr>
-          <p:cNvPr id="6" name="Rectangle 5"/>
-          <p:cNvSpPr/>
-          <p:nvPr/>
-        </p:nvSpPr>
-        <p:spPr>
-          <a:xfrm>
-            <a:off x="457200" y="6400800"/>
-            <a:ext cx="11247120" cy="12700"/>
-          </a:xfrm>
-          <a:prstGeom prst="rect">
-            <a:avLst/>
-          </a:prstGeom>
-          <a:solidFill>
-            <a:srgbClr val="D4AF37"/>
-          </a:solidFill>
-          <a:ln>
-            <a:noFill/>
-          </a:ln>
-        </p:spPr>
-        <p:style>
-          <a:lnRef idx="1">
-            <a:schemeClr val="accent1"/>
-          </a:lnRef>
-          <a:fillRef idx="3">
-            <a:schemeClr val="accent1"/>
-          </a:fillRef>
-          <a:effectRef idx="2">
-            <a:schemeClr val="accent1"/>
-          </a:effectRef>
-          <a:fontRef idx="minor">
-            <a:schemeClr val="lt1"/>
-          </a:fontRef>
-        </p:style>
-        <p:txBody>
-          <a:bodyPr rtlCol="0" anchor="ctr"/>
-          <a:lstStyle/>
-          <a:p>
-            <a:pPr algn="ctr"/>
           </a:p>
         </p:txBody>
       </p:sp>
@@ -6619,14 +8124,272 @@
       <p:grpSpPr/>
       <p:sp>
         <p:nvSpPr>
-          <p:cNvPr id="2" name="TextBox 1"/>
+          <p:cNvPr id="2" name="Rectangle 1"/>
+          <p:cNvSpPr/>
+          <p:nvPr/>
+        </p:nvSpPr>
+        <p:spPr>
+          <a:xfrm>
+            <a:off x="256032" y="201168"/>
+            <a:ext cx="11676888" cy="12700"/>
+          </a:xfrm>
+          <a:prstGeom prst="rect">
+            <a:avLst/>
+          </a:prstGeom>
+          <a:solidFill>
+            <a:srgbClr val="D4AF37"/>
+          </a:solidFill>
+          <a:ln>
+            <a:noFill/>
+          </a:ln>
+        </p:spPr>
+        <p:style>
+          <a:lnRef idx="1">
+            <a:schemeClr val="accent1"/>
+          </a:lnRef>
+          <a:fillRef idx="3">
+            <a:schemeClr val="accent1"/>
+          </a:fillRef>
+          <a:effectRef idx="2">
+            <a:schemeClr val="accent1"/>
+          </a:effectRef>
+          <a:fontRef idx="minor">
+            <a:schemeClr val="lt1"/>
+          </a:fontRef>
+        </p:style>
+        <p:txBody>
+          <a:bodyPr rtlCol="0" anchor="ctr"/>
+          <a:lstStyle/>
+          <a:p>
+            <a:pPr algn="ctr"/>
+          </a:p>
+        </p:txBody>
+      </p:sp>
+      <p:sp>
+        <p:nvSpPr>
+          <p:cNvPr id="3" name="Rectangle 2"/>
+          <p:cNvSpPr/>
+          <p:nvPr/>
+        </p:nvSpPr>
+        <p:spPr>
+          <a:xfrm>
+            <a:off x="256032" y="6565392"/>
+            <a:ext cx="11676888" cy="12700"/>
+          </a:xfrm>
+          <a:prstGeom prst="rect">
+            <a:avLst/>
+          </a:prstGeom>
+          <a:solidFill>
+            <a:srgbClr val="D4AF37"/>
+          </a:solidFill>
+          <a:ln>
+            <a:noFill/>
+          </a:ln>
+        </p:spPr>
+        <p:style>
+          <a:lnRef idx="1">
+            <a:schemeClr val="accent1"/>
+          </a:lnRef>
+          <a:fillRef idx="3">
+            <a:schemeClr val="accent1"/>
+          </a:fillRef>
+          <a:effectRef idx="2">
+            <a:schemeClr val="accent1"/>
+          </a:effectRef>
+          <a:fontRef idx="minor">
+            <a:schemeClr val="lt1"/>
+          </a:fontRef>
+        </p:style>
+        <p:txBody>
+          <a:bodyPr rtlCol="0" anchor="ctr"/>
+          <a:lstStyle/>
+          <a:p>
+            <a:pPr algn="ctr"/>
+          </a:p>
+        </p:txBody>
+      </p:sp>
+      <p:sp>
+        <p:nvSpPr>
+          <p:cNvPr id="4" name="Rectangle 3"/>
+          <p:cNvSpPr/>
+          <p:nvPr/>
+        </p:nvSpPr>
+        <p:spPr>
+          <a:xfrm>
+            <a:off x="256032" y="201168"/>
+            <a:ext cx="12700" cy="6364224"/>
+          </a:xfrm>
+          <a:prstGeom prst="rect">
+            <a:avLst/>
+          </a:prstGeom>
+          <a:solidFill>
+            <a:srgbClr val="D4AF37"/>
+          </a:solidFill>
+          <a:ln>
+            <a:noFill/>
+          </a:ln>
+        </p:spPr>
+        <p:style>
+          <a:lnRef idx="1">
+            <a:schemeClr val="accent1"/>
+          </a:lnRef>
+          <a:fillRef idx="3">
+            <a:schemeClr val="accent1"/>
+          </a:fillRef>
+          <a:effectRef idx="2">
+            <a:schemeClr val="accent1"/>
+          </a:effectRef>
+          <a:fontRef idx="minor">
+            <a:schemeClr val="lt1"/>
+          </a:fontRef>
+        </p:style>
+        <p:txBody>
+          <a:bodyPr rtlCol="0" anchor="ctr"/>
+          <a:lstStyle/>
+          <a:p>
+            <a:pPr algn="ctr"/>
+          </a:p>
+        </p:txBody>
+      </p:sp>
+      <p:sp>
+        <p:nvSpPr>
+          <p:cNvPr id="5" name="Rectangle 4"/>
+          <p:cNvSpPr/>
+          <p:nvPr/>
+        </p:nvSpPr>
+        <p:spPr>
+          <a:xfrm>
+            <a:off x="11932920" y="201168"/>
+            <a:ext cx="12700" cy="6364224"/>
+          </a:xfrm>
+          <a:prstGeom prst="rect">
+            <a:avLst/>
+          </a:prstGeom>
+          <a:solidFill>
+            <a:srgbClr val="D4AF37"/>
+          </a:solidFill>
+          <a:ln>
+            <a:noFill/>
+          </a:ln>
+        </p:spPr>
+        <p:style>
+          <a:lnRef idx="1">
+            <a:schemeClr val="accent1"/>
+          </a:lnRef>
+          <a:fillRef idx="3">
+            <a:schemeClr val="accent1"/>
+          </a:fillRef>
+          <a:effectRef idx="2">
+            <a:schemeClr val="accent1"/>
+          </a:effectRef>
+          <a:fontRef idx="minor">
+            <a:schemeClr val="lt1"/>
+          </a:fontRef>
+        </p:style>
+        <p:txBody>
+          <a:bodyPr rtlCol="0" anchor="ctr"/>
+          <a:lstStyle/>
+          <a:p>
+            <a:pPr algn="ctr"/>
+          </a:p>
+        </p:txBody>
+      </p:sp>
+      <p:sp>
+        <p:nvSpPr>
+          <p:cNvPr id="6" name="Rectangle 5"/>
+          <p:cNvSpPr/>
+          <p:nvPr/>
+        </p:nvSpPr>
+        <p:spPr>
+          <a:xfrm>
+            <a:off x="320040" y="365760"/>
+            <a:ext cx="54864" cy="5760720"/>
+          </a:xfrm>
+          <a:prstGeom prst="rect">
+            <a:avLst/>
+          </a:prstGeom>
+          <a:solidFill>
+            <a:srgbClr val="D4AF37"/>
+          </a:solidFill>
+          <a:ln>
+            <a:noFill/>
+          </a:ln>
+        </p:spPr>
+        <p:style>
+          <a:lnRef idx="1">
+            <a:schemeClr val="accent1"/>
+          </a:lnRef>
+          <a:fillRef idx="3">
+            <a:schemeClr val="accent1"/>
+          </a:fillRef>
+          <a:effectRef idx="2">
+            <a:schemeClr val="accent1"/>
+          </a:effectRef>
+          <a:fontRef idx="minor">
+            <a:schemeClr val="lt1"/>
+          </a:fontRef>
+        </p:style>
+        <p:txBody>
+          <a:bodyPr rtlCol="0" anchor="ctr"/>
+          <a:lstStyle/>
+          <a:p>
+            <a:pPr algn="ctr"/>
+          </a:p>
+        </p:txBody>
+      </p:sp>
+      <p:sp>
+        <p:nvSpPr>
+          <p:cNvPr id="7" name="Rectangle 6"/>
+          <p:cNvSpPr/>
+          <p:nvPr/>
+        </p:nvSpPr>
+        <p:spPr>
+          <a:xfrm>
+            <a:off x="448056" y="365760"/>
+            <a:ext cx="12700" cy="5760720"/>
+          </a:xfrm>
+          <a:prstGeom prst="rect">
+            <a:avLst/>
+          </a:prstGeom>
+          <a:solidFill>
+            <a:srgbClr val="2A2A3E"/>
+          </a:solidFill>
+          <a:ln>
+            <a:noFill/>
+          </a:ln>
+        </p:spPr>
+        <p:style>
+          <a:lnRef idx="1">
+            <a:schemeClr val="accent1"/>
+          </a:lnRef>
+          <a:fillRef idx="3">
+            <a:schemeClr val="accent1"/>
+          </a:fillRef>
+          <a:effectRef idx="2">
+            <a:schemeClr val="accent1"/>
+          </a:effectRef>
+          <a:fontRef idx="minor">
+            <a:schemeClr val="lt1"/>
+          </a:fontRef>
+        </p:style>
+        <p:txBody>
+          <a:bodyPr rtlCol="0" anchor="ctr"/>
+          <a:lstStyle/>
+          <a:p>
+            <a:pPr algn="ctr"/>
+          </a:p>
+        </p:txBody>
+      </p:sp>
+      <p:sp>
+        <p:nvSpPr>
+          <p:cNvPr id="8" name="TextBox 7"/>
           <p:cNvSpPr txBox="1"/>
           <p:nvPr/>
         </p:nvSpPr>
         <p:spPr>
           <a:xfrm>
-            <a:off x="548640" y="292608"/>
-            <a:ext cx="10972800" cy="640080"/>
+            <a:off x="640080" y="292608"/>
+            <a:ext cx="10789920" cy="594360"/>
           </a:xfrm>
           <a:prstGeom prst="rect">
             <a:avLst/>
@@ -6655,14 +8418,14 @@
       </p:sp>
       <p:sp>
         <p:nvSpPr>
-          <p:cNvPr id="3" name="Rectangle 2"/>
-          <p:cNvSpPr/>
-          <p:nvPr/>
-        </p:nvSpPr>
-        <p:spPr>
-          <a:xfrm>
-            <a:off x="548640" y="932688"/>
-            <a:ext cx="2011680" cy="31750"/>
+          <p:cNvPr id="9" name="Rectangle 8"/>
+          <p:cNvSpPr/>
+          <p:nvPr/>
+        </p:nvSpPr>
+        <p:spPr>
+          <a:xfrm>
+            <a:off x="640080" y="896112"/>
+            <a:ext cx="2194560" cy="31750"/>
           </a:xfrm>
           <a:prstGeom prst="rect">
             <a:avLst/>
@@ -6698,14 +8461,143 @@
       </p:sp>
       <p:sp>
         <p:nvSpPr>
-          <p:cNvPr id="4" name="TextBox 3"/>
+          <p:cNvPr id="10" name="Rectangle 9"/>
+          <p:cNvSpPr/>
+          <p:nvPr/>
+        </p:nvSpPr>
+        <p:spPr>
+          <a:xfrm>
+            <a:off x="3017520" y="896112"/>
+            <a:ext cx="8503920" cy="9525"/>
+          </a:xfrm>
+          <a:prstGeom prst="rect">
+            <a:avLst/>
+          </a:prstGeom>
+          <a:solidFill>
+            <a:srgbClr val="D4AF37"/>
+          </a:solidFill>
+          <a:ln>
+            <a:noFill/>
+          </a:ln>
+        </p:spPr>
+        <p:style>
+          <a:lnRef idx="1">
+            <a:schemeClr val="accent1"/>
+          </a:lnRef>
+          <a:fillRef idx="3">
+            <a:schemeClr val="accent1"/>
+          </a:fillRef>
+          <a:effectRef idx="2">
+            <a:schemeClr val="accent1"/>
+          </a:effectRef>
+          <a:fontRef idx="minor">
+            <a:schemeClr val="lt1"/>
+          </a:fontRef>
+        </p:style>
+        <p:txBody>
+          <a:bodyPr rtlCol="0" anchor="ctr"/>
+          <a:lstStyle/>
+          <a:p>
+            <a:pPr algn="ctr"/>
+          </a:p>
+        </p:txBody>
+      </p:sp>
+      <p:sp>
+        <p:nvSpPr>
+          <p:cNvPr id="11" name="Rectangle 10"/>
+          <p:cNvSpPr/>
+          <p:nvPr/>
+        </p:nvSpPr>
+        <p:spPr>
+          <a:xfrm>
+            <a:off x="2560320" y="1554480"/>
+            <a:ext cx="7040880" cy="868680"/>
+          </a:xfrm>
+          <a:prstGeom prst="rect">
+            <a:avLst/>
+          </a:prstGeom>
+          <a:solidFill>
+            <a:srgbClr val="2A2A3E"/>
+          </a:solidFill>
+          <a:ln>
+            <a:noFill/>
+          </a:ln>
+        </p:spPr>
+        <p:style>
+          <a:lnRef idx="1">
+            <a:schemeClr val="accent1"/>
+          </a:lnRef>
+          <a:fillRef idx="3">
+            <a:schemeClr val="accent1"/>
+          </a:fillRef>
+          <a:effectRef idx="2">
+            <a:schemeClr val="accent1"/>
+          </a:effectRef>
+          <a:fontRef idx="minor">
+            <a:schemeClr val="lt1"/>
+          </a:fontRef>
+        </p:style>
+        <p:txBody>
+          <a:bodyPr rtlCol="0" anchor="ctr"/>
+          <a:lstStyle/>
+          <a:p>
+            <a:pPr algn="ctr"/>
+          </a:p>
+        </p:txBody>
+      </p:sp>
+      <p:sp>
+        <p:nvSpPr>
+          <p:cNvPr id="12" name="Rectangle 11"/>
+          <p:cNvSpPr/>
+          <p:nvPr/>
+        </p:nvSpPr>
+        <p:spPr>
+          <a:xfrm>
+            <a:off x="2560320" y="1554480"/>
+            <a:ext cx="50800" cy="868680"/>
+          </a:xfrm>
+          <a:prstGeom prst="rect">
+            <a:avLst/>
+          </a:prstGeom>
+          <a:solidFill>
+            <a:srgbClr val="D4AF37"/>
+          </a:solidFill>
+          <a:ln>
+            <a:noFill/>
+          </a:ln>
+        </p:spPr>
+        <p:style>
+          <a:lnRef idx="1">
+            <a:schemeClr val="accent1"/>
+          </a:lnRef>
+          <a:fillRef idx="3">
+            <a:schemeClr val="accent1"/>
+          </a:fillRef>
+          <a:effectRef idx="2">
+            <a:schemeClr val="accent1"/>
+          </a:effectRef>
+          <a:fontRef idx="minor">
+            <a:schemeClr val="lt1"/>
+          </a:fontRef>
+        </p:style>
+        <p:txBody>
+          <a:bodyPr rtlCol="0" anchor="ctr"/>
+          <a:lstStyle/>
+          <a:p>
+            <a:pPr algn="ctr"/>
+          </a:p>
+        </p:txBody>
+      </p:sp>
+      <p:sp>
+        <p:nvSpPr>
+          <p:cNvPr id="13" name="TextBox 12"/>
           <p:cNvSpPr txBox="1"/>
           <p:nvPr/>
         </p:nvSpPr>
         <p:spPr>
           <a:xfrm>
-            <a:off x="1371600" y="1645920"/>
-            <a:ext cx="9418320" cy="2926080"/>
+            <a:off x="2926080" y="1554480"/>
+            <a:ext cx="6400800" cy="868680"/>
           </a:xfrm>
           <a:prstGeom prst="rect">
             <a:avLst/>
@@ -6713,18 +8605,14 @@
           <a:noFill/>
         </p:spPr>
         <p:txBody>
-          <a:bodyPr wrap="square">
+          <a:bodyPr wrap="square" anchor="ctr">
             <a:spAutoFit/>
           </a:bodyPr>
           <a:lstStyle/>
           <a:p>
-            <a:pPr algn="ctr">
-              <a:spcAft>
-                <a:spcPts val="1000"/>
-              </a:spcAft>
-            </a:pPr>
-            <a:r>
-              <a:rPr sz="3200" b="1">
+            <a:pPr algn="ctr"/>
+            <a:r>
+              <a:rPr sz="2800" b="1">
                 <a:solidFill>
                   <a:srgbClr val="D4AF37"/>
                 </a:solidFill>
@@ -6734,14 +8622,119 @@
               <a:t>景别·远全中近特</a:t>
             </a:r>
           </a:p>
-          <a:p>
-            <a:pPr algn="ctr">
-              <a:spcAft>
-                <a:spcPts val="1000"/>
-              </a:spcAft>
-            </a:pPr>
-            <a:r>
-              <a:rPr sz="3200" b="1">
+        </p:txBody>
+      </p:sp>
+      <p:sp>
+        <p:nvSpPr>
+          <p:cNvPr id="14" name="Rectangle 13"/>
+          <p:cNvSpPr/>
+          <p:nvPr/>
+        </p:nvSpPr>
+        <p:spPr>
+          <a:xfrm>
+            <a:off x="2560320" y="2606040"/>
+            <a:ext cx="7040880" cy="868680"/>
+          </a:xfrm>
+          <a:prstGeom prst="rect">
+            <a:avLst/>
+          </a:prstGeom>
+          <a:solidFill>
+            <a:srgbClr val="2A2A3E"/>
+          </a:solidFill>
+          <a:ln>
+            <a:noFill/>
+          </a:ln>
+        </p:spPr>
+        <p:style>
+          <a:lnRef idx="1">
+            <a:schemeClr val="accent1"/>
+          </a:lnRef>
+          <a:fillRef idx="3">
+            <a:schemeClr val="accent1"/>
+          </a:fillRef>
+          <a:effectRef idx="2">
+            <a:schemeClr val="accent1"/>
+          </a:effectRef>
+          <a:fontRef idx="minor">
+            <a:schemeClr val="lt1"/>
+          </a:fontRef>
+        </p:style>
+        <p:txBody>
+          <a:bodyPr rtlCol="0" anchor="ctr"/>
+          <a:lstStyle/>
+          <a:p>
+            <a:pPr algn="ctr"/>
+          </a:p>
+        </p:txBody>
+      </p:sp>
+      <p:sp>
+        <p:nvSpPr>
+          <p:cNvPr id="15" name="Rectangle 14"/>
+          <p:cNvSpPr/>
+          <p:nvPr/>
+        </p:nvSpPr>
+        <p:spPr>
+          <a:xfrm>
+            <a:off x="2560320" y="2606040"/>
+            <a:ext cx="50800" cy="868680"/>
+          </a:xfrm>
+          <a:prstGeom prst="rect">
+            <a:avLst/>
+          </a:prstGeom>
+          <a:solidFill>
+            <a:srgbClr val="D4AF37"/>
+          </a:solidFill>
+          <a:ln>
+            <a:noFill/>
+          </a:ln>
+        </p:spPr>
+        <p:style>
+          <a:lnRef idx="1">
+            <a:schemeClr val="accent1"/>
+          </a:lnRef>
+          <a:fillRef idx="3">
+            <a:schemeClr val="accent1"/>
+          </a:fillRef>
+          <a:effectRef idx="2">
+            <a:schemeClr val="accent1"/>
+          </a:effectRef>
+          <a:fontRef idx="minor">
+            <a:schemeClr val="lt1"/>
+          </a:fontRef>
+        </p:style>
+        <p:txBody>
+          <a:bodyPr rtlCol="0" anchor="ctr"/>
+          <a:lstStyle/>
+          <a:p>
+            <a:pPr algn="ctr"/>
+          </a:p>
+        </p:txBody>
+      </p:sp>
+      <p:sp>
+        <p:nvSpPr>
+          <p:cNvPr id="16" name="TextBox 15"/>
+          <p:cNvSpPr txBox="1"/>
+          <p:nvPr/>
+        </p:nvSpPr>
+        <p:spPr>
+          <a:xfrm>
+            <a:off x="2926080" y="2606040"/>
+            <a:ext cx="6400800" cy="868680"/>
+          </a:xfrm>
+          <a:prstGeom prst="rect">
+            <a:avLst/>
+          </a:prstGeom>
+          <a:noFill/>
+        </p:spPr>
+        <p:txBody>
+          <a:bodyPr wrap="square" anchor="ctr">
+            <a:spAutoFit/>
+          </a:bodyPr>
+          <a:lstStyle/>
+          <a:p>
+            <a:pPr algn="ctr"/>
+            <a:r>
+              <a:rPr sz="2800" b="1">
                 <a:solidFill>
                   <a:srgbClr val="D4AF37"/>
                 </a:solidFill>
@@ -6751,14 +8744,119 @@
               <a:t>运镜·推摇跟</a:t>
             </a:r>
           </a:p>
-          <a:p>
-            <a:pPr algn="ctr">
-              <a:spcAft>
-                <a:spcPts val="1000"/>
-              </a:spcAft>
-            </a:pPr>
-            <a:r>
-              <a:rPr sz="3200" b="1">
+        </p:txBody>
+      </p:sp>
+      <p:sp>
+        <p:nvSpPr>
+          <p:cNvPr id="17" name="Rectangle 16"/>
+          <p:cNvSpPr/>
+          <p:nvPr/>
+        </p:nvSpPr>
+        <p:spPr>
+          <a:xfrm>
+            <a:off x="2560320" y="3657600"/>
+            <a:ext cx="7040880" cy="868680"/>
+          </a:xfrm>
+          <a:prstGeom prst="rect">
+            <a:avLst/>
+          </a:prstGeom>
+          <a:solidFill>
+            <a:srgbClr val="2A2A3E"/>
+          </a:solidFill>
+          <a:ln>
+            <a:noFill/>
+          </a:ln>
+        </p:spPr>
+        <p:style>
+          <a:lnRef idx="1">
+            <a:schemeClr val="accent1"/>
+          </a:lnRef>
+          <a:fillRef idx="3">
+            <a:schemeClr val="accent1"/>
+          </a:fillRef>
+          <a:effectRef idx="2">
+            <a:schemeClr val="accent1"/>
+          </a:effectRef>
+          <a:fontRef idx="minor">
+            <a:schemeClr val="lt1"/>
+          </a:fontRef>
+        </p:style>
+        <p:txBody>
+          <a:bodyPr rtlCol="0" anchor="ctr"/>
+          <a:lstStyle/>
+          <a:p>
+            <a:pPr algn="ctr"/>
+          </a:p>
+        </p:txBody>
+      </p:sp>
+      <p:sp>
+        <p:nvSpPr>
+          <p:cNvPr id="18" name="Rectangle 17"/>
+          <p:cNvSpPr/>
+          <p:nvPr/>
+        </p:nvSpPr>
+        <p:spPr>
+          <a:xfrm>
+            <a:off x="2560320" y="3657600"/>
+            <a:ext cx="50800" cy="868680"/>
+          </a:xfrm>
+          <a:prstGeom prst="rect">
+            <a:avLst/>
+          </a:prstGeom>
+          <a:solidFill>
+            <a:srgbClr val="D4AF37"/>
+          </a:solidFill>
+          <a:ln>
+            <a:noFill/>
+          </a:ln>
+        </p:spPr>
+        <p:style>
+          <a:lnRef idx="1">
+            <a:schemeClr val="accent1"/>
+          </a:lnRef>
+          <a:fillRef idx="3">
+            <a:schemeClr val="accent1"/>
+          </a:fillRef>
+          <a:effectRef idx="2">
+            <a:schemeClr val="accent1"/>
+          </a:effectRef>
+          <a:fontRef idx="minor">
+            <a:schemeClr val="lt1"/>
+          </a:fontRef>
+        </p:style>
+        <p:txBody>
+          <a:bodyPr rtlCol="0" anchor="ctr"/>
+          <a:lstStyle/>
+          <a:p>
+            <a:pPr algn="ctr"/>
+          </a:p>
+        </p:txBody>
+      </p:sp>
+      <p:sp>
+        <p:nvSpPr>
+          <p:cNvPr id="19" name="TextBox 18"/>
+          <p:cNvSpPr txBox="1"/>
+          <p:nvPr/>
+        </p:nvSpPr>
+        <p:spPr>
+          <a:xfrm>
+            <a:off x="2926080" y="3657600"/>
+            <a:ext cx="6400800" cy="868680"/>
+          </a:xfrm>
+          <a:prstGeom prst="rect">
+            <a:avLst/>
+          </a:prstGeom>
+          <a:noFill/>
+        </p:spPr>
+        <p:txBody>
+          <a:bodyPr wrap="square" anchor="ctr">
+            <a:spAutoFit/>
+          </a:bodyPr>
+          <a:lstStyle/>
+          <a:p>
+            <a:pPr algn="ctr"/>
+            <a:r>
+              <a:rPr sz="2800" b="1">
                 <a:solidFill>
                   <a:srgbClr val="D4AF37"/>
                 </a:solidFill>
@@ -6772,14 +8870,14 @@
       </p:sp>
       <p:sp>
         <p:nvSpPr>
-          <p:cNvPr id="5" name="TextBox 4"/>
+          <p:cNvPr id="20" name="TextBox 19"/>
           <p:cNvSpPr txBox="1"/>
           <p:nvPr/>
         </p:nvSpPr>
         <p:spPr>
           <a:xfrm>
-            <a:off x="548640" y="5029200"/>
-            <a:ext cx="10972800" cy="502920"/>
+            <a:off x="640080" y="5029200"/>
+            <a:ext cx="10881360" cy="502920"/>
           </a:xfrm>
           <a:prstGeom prst="rect">
             <a:avLst/>
@@ -6808,14 +8906,57 @@
       </p:sp>
       <p:sp>
         <p:nvSpPr>
-          <p:cNvPr id="6" name="TextBox 5"/>
+          <p:cNvPr id="21" name="Rectangle 20"/>
+          <p:cNvSpPr/>
+          <p:nvPr/>
+        </p:nvSpPr>
+        <p:spPr>
+          <a:xfrm>
+            <a:off x="457200" y="6355080"/>
+            <a:ext cx="11247120" cy="12700"/>
+          </a:xfrm>
+          <a:prstGeom prst="rect">
+            <a:avLst/>
+          </a:prstGeom>
+          <a:solidFill>
+            <a:srgbClr val="D4AF37"/>
+          </a:solidFill>
+          <a:ln>
+            <a:noFill/>
+          </a:ln>
+        </p:spPr>
+        <p:style>
+          <a:lnRef idx="1">
+            <a:schemeClr val="accent1"/>
+          </a:lnRef>
+          <a:fillRef idx="3">
+            <a:schemeClr val="accent1"/>
+          </a:fillRef>
+          <a:effectRef idx="2">
+            <a:schemeClr val="accent1"/>
+          </a:effectRef>
+          <a:fontRef idx="minor">
+            <a:schemeClr val="lt1"/>
+          </a:fontRef>
+        </p:style>
+        <p:txBody>
+          <a:bodyPr rtlCol="0" anchor="ctr"/>
+          <a:lstStyle/>
+          <a:p>
+            <a:pPr algn="ctr"/>
+          </a:p>
+        </p:txBody>
+      </p:sp>
+      <p:sp>
+        <p:nvSpPr>
+          <p:cNvPr id="22" name="TextBox 21"/>
           <p:cNvSpPr txBox="1"/>
           <p:nvPr/>
         </p:nvSpPr>
         <p:spPr>
           <a:xfrm>
-            <a:off x="7772400" y="6446520"/>
-            <a:ext cx="4114800" cy="320040"/>
+            <a:off x="7589520" y="6419088"/>
+            <a:ext cx="4297680" cy="292608"/>
           </a:xfrm>
           <a:prstGeom prst="rect">
             <a:avLst/>
@@ -6832,56 +8973,13 @@
             <a:r>
               <a:rPr sz="1000" b="0">
                 <a:solidFill>
-                  <a:srgbClr val="AAAAAA"/>
+                  <a:srgbClr val="A8A8B0"/>
                 </a:solidFill>
                 <a:latin typeface="Arial"/>
                 <a:ea typeface="Arial"/>
               </a:rPr>
               <a:t>光影盟特训营  ·  14/14</a:t>
             </a:r>
-          </a:p>
-        </p:txBody>
-      </p:sp>
-      <p:sp>
-        <p:nvSpPr>
-          <p:cNvPr id="7" name="Rectangle 6"/>
-          <p:cNvSpPr/>
-          <p:nvPr/>
-        </p:nvSpPr>
-        <p:spPr>
-          <a:xfrm>
-            <a:off x="457200" y="6400800"/>
-            <a:ext cx="11247120" cy="12700"/>
-          </a:xfrm>
-          <a:prstGeom prst="rect">
-            <a:avLst/>
-          </a:prstGeom>
-          <a:solidFill>
-            <a:srgbClr val="D4AF37"/>
-          </a:solidFill>
-          <a:ln>
-            <a:noFill/>
-          </a:ln>
-        </p:spPr>
-        <p:style>
-          <a:lnRef idx="1">
-            <a:schemeClr val="accent1"/>
-          </a:lnRef>
-          <a:fillRef idx="3">
-            <a:schemeClr val="accent1"/>
-          </a:fillRef>
-          <a:effectRef idx="2">
-            <a:schemeClr val="accent1"/>
-          </a:effectRef>
-          <a:fontRef idx="minor">
-            <a:schemeClr val="lt1"/>
-          </a:fontRef>
-        </p:style>
-        <p:txBody>
-          <a:bodyPr rtlCol="0" anchor="ctr"/>
-          <a:lstStyle/>
-          <a:p>
-            <a:pPr algn="ctr"/>
           </a:p>
         </p:txBody>
       </p:sp>
@@ -6913,14 +9011,272 @@
       <p:grpSpPr/>
       <p:sp>
         <p:nvSpPr>
-          <p:cNvPr id="2" name="TextBox 1"/>
+          <p:cNvPr id="2" name="Rectangle 1"/>
+          <p:cNvSpPr/>
+          <p:nvPr/>
+        </p:nvSpPr>
+        <p:spPr>
+          <a:xfrm>
+            <a:off x="256032" y="201168"/>
+            <a:ext cx="11676888" cy="12700"/>
+          </a:xfrm>
+          <a:prstGeom prst="rect">
+            <a:avLst/>
+          </a:prstGeom>
+          <a:solidFill>
+            <a:srgbClr val="D4AF37"/>
+          </a:solidFill>
+          <a:ln>
+            <a:noFill/>
+          </a:ln>
+        </p:spPr>
+        <p:style>
+          <a:lnRef idx="1">
+            <a:schemeClr val="accent1"/>
+          </a:lnRef>
+          <a:fillRef idx="3">
+            <a:schemeClr val="accent1"/>
+          </a:fillRef>
+          <a:effectRef idx="2">
+            <a:schemeClr val="accent1"/>
+          </a:effectRef>
+          <a:fontRef idx="minor">
+            <a:schemeClr val="lt1"/>
+          </a:fontRef>
+        </p:style>
+        <p:txBody>
+          <a:bodyPr rtlCol="0" anchor="ctr"/>
+          <a:lstStyle/>
+          <a:p>
+            <a:pPr algn="ctr"/>
+          </a:p>
+        </p:txBody>
+      </p:sp>
+      <p:sp>
+        <p:nvSpPr>
+          <p:cNvPr id="3" name="Rectangle 2"/>
+          <p:cNvSpPr/>
+          <p:nvPr/>
+        </p:nvSpPr>
+        <p:spPr>
+          <a:xfrm>
+            <a:off x="256032" y="6565392"/>
+            <a:ext cx="11676888" cy="12700"/>
+          </a:xfrm>
+          <a:prstGeom prst="rect">
+            <a:avLst/>
+          </a:prstGeom>
+          <a:solidFill>
+            <a:srgbClr val="D4AF37"/>
+          </a:solidFill>
+          <a:ln>
+            <a:noFill/>
+          </a:ln>
+        </p:spPr>
+        <p:style>
+          <a:lnRef idx="1">
+            <a:schemeClr val="accent1"/>
+          </a:lnRef>
+          <a:fillRef idx="3">
+            <a:schemeClr val="accent1"/>
+          </a:fillRef>
+          <a:effectRef idx="2">
+            <a:schemeClr val="accent1"/>
+          </a:effectRef>
+          <a:fontRef idx="minor">
+            <a:schemeClr val="lt1"/>
+          </a:fontRef>
+        </p:style>
+        <p:txBody>
+          <a:bodyPr rtlCol="0" anchor="ctr"/>
+          <a:lstStyle/>
+          <a:p>
+            <a:pPr algn="ctr"/>
+          </a:p>
+        </p:txBody>
+      </p:sp>
+      <p:sp>
+        <p:nvSpPr>
+          <p:cNvPr id="4" name="Rectangle 3"/>
+          <p:cNvSpPr/>
+          <p:nvPr/>
+        </p:nvSpPr>
+        <p:spPr>
+          <a:xfrm>
+            <a:off x="256032" y="201168"/>
+            <a:ext cx="12700" cy="6364224"/>
+          </a:xfrm>
+          <a:prstGeom prst="rect">
+            <a:avLst/>
+          </a:prstGeom>
+          <a:solidFill>
+            <a:srgbClr val="D4AF37"/>
+          </a:solidFill>
+          <a:ln>
+            <a:noFill/>
+          </a:ln>
+        </p:spPr>
+        <p:style>
+          <a:lnRef idx="1">
+            <a:schemeClr val="accent1"/>
+          </a:lnRef>
+          <a:fillRef idx="3">
+            <a:schemeClr val="accent1"/>
+          </a:fillRef>
+          <a:effectRef idx="2">
+            <a:schemeClr val="accent1"/>
+          </a:effectRef>
+          <a:fontRef idx="minor">
+            <a:schemeClr val="lt1"/>
+          </a:fontRef>
+        </p:style>
+        <p:txBody>
+          <a:bodyPr rtlCol="0" anchor="ctr"/>
+          <a:lstStyle/>
+          <a:p>
+            <a:pPr algn="ctr"/>
+          </a:p>
+        </p:txBody>
+      </p:sp>
+      <p:sp>
+        <p:nvSpPr>
+          <p:cNvPr id="5" name="Rectangle 4"/>
+          <p:cNvSpPr/>
+          <p:nvPr/>
+        </p:nvSpPr>
+        <p:spPr>
+          <a:xfrm>
+            <a:off x="11932920" y="201168"/>
+            <a:ext cx="12700" cy="6364224"/>
+          </a:xfrm>
+          <a:prstGeom prst="rect">
+            <a:avLst/>
+          </a:prstGeom>
+          <a:solidFill>
+            <a:srgbClr val="D4AF37"/>
+          </a:solidFill>
+          <a:ln>
+            <a:noFill/>
+          </a:ln>
+        </p:spPr>
+        <p:style>
+          <a:lnRef idx="1">
+            <a:schemeClr val="accent1"/>
+          </a:lnRef>
+          <a:fillRef idx="3">
+            <a:schemeClr val="accent1"/>
+          </a:fillRef>
+          <a:effectRef idx="2">
+            <a:schemeClr val="accent1"/>
+          </a:effectRef>
+          <a:fontRef idx="minor">
+            <a:schemeClr val="lt1"/>
+          </a:fontRef>
+        </p:style>
+        <p:txBody>
+          <a:bodyPr rtlCol="0" anchor="ctr"/>
+          <a:lstStyle/>
+          <a:p>
+            <a:pPr algn="ctr"/>
+          </a:p>
+        </p:txBody>
+      </p:sp>
+      <p:sp>
+        <p:nvSpPr>
+          <p:cNvPr id="6" name="Rectangle 5"/>
+          <p:cNvSpPr/>
+          <p:nvPr/>
+        </p:nvSpPr>
+        <p:spPr>
+          <a:xfrm>
+            <a:off x="320040" y="365760"/>
+            <a:ext cx="54864" cy="5760720"/>
+          </a:xfrm>
+          <a:prstGeom prst="rect">
+            <a:avLst/>
+          </a:prstGeom>
+          <a:solidFill>
+            <a:srgbClr val="D4AF37"/>
+          </a:solidFill>
+          <a:ln>
+            <a:noFill/>
+          </a:ln>
+        </p:spPr>
+        <p:style>
+          <a:lnRef idx="1">
+            <a:schemeClr val="accent1"/>
+          </a:lnRef>
+          <a:fillRef idx="3">
+            <a:schemeClr val="accent1"/>
+          </a:fillRef>
+          <a:effectRef idx="2">
+            <a:schemeClr val="accent1"/>
+          </a:effectRef>
+          <a:fontRef idx="minor">
+            <a:schemeClr val="lt1"/>
+          </a:fontRef>
+        </p:style>
+        <p:txBody>
+          <a:bodyPr rtlCol="0" anchor="ctr"/>
+          <a:lstStyle/>
+          <a:p>
+            <a:pPr algn="ctr"/>
+          </a:p>
+        </p:txBody>
+      </p:sp>
+      <p:sp>
+        <p:nvSpPr>
+          <p:cNvPr id="7" name="Rectangle 6"/>
+          <p:cNvSpPr/>
+          <p:nvPr/>
+        </p:nvSpPr>
+        <p:spPr>
+          <a:xfrm>
+            <a:off x="448056" y="365760"/>
+            <a:ext cx="12700" cy="5760720"/>
+          </a:xfrm>
+          <a:prstGeom prst="rect">
+            <a:avLst/>
+          </a:prstGeom>
+          <a:solidFill>
+            <a:srgbClr val="2A2A3E"/>
+          </a:solidFill>
+          <a:ln>
+            <a:noFill/>
+          </a:ln>
+        </p:spPr>
+        <p:style>
+          <a:lnRef idx="1">
+            <a:schemeClr val="accent1"/>
+          </a:lnRef>
+          <a:fillRef idx="3">
+            <a:schemeClr val="accent1"/>
+          </a:fillRef>
+          <a:effectRef idx="2">
+            <a:schemeClr val="accent1"/>
+          </a:effectRef>
+          <a:fontRef idx="minor">
+            <a:schemeClr val="lt1"/>
+          </a:fontRef>
+        </p:style>
+        <p:txBody>
+          <a:bodyPr rtlCol="0" anchor="ctr"/>
+          <a:lstStyle/>
+          <a:p>
+            <a:pPr algn="ctr"/>
+          </a:p>
+        </p:txBody>
+      </p:sp>
+      <p:sp>
+        <p:nvSpPr>
+          <p:cNvPr id="8" name="TextBox 7"/>
           <p:cNvSpPr txBox="1"/>
           <p:nvPr/>
         </p:nvSpPr>
         <p:spPr>
           <a:xfrm>
-            <a:off x="548640" y="292608"/>
-            <a:ext cx="10972800" cy="640080"/>
+            <a:off x="640080" y="292608"/>
+            <a:ext cx="10789920" cy="594360"/>
           </a:xfrm>
           <a:prstGeom prst="rect">
             <a:avLst/>
@@ -6949,14 +9305,14 @@
       </p:sp>
       <p:sp>
         <p:nvSpPr>
-          <p:cNvPr id="3" name="Rectangle 2"/>
-          <p:cNvSpPr/>
-          <p:nvPr/>
-        </p:nvSpPr>
-        <p:spPr>
-          <a:xfrm>
-            <a:off x="548640" y="932688"/>
-            <a:ext cx="2011680" cy="31750"/>
+          <p:cNvPr id="9" name="Rectangle 8"/>
+          <p:cNvSpPr/>
+          <p:nvPr/>
+        </p:nvSpPr>
+        <p:spPr>
+          <a:xfrm>
+            <a:off x="640080" y="896112"/>
+            <a:ext cx="2194560" cy="31750"/>
           </a:xfrm>
           <a:prstGeom prst="rect">
             <a:avLst/>
@@ -6992,14 +9348,143 @@
       </p:sp>
       <p:sp>
         <p:nvSpPr>
-          <p:cNvPr id="4" name="TextBox 3"/>
+          <p:cNvPr id="10" name="Rectangle 9"/>
+          <p:cNvSpPr/>
+          <p:nvPr/>
+        </p:nvSpPr>
+        <p:spPr>
+          <a:xfrm>
+            <a:off x="3017520" y="896112"/>
+            <a:ext cx="8503920" cy="9525"/>
+          </a:xfrm>
+          <a:prstGeom prst="rect">
+            <a:avLst/>
+          </a:prstGeom>
+          <a:solidFill>
+            <a:srgbClr val="D4AF37"/>
+          </a:solidFill>
+          <a:ln>
+            <a:noFill/>
+          </a:ln>
+        </p:spPr>
+        <p:style>
+          <a:lnRef idx="1">
+            <a:schemeClr val="accent1"/>
+          </a:lnRef>
+          <a:fillRef idx="3">
+            <a:schemeClr val="accent1"/>
+          </a:fillRef>
+          <a:effectRef idx="2">
+            <a:schemeClr val="accent1"/>
+          </a:effectRef>
+          <a:fontRef idx="minor">
+            <a:schemeClr val="lt1"/>
+          </a:fontRef>
+        </p:style>
+        <p:txBody>
+          <a:bodyPr rtlCol="0" anchor="ctr"/>
+          <a:lstStyle/>
+          <a:p>
+            <a:pPr algn="ctr"/>
+          </a:p>
+        </p:txBody>
+      </p:sp>
+      <p:sp>
+        <p:nvSpPr>
+          <p:cNvPr id="11" name="Rectangle 10"/>
+          <p:cNvSpPr/>
+          <p:nvPr/>
+        </p:nvSpPr>
+        <p:spPr>
+          <a:xfrm>
+            <a:off x="838047" y="1645920"/>
+            <a:ext cx="3200400" cy="3474720"/>
+          </a:xfrm>
+          <a:prstGeom prst="rect">
+            <a:avLst/>
+          </a:prstGeom>
+          <a:solidFill>
+            <a:srgbClr val="121222"/>
+          </a:solidFill>
+          <a:ln>
+            <a:noFill/>
+          </a:ln>
+        </p:spPr>
+        <p:style>
+          <a:lnRef idx="1">
+            <a:schemeClr val="accent1"/>
+          </a:lnRef>
+          <a:fillRef idx="3">
+            <a:schemeClr val="accent1"/>
+          </a:fillRef>
+          <a:effectRef idx="2">
+            <a:schemeClr val="accent1"/>
+          </a:effectRef>
+          <a:fontRef idx="minor">
+            <a:schemeClr val="lt1"/>
+          </a:fontRef>
+        </p:style>
+        <p:txBody>
+          <a:bodyPr rtlCol="0" anchor="ctr"/>
+          <a:lstStyle/>
+          <a:p>
+            <a:pPr algn="ctr"/>
+          </a:p>
+        </p:txBody>
+      </p:sp>
+      <p:sp>
+        <p:nvSpPr>
+          <p:cNvPr id="12" name="Rectangle 11"/>
+          <p:cNvSpPr/>
+          <p:nvPr/>
+        </p:nvSpPr>
+        <p:spPr>
+          <a:xfrm>
+            <a:off x="838047" y="1645920"/>
+            <a:ext cx="3200400" cy="25400"/>
+          </a:xfrm>
+          <a:prstGeom prst="rect">
+            <a:avLst/>
+          </a:prstGeom>
+          <a:solidFill>
+            <a:srgbClr val="D4AF37"/>
+          </a:solidFill>
+          <a:ln>
+            <a:noFill/>
+          </a:ln>
+        </p:spPr>
+        <p:style>
+          <a:lnRef idx="1">
+            <a:schemeClr val="accent1"/>
+          </a:lnRef>
+          <a:fillRef idx="3">
+            <a:schemeClr val="accent1"/>
+          </a:fillRef>
+          <a:effectRef idx="2">
+            <a:schemeClr val="accent1"/>
+          </a:effectRef>
+          <a:fontRef idx="minor">
+            <a:schemeClr val="lt1"/>
+          </a:fontRef>
+        </p:style>
+        <p:txBody>
+          <a:bodyPr rtlCol="0" anchor="ctr"/>
+          <a:lstStyle/>
+          <a:p>
+            <a:pPr algn="ctr"/>
+          </a:p>
+        </p:txBody>
+      </p:sp>
+      <p:sp>
+        <p:nvSpPr>
+          <p:cNvPr id="13" name="TextBox 12"/>
           <p:cNvSpPr txBox="1"/>
           <p:nvPr/>
         </p:nvSpPr>
         <p:spPr>
           <a:xfrm>
-            <a:off x="838047" y="2011680"/>
-            <a:ext cx="3200400" cy="548640"/>
+            <a:off x="838047" y="2103120"/>
+            <a:ext cx="3200400" cy="502920"/>
           </a:xfrm>
           <a:prstGeom prst="rect">
             <a:avLst/>
@@ -7028,13 +9513,13 @@
       </p:sp>
       <p:sp>
         <p:nvSpPr>
-          <p:cNvPr id="5" name="TextBox 4"/>
+          <p:cNvPr id="14" name="TextBox 13"/>
           <p:cNvSpPr txBox="1"/>
           <p:nvPr/>
         </p:nvSpPr>
         <p:spPr>
           <a:xfrm>
-            <a:off x="838047" y="2834640"/>
+            <a:off x="838047" y="2926080"/>
             <a:ext cx="3200400" cy="640080"/>
           </a:xfrm>
           <a:prstGeom prst="rect">
@@ -7064,14 +9549,14 @@
       </p:sp>
       <p:sp>
         <p:nvSpPr>
-          <p:cNvPr id="6" name="Rectangle 5"/>
-          <p:cNvSpPr/>
-          <p:nvPr/>
-        </p:nvSpPr>
-        <p:spPr>
-          <a:xfrm>
-            <a:off x="1752447" y="3566160"/>
-            <a:ext cx="1371600" cy="25400"/>
+          <p:cNvPr id="15" name="Rectangle 14"/>
+          <p:cNvSpPr/>
+          <p:nvPr/>
+        </p:nvSpPr>
+        <p:spPr>
+          <a:xfrm>
+            <a:off x="1843887" y="3703320"/>
+            <a:ext cx="1188720" cy="19050"/>
           </a:xfrm>
           <a:prstGeom prst="rect">
             <a:avLst/>
@@ -7107,13 +9592,13 @@
       </p:sp>
       <p:sp>
         <p:nvSpPr>
-          <p:cNvPr id="7" name="TextBox 6"/>
+          <p:cNvPr id="16" name="TextBox 15"/>
           <p:cNvSpPr txBox="1"/>
           <p:nvPr/>
         </p:nvSpPr>
         <p:spPr>
           <a:xfrm>
-            <a:off x="838047" y="3840480"/>
+            <a:off x="838047" y="3977639"/>
             <a:ext cx="3200400" cy="457200"/>
           </a:xfrm>
           <a:prstGeom prst="rect">
@@ -7143,14 +9628,100 @@
       </p:sp>
       <p:sp>
         <p:nvSpPr>
-          <p:cNvPr id="8" name="TextBox 7"/>
+          <p:cNvPr id="17" name="Rectangle 16"/>
+          <p:cNvSpPr/>
+          <p:nvPr/>
+        </p:nvSpPr>
+        <p:spPr>
+          <a:xfrm>
+            <a:off x="4495647" y="1645920"/>
+            <a:ext cx="3200400" cy="3474720"/>
+          </a:xfrm>
+          <a:prstGeom prst="rect">
+            <a:avLst/>
+          </a:prstGeom>
+          <a:solidFill>
+            <a:srgbClr val="121222"/>
+          </a:solidFill>
+          <a:ln>
+            <a:noFill/>
+          </a:ln>
+        </p:spPr>
+        <p:style>
+          <a:lnRef idx="1">
+            <a:schemeClr val="accent1"/>
+          </a:lnRef>
+          <a:fillRef idx="3">
+            <a:schemeClr val="accent1"/>
+          </a:fillRef>
+          <a:effectRef idx="2">
+            <a:schemeClr val="accent1"/>
+          </a:effectRef>
+          <a:fontRef idx="minor">
+            <a:schemeClr val="lt1"/>
+          </a:fontRef>
+        </p:style>
+        <p:txBody>
+          <a:bodyPr rtlCol="0" anchor="ctr"/>
+          <a:lstStyle/>
+          <a:p>
+            <a:pPr algn="ctr"/>
+          </a:p>
+        </p:txBody>
+      </p:sp>
+      <p:sp>
+        <p:nvSpPr>
+          <p:cNvPr id="18" name="Rectangle 17"/>
+          <p:cNvSpPr/>
+          <p:nvPr/>
+        </p:nvSpPr>
+        <p:spPr>
+          <a:xfrm>
+            <a:off x="4495647" y="1645920"/>
+            <a:ext cx="3200400" cy="25400"/>
+          </a:xfrm>
+          <a:prstGeom prst="rect">
+            <a:avLst/>
+          </a:prstGeom>
+          <a:solidFill>
+            <a:srgbClr val="D4AF37"/>
+          </a:solidFill>
+          <a:ln>
+            <a:noFill/>
+          </a:ln>
+        </p:spPr>
+        <p:style>
+          <a:lnRef idx="1">
+            <a:schemeClr val="accent1"/>
+          </a:lnRef>
+          <a:fillRef idx="3">
+            <a:schemeClr val="accent1"/>
+          </a:fillRef>
+          <a:effectRef idx="2">
+            <a:schemeClr val="accent1"/>
+          </a:effectRef>
+          <a:fontRef idx="minor">
+            <a:schemeClr val="lt1"/>
+          </a:fontRef>
+        </p:style>
+        <p:txBody>
+          <a:bodyPr rtlCol="0" anchor="ctr"/>
+          <a:lstStyle/>
+          <a:p>
+            <a:pPr algn="ctr"/>
+          </a:p>
+        </p:txBody>
+      </p:sp>
+      <p:sp>
+        <p:nvSpPr>
+          <p:cNvPr id="19" name="TextBox 18"/>
           <p:cNvSpPr txBox="1"/>
           <p:nvPr/>
         </p:nvSpPr>
         <p:spPr>
           <a:xfrm>
-            <a:off x="4495647" y="2011680"/>
-            <a:ext cx="3200400" cy="548640"/>
+            <a:off x="4495647" y="2103120"/>
+            <a:ext cx="3200400" cy="502920"/>
           </a:xfrm>
           <a:prstGeom prst="rect">
             <a:avLst/>
@@ -7179,13 +9750,13 @@
       </p:sp>
       <p:sp>
         <p:nvSpPr>
-          <p:cNvPr id="9" name="TextBox 8"/>
+          <p:cNvPr id="20" name="TextBox 19"/>
           <p:cNvSpPr txBox="1"/>
           <p:nvPr/>
         </p:nvSpPr>
         <p:spPr>
           <a:xfrm>
-            <a:off x="4495647" y="2834640"/>
+            <a:off x="4495647" y="2926080"/>
             <a:ext cx="3200400" cy="640080"/>
           </a:xfrm>
           <a:prstGeom prst="rect">
@@ -7215,14 +9786,14 @@
       </p:sp>
       <p:sp>
         <p:nvSpPr>
-          <p:cNvPr id="10" name="Rectangle 9"/>
-          <p:cNvSpPr/>
-          <p:nvPr/>
-        </p:nvSpPr>
-        <p:spPr>
-          <a:xfrm>
-            <a:off x="5410047" y="3566160"/>
-            <a:ext cx="1371600" cy="25400"/>
+          <p:cNvPr id="21" name="Rectangle 20"/>
+          <p:cNvSpPr/>
+          <p:nvPr/>
+        </p:nvSpPr>
+        <p:spPr>
+          <a:xfrm>
+            <a:off x="5501487" y="3703320"/>
+            <a:ext cx="1188720" cy="19050"/>
           </a:xfrm>
           <a:prstGeom prst="rect">
             <a:avLst/>
@@ -7258,13 +9829,13 @@
       </p:sp>
       <p:sp>
         <p:nvSpPr>
-          <p:cNvPr id="11" name="TextBox 10"/>
+          <p:cNvPr id="22" name="TextBox 21"/>
           <p:cNvSpPr txBox="1"/>
           <p:nvPr/>
         </p:nvSpPr>
         <p:spPr>
           <a:xfrm>
-            <a:off x="4495647" y="3840480"/>
+            <a:off x="4495647" y="3977639"/>
             <a:ext cx="3200400" cy="457200"/>
           </a:xfrm>
           <a:prstGeom prst="rect">
@@ -7294,14 +9865,100 @@
       </p:sp>
       <p:sp>
         <p:nvSpPr>
-          <p:cNvPr id="12" name="TextBox 11"/>
+          <p:cNvPr id="23" name="Rectangle 22"/>
+          <p:cNvSpPr/>
+          <p:nvPr/>
+        </p:nvSpPr>
+        <p:spPr>
+          <a:xfrm>
+            <a:off x="8153247" y="1645920"/>
+            <a:ext cx="3200400" cy="3474720"/>
+          </a:xfrm>
+          <a:prstGeom prst="rect">
+            <a:avLst/>
+          </a:prstGeom>
+          <a:solidFill>
+            <a:srgbClr val="121222"/>
+          </a:solidFill>
+          <a:ln>
+            <a:noFill/>
+          </a:ln>
+        </p:spPr>
+        <p:style>
+          <a:lnRef idx="1">
+            <a:schemeClr val="accent1"/>
+          </a:lnRef>
+          <a:fillRef idx="3">
+            <a:schemeClr val="accent1"/>
+          </a:fillRef>
+          <a:effectRef idx="2">
+            <a:schemeClr val="accent1"/>
+          </a:effectRef>
+          <a:fontRef idx="minor">
+            <a:schemeClr val="lt1"/>
+          </a:fontRef>
+        </p:style>
+        <p:txBody>
+          <a:bodyPr rtlCol="0" anchor="ctr"/>
+          <a:lstStyle/>
+          <a:p>
+            <a:pPr algn="ctr"/>
+          </a:p>
+        </p:txBody>
+      </p:sp>
+      <p:sp>
+        <p:nvSpPr>
+          <p:cNvPr id="24" name="Rectangle 23"/>
+          <p:cNvSpPr/>
+          <p:nvPr/>
+        </p:nvSpPr>
+        <p:spPr>
+          <a:xfrm>
+            <a:off x="8153247" y="1645920"/>
+            <a:ext cx="3200400" cy="25400"/>
+          </a:xfrm>
+          <a:prstGeom prst="rect">
+            <a:avLst/>
+          </a:prstGeom>
+          <a:solidFill>
+            <a:srgbClr val="D4AF37"/>
+          </a:solidFill>
+          <a:ln>
+            <a:noFill/>
+          </a:ln>
+        </p:spPr>
+        <p:style>
+          <a:lnRef idx="1">
+            <a:schemeClr val="accent1"/>
+          </a:lnRef>
+          <a:fillRef idx="3">
+            <a:schemeClr val="accent1"/>
+          </a:fillRef>
+          <a:effectRef idx="2">
+            <a:schemeClr val="accent1"/>
+          </a:effectRef>
+          <a:fontRef idx="minor">
+            <a:schemeClr val="lt1"/>
+          </a:fontRef>
+        </p:style>
+        <p:txBody>
+          <a:bodyPr rtlCol="0" anchor="ctr"/>
+          <a:lstStyle/>
+          <a:p>
+            <a:pPr algn="ctr"/>
+          </a:p>
+        </p:txBody>
+      </p:sp>
+      <p:sp>
+        <p:nvSpPr>
+          <p:cNvPr id="25" name="TextBox 24"/>
           <p:cNvSpPr txBox="1"/>
           <p:nvPr/>
         </p:nvSpPr>
         <p:spPr>
           <a:xfrm>
-            <a:off x="8153247" y="2011680"/>
-            <a:ext cx="3200400" cy="548640"/>
+            <a:off x="8153247" y="2103120"/>
+            <a:ext cx="3200400" cy="502920"/>
           </a:xfrm>
           <a:prstGeom prst="rect">
             <a:avLst/>
@@ -7330,13 +9987,13 @@
       </p:sp>
       <p:sp>
         <p:nvSpPr>
-          <p:cNvPr id="13" name="TextBox 12"/>
+          <p:cNvPr id="26" name="TextBox 25"/>
           <p:cNvSpPr txBox="1"/>
           <p:nvPr/>
         </p:nvSpPr>
         <p:spPr>
           <a:xfrm>
-            <a:off x="8153247" y="2834640"/>
+            <a:off x="8153247" y="2926080"/>
             <a:ext cx="3200400" cy="640080"/>
           </a:xfrm>
           <a:prstGeom prst="rect">
@@ -7366,14 +10023,14 @@
       </p:sp>
       <p:sp>
         <p:nvSpPr>
-          <p:cNvPr id="14" name="Rectangle 13"/>
-          <p:cNvSpPr/>
-          <p:nvPr/>
-        </p:nvSpPr>
-        <p:spPr>
-          <a:xfrm>
-            <a:off x="9067647" y="3566160"/>
-            <a:ext cx="1371600" cy="25400"/>
+          <p:cNvPr id="27" name="Rectangle 26"/>
+          <p:cNvSpPr/>
+          <p:nvPr/>
+        </p:nvSpPr>
+        <p:spPr>
+          <a:xfrm>
+            <a:off x="9159087" y="3703320"/>
+            <a:ext cx="1188720" cy="19050"/>
           </a:xfrm>
           <a:prstGeom prst="rect">
             <a:avLst/>
@@ -7409,13 +10066,13 @@
       </p:sp>
       <p:sp>
         <p:nvSpPr>
-          <p:cNvPr id="15" name="TextBox 14"/>
+          <p:cNvPr id="28" name="TextBox 27"/>
           <p:cNvSpPr txBox="1"/>
           <p:nvPr/>
         </p:nvSpPr>
         <p:spPr>
           <a:xfrm>
-            <a:off x="8153247" y="3840480"/>
+            <a:off x="8153247" y="3977639"/>
             <a:ext cx="3200400" cy="457200"/>
           </a:xfrm>
           <a:prstGeom prst="rect">
@@ -7445,14 +10102,57 @@
       </p:sp>
       <p:sp>
         <p:nvSpPr>
-          <p:cNvPr id="16" name="TextBox 15"/>
+          <p:cNvPr id="29" name="Rectangle 28"/>
+          <p:cNvSpPr/>
+          <p:nvPr/>
+        </p:nvSpPr>
+        <p:spPr>
+          <a:xfrm>
+            <a:off x="457200" y="6355080"/>
+            <a:ext cx="11247120" cy="12700"/>
+          </a:xfrm>
+          <a:prstGeom prst="rect">
+            <a:avLst/>
+          </a:prstGeom>
+          <a:solidFill>
+            <a:srgbClr val="D4AF37"/>
+          </a:solidFill>
+          <a:ln>
+            <a:noFill/>
+          </a:ln>
+        </p:spPr>
+        <p:style>
+          <a:lnRef idx="1">
+            <a:schemeClr val="accent1"/>
+          </a:lnRef>
+          <a:fillRef idx="3">
+            <a:schemeClr val="accent1"/>
+          </a:fillRef>
+          <a:effectRef idx="2">
+            <a:schemeClr val="accent1"/>
+          </a:effectRef>
+          <a:fontRef idx="minor">
+            <a:schemeClr val="lt1"/>
+          </a:fontRef>
+        </p:style>
+        <p:txBody>
+          <a:bodyPr rtlCol="0" anchor="ctr"/>
+          <a:lstStyle/>
+          <a:p>
+            <a:pPr algn="ctr"/>
+          </a:p>
+        </p:txBody>
+      </p:sp>
+      <p:sp>
+        <p:nvSpPr>
+          <p:cNvPr id="30" name="TextBox 29"/>
           <p:cNvSpPr txBox="1"/>
           <p:nvPr/>
         </p:nvSpPr>
         <p:spPr>
           <a:xfrm>
-            <a:off x="7772400" y="6446520"/>
-            <a:ext cx="4114800" cy="320040"/>
+            <a:off x="7589520" y="6419088"/>
+            <a:ext cx="4297680" cy="292608"/>
           </a:xfrm>
           <a:prstGeom prst="rect">
             <a:avLst/>
@@ -7469,56 +10169,13 @@
             <a:r>
               <a:rPr sz="1000" b="0">
                 <a:solidFill>
-                  <a:srgbClr val="AAAAAA"/>
+                  <a:srgbClr val="A8A8B0"/>
                 </a:solidFill>
                 <a:latin typeface="Arial"/>
                 <a:ea typeface="Arial"/>
               </a:rPr>
               <a:t>光影盟特训营  ·  2/14</a:t>
             </a:r>
-          </a:p>
-        </p:txBody>
-      </p:sp>
-      <p:sp>
-        <p:nvSpPr>
-          <p:cNvPr id="17" name="Rectangle 16"/>
-          <p:cNvSpPr/>
-          <p:nvPr/>
-        </p:nvSpPr>
-        <p:spPr>
-          <a:xfrm>
-            <a:off x="457200" y="6400800"/>
-            <a:ext cx="11247120" cy="12700"/>
-          </a:xfrm>
-          <a:prstGeom prst="rect">
-            <a:avLst/>
-          </a:prstGeom>
-          <a:solidFill>
-            <a:srgbClr val="D4AF37"/>
-          </a:solidFill>
-          <a:ln>
-            <a:noFill/>
-          </a:ln>
-        </p:spPr>
-        <p:style>
-          <a:lnRef idx="1">
-            <a:schemeClr val="accent1"/>
-          </a:lnRef>
-          <a:fillRef idx="3">
-            <a:schemeClr val="accent1"/>
-          </a:fillRef>
-          <a:effectRef idx="2">
-            <a:schemeClr val="accent1"/>
-          </a:effectRef>
-          <a:fontRef idx="minor">
-            <a:schemeClr val="lt1"/>
-          </a:fontRef>
-        </p:style>
-        <p:txBody>
-          <a:bodyPr rtlCol="0" anchor="ctr"/>
-          <a:lstStyle/>
-          <a:p>
-            <a:pPr algn="ctr"/>
           </a:p>
         </p:txBody>
       </p:sp>
@@ -7550,14 +10207,272 @@
       <p:grpSpPr/>
       <p:sp>
         <p:nvSpPr>
-          <p:cNvPr id="2" name="TextBox 1"/>
+          <p:cNvPr id="2" name="Rectangle 1"/>
+          <p:cNvSpPr/>
+          <p:nvPr/>
+        </p:nvSpPr>
+        <p:spPr>
+          <a:xfrm>
+            <a:off x="256032" y="201168"/>
+            <a:ext cx="11676888" cy="12700"/>
+          </a:xfrm>
+          <a:prstGeom prst="rect">
+            <a:avLst/>
+          </a:prstGeom>
+          <a:solidFill>
+            <a:srgbClr val="D4AF37"/>
+          </a:solidFill>
+          <a:ln>
+            <a:noFill/>
+          </a:ln>
+        </p:spPr>
+        <p:style>
+          <a:lnRef idx="1">
+            <a:schemeClr val="accent1"/>
+          </a:lnRef>
+          <a:fillRef idx="3">
+            <a:schemeClr val="accent1"/>
+          </a:fillRef>
+          <a:effectRef idx="2">
+            <a:schemeClr val="accent1"/>
+          </a:effectRef>
+          <a:fontRef idx="minor">
+            <a:schemeClr val="lt1"/>
+          </a:fontRef>
+        </p:style>
+        <p:txBody>
+          <a:bodyPr rtlCol="0" anchor="ctr"/>
+          <a:lstStyle/>
+          <a:p>
+            <a:pPr algn="ctr"/>
+          </a:p>
+        </p:txBody>
+      </p:sp>
+      <p:sp>
+        <p:nvSpPr>
+          <p:cNvPr id="3" name="Rectangle 2"/>
+          <p:cNvSpPr/>
+          <p:nvPr/>
+        </p:nvSpPr>
+        <p:spPr>
+          <a:xfrm>
+            <a:off x="256032" y="6565392"/>
+            <a:ext cx="11676888" cy="12700"/>
+          </a:xfrm>
+          <a:prstGeom prst="rect">
+            <a:avLst/>
+          </a:prstGeom>
+          <a:solidFill>
+            <a:srgbClr val="D4AF37"/>
+          </a:solidFill>
+          <a:ln>
+            <a:noFill/>
+          </a:ln>
+        </p:spPr>
+        <p:style>
+          <a:lnRef idx="1">
+            <a:schemeClr val="accent1"/>
+          </a:lnRef>
+          <a:fillRef idx="3">
+            <a:schemeClr val="accent1"/>
+          </a:fillRef>
+          <a:effectRef idx="2">
+            <a:schemeClr val="accent1"/>
+          </a:effectRef>
+          <a:fontRef idx="minor">
+            <a:schemeClr val="lt1"/>
+          </a:fontRef>
+        </p:style>
+        <p:txBody>
+          <a:bodyPr rtlCol="0" anchor="ctr"/>
+          <a:lstStyle/>
+          <a:p>
+            <a:pPr algn="ctr"/>
+          </a:p>
+        </p:txBody>
+      </p:sp>
+      <p:sp>
+        <p:nvSpPr>
+          <p:cNvPr id="4" name="Rectangle 3"/>
+          <p:cNvSpPr/>
+          <p:nvPr/>
+        </p:nvSpPr>
+        <p:spPr>
+          <a:xfrm>
+            <a:off x="256032" y="201168"/>
+            <a:ext cx="12700" cy="6364224"/>
+          </a:xfrm>
+          <a:prstGeom prst="rect">
+            <a:avLst/>
+          </a:prstGeom>
+          <a:solidFill>
+            <a:srgbClr val="D4AF37"/>
+          </a:solidFill>
+          <a:ln>
+            <a:noFill/>
+          </a:ln>
+        </p:spPr>
+        <p:style>
+          <a:lnRef idx="1">
+            <a:schemeClr val="accent1"/>
+          </a:lnRef>
+          <a:fillRef idx="3">
+            <a:schemeClr val="accent1"/>
+          </a:fillRef>
+          <a:effectRef idx="2">
+            <a:schemeClr val="accent1"/>
+          </a:effectRef>
+          <a:fontRef idx="minor">
+            <a:schemeClr val="lt1"/>
+          </a:fontRef>
+        </p:style>
+        <p:txBody>
+          <a:bodyPr rtlCol="0" anchor="ctr"/>
+          <a:lstStyle/>
+          <a:p>
+            <a:pPr algn="ctr"/>
+          </a:p>
+        </p:txBody>
+      </p:sp>
+      <p:sp>
+        <p:nvSpPr>
+          <p:cNvPr id="5" name="Rectangle 4"/>
+          <p:cNvSpPr/>
+          <p:nvPr/>
+        </p:nvSpPr>
+        <p:spPr>
+          <a:xfrm>
+            <a:off x="11932920" y="201168"/>
+            <a:ext cx="12700" cy="6364224"/>
+          </a:xfrm>
+          <a:prstGeom prst="rect">
+            <a:avLst/>
+          </a:prstGeom>
+          <a:solidFill>
+            <a:srgbClr val="D4AF37"/>
+          </a:solidFill>
+          <a:ln>
+            <a:noFill/>
+          </a:ln>
+        </p:spPr>
+        <p:style>
+          <a:lnRef idx="1">
+            <a:schemeClr val="accent1"/>
+          </a:lnRef>
+          <a:fillRef idx="3">
+            <a:schemeClr val="accent1"/>
+          </a:fillRef>
+          <a:effectRef idx="2">
+            <a:schemeClr val="accent1"/>
+          </a:effectRef>
+          <a:fontRef idx="minor">
+            <a:schemeClr val="lt1"/>
+          </a:fontRef>
+        </p:style>
+        <p:txBody>
+          <a:bodyPr rtlCol="0" anchor="ctr"/>
+          <a:lstStyle/>
+          <a:p>
+            <a:pPr algn="ctr"/>
+          </a:p>
+        </p:txBody>
+      </p:sp>
+      <p:sp>
+        <p:nvSpPr>
+          <p:cNvPr id="6" name="Rectangle 5"/>
+          <p:cNvSpPr/>
+          <p:nvPr/>
+        </p:nvSpPr>
+        <p:spPr>
+          <a:xfrm>
+            <a:off x="320040" y="365760"/>
+            <a:ext cx="54864" cy="5760720"/>
+          </a:xfrm>
+          <a:prstGeom prst="rect">
+            <a:avLst/>
+          </a:prstGeom>
+          <a:solidFill>
+            <a:srgbClr val="D4AF37"/>
+          </a:solidFill>
+          <a:ln>
+            <a:noFill/>
+          </a:ln>
+        </p:spPr>
+        <p:style>
+          <a:lnRef idx="1">
+            <a:schemeClr val="accent1"/>
+          </a:lnRef>
+          <a:fillRef idx="3">
+            <a:schemeClr val="accent1"/>
+          </a:fillRef>
+          <a:effectRef idx="2">
+            <a:schemeClr val="accent1"/>
+          </a:effectRef>
+          <a:fontRef idx="minor">
+            <a:schemeClr val="lt1"/>
+          </a:fontRef>
+        </p:style>
+        <p:txBody>
+          <a:bodyPr rtlCol="0" anchor="ctr"/>
+          <a:lstStyle/>
+          <a:p>
+            <a:pPr algn="ctr"/>
+          </a:p>
+        </p:txBody>
+      </p:sp>
+      <p:sp>
+        <p:nvSpPr>
+          <p:cNvPr id="7" name="Rectangle 6"/>
+          <p:cNvSpPr/>
+          <p:nvPr/>
+        </p:nvSpPr>
+        <p:spPr>
+          <a:xfrm>
+            <a:off x="448056" y="365760"/>
+            <a:ext cx="12700" cy="5760720"/>
+          </a:xfrm>
+          <a:prstGeom prst="rect">
+            <a:avLst/>
+          </a:prstGeom>
+          <a:solidFill>
+            <a:srgbClr val="2A2A3E"/>
+          </a:solidFill>
+          <a:ln>
+            <a:noFill/>
+          </a:ln>
+        </p:spPr>
+        <p:style>
+          <a:lnRef idx="1">
+            <a:schemeClr val="accent1"/>
+          </a:lnRef>
+          <a:fillRef idx="3">
+            <a:schemeClr val="accent1"/>
+          </a:fillRef>
+          <a:effectRef idx="2">
+            <a:schemeClr val="accent1"/>
+          </a:effectRef>
+          <a:fontRef idx="minor">
+            <a:schemeClr val="lt1"/>
+          </a:fontRef>
+        </p:style>
+        <p:txBody>
+          <a:bodyPr rtlCol="0" anchor="ctr"/>
+          <a:lstStyle/>
+          <a:p>
+            <a:pPr algn="ctr"/>
+          </a:p>
+        </p:txBody>
+      </p:sp>
+      <p:sp>
+        <p:nvSpPr>
+          <p:cNvPr id="8" name="TextBox 7"/>
           <p:cNvSpPr txBox="1"/>
           <p:nvPr/>
         </p:nvSpPr>
         <p:spPr>
           <a:xfrm>
-            <a:off x="548640" y="292608"/>
-            <a:ext cx="10972800" cy="640080"/>
+            <a:off x="640080" y="292608"/>
+            <a:ext cx="10789920" cy="594360"/>
           </a:xfrm>
           <a:prstGeom prst="rect">
             <a:avLst/>
@@ -7586,14 +10501,14 @@
       </p:sp>
       <p:sp>
         <p:nvSpPr>
-          <p:cNvPr id="3" name="Rectangle 2"/>
-          <p:cNvSpPr/>
-          <p:nvPr/>
-        </p:nvSpPr>
-        <p:spPr>
-          <a:xfrm>
-            <a:off x="548640" y="932688"/>
-            <a:ext cx="2011680" cy="31750"/>
+          <p:cNvPr id="9" name="Rectangle 8"/>
+          <p:cNvSpPr/>
+          <p:nvPr/>
+        </p:nvSpPr>
+        <p:spPr>
+          <a:xfrm>
+            <a:off x="640080" y="896112"/>
+            <a:ext cx="2194560" cy="31750"/>
           </a:xfrm>
           <a:prstGeom prst="rect">
             <a:avLst/>
@@ -7629,20 +10544,63 @@
       </p:sp>
       <p:sp>
         <p:nvSpPr>
-          <p:cNvPr id="4" name="Rectangle 3"/>
-          <p:cNvSpPr/>
-          <p:nvPr/>
-        </p:nvSpPr>
-        <p:spPr>
-          <a:xfrm>
-            <a:off x="508863" y="1188720"/>
-            <a:ext cx="2103120" cy="3108960"/>
-          </a:xfrm>
-          <a:prstGeom prst="rect">
-            <a:avLst/>
-          </a:prstGeom>
-          <a:solidFill>
-            <a:srgbClr val="202035"/>
+          <p:cNvPr id="10" name="Rectangle 9"/>
+          <p:cNvSpPr/>
+          <p:nvPr/>
+        </p:nvSpPr>
+        <p:spPr>
+          <a:xfrm>
+            <a:off x="3017520" y="896112"/>
+            <a:ext cx="8503920" cy="9525"/>
+          </a:xfrm>
+          <a:prstGeom prst="rect">
+            <a:avLst/>
+          </a:prstGeom>
+          <a:solidFill>
+            <a:srgbClr val="D4AF37"/>
+          </a:solidFill>
+          <a:ln>
+            <a:noFill/>
+          </a:ln>
+        </p:spPr>
+        <p:style>
+          <a:lnRef idx="1">
+            <a:schemeClr val="accent1"/>
+          </a:lnRef>
+          <a:fillRef idx="3">
+            <a:schemeClr val="accent1"/>
+          </a:fillRef>
+          <a:effectRef idx="2">
+            <a:schemeClr val="accent1"/>
+          </a:effectRef>
+          <a:fontRef idx="minor">
+            <a:schemeClr val="lt1"/>
+          </a:fontRef>
+        </p:style>
+        <p:txBody>
+          <a:bodyPr rtlCol="0" anchor="ctr"/>
+          <a:lstStyle/>
+          <a:p>
+            <a:pPr algn="ctr"/>
+          </a:p>
+        </p:txBody>
+      </p:sp>
+      <p:sp>
+        <p:nvSpPr>
+          <p:cNvPr id="11" name="Rectangle 10"/>
+          <p:cNvSpPr/>
+          <p:nvPr/>
+        </p:nvSpPr>
+        <p:spPr>
+          <a:xfrm>
+            <a:off x="545439" y="1188720"/>
+            <a:ext cx="2103120" cy="3063240"/>
+          </a:xfrm>
+          <a:prstGeom prst="rect">
+            <a:avLst/>
+          </a:prstGeom>
+          <a:solidFill>
+            <a:srgbClr val="121222"/>
           </a:solidFill>
           <a:ln w="25400" cap="flat">
             <a:solidFill>
@@ -7673,7 +10631,7 @@
             <a:r>
               <a:rPr sz="1400" b="0">
                 <a:solidFill>
-                  <a:srgbClr val="AAAAAA"/>
+                  <a:srgbClr val="A8A8B0"/>
                 </a:solidFill>
                 <a:latin typeface="Arial"/>
                 <a:ea typeface="Arial"/>
@@ -7685,14 +10643,14 @@
       </p:sp>
       <p:sp>
         <p:nvSpPr>
-          <p:cNvPr id="5" name="TextBox 4"/>
+          <p:cNvPr id="12" name="TextBox 11"/>
           <p:cNvSpPr txBox="1"/>
           <p:nvPr/>
         </p:nvSpPr>
         <p:spPr>
           <a:xfrm>
-            <a:off x="463143" y="4389120"/>
-            <a:ext cx="2194560" cy="365760"/>
+            <a:off x="499719" y="4325112"/>
+            <a:ext cx="2194560" cy="347472"/>
           </a:xfrm>
           <a:prstGeom prst="rect">
             <a:avLst/>
@@ -7707,7 +10665,7 @@
           <a:p>
             <a:pPr algn="ctr"/>
             <a:r>
-              <a:rPr sz="1400" b="0">
+              <a:rPr sz="1300" b="0">
                 <a:solidFill>
                   <a:srgbClr val="D4AF37"/>
                 </a:solidFill>
@@ -7721,20 +10679,20 @@
       </p:sp>
       <p:sp>
         <p:nvSpPr>
-          <p:cNvPr id="6" name="Rectangle 5"/>
-          <p:cNvSpPr/>
-          <p:nvPr/>
-        </p:nvSpPr>
-        <p:spPr>
-          <a:xfrm>
-            <a:off x="2776575" y="1188720"/>
-            <a:ext cx="2103120" cy="3108960"/>
-          </a:xfrm>
-          <a:prstGeom prst="rect">
-            <a:avLst/>
-          </a:prstGeom>
-          <a:solidFill>
-            <a:srgbClr val="202035"/>
+          <p:cNvPr id="13" name="Rectangle 12"/>
+          <p:cNvSpPr/>
+          <p:nvPr/>
+        </p:nvSpPr>
+        <p:spPr>
+          <a:xfrm>
+            <a:off x="2794863" y="1188720"/>
+            <a:ext cx="2103120" cy="3063240"/>
+          </a:xfrm>
+          <a:prstGeom prst="rect">
+            <a:avLst/>
+          </a:prstGeom>
+          <a:solidFill>
+            <a:srgbClr val="121222"/>
           </a:solidFill>
           <a:ln w="25400" cap="flat">
             <a:solidFill>
@@ -7765,7 +10723,7 @@
             <a:r>
               <a:rPr sz="1400" b="0">
                 <a:solidFill>
-                  <a:srgbClr val="AAAAAA"/>
+                  <a:srgbClr val="A8A8B0"/>
                 </a:solidFill>
                 <a:latin typeface="Arial"/>
                 <a:ea typeface="Arial"/>
@@ -7777,14 +10735,14 @@
       </p:sp>
       <p:sp>
         <p:nvSpPr>
-          <p:cNvPr id="7" name="TextBox 6"/>
+          <p:cNvPr id="14" name="TextBox 13"/>
           <p:cNvSpPr txBox="1"/>
           <p:nvPr/>
         </p:nvSpPr>
         <p:spPr>
           <a:xfrm>
-            <a:off x="2730855" y="4389120"/>
-            <a:ext cx="2194560" cy="365760"/>
+            <a:off x="2749143" y="4325112"/>
+            <a:ext cx="2194560" cy="347472"/>
           </a:xfrm>
           <a:prstGeom prst="rect">
             <a:avLst/>
@@ -7799,7 +10757,7 @@
           <a:p>
             <a:pPr algn="ctr"/>
             <a:r>
-              <a:rPr sz="1400" b="0">
+              <a:rPr sz="1300" b="0">
                 <a:solidFill>
                   <a:srgbClr val="D4AF37"/>
                 </a:solidFill>
@@ -7813,20 +10771,20 @@
       </p:sp>
       <p:sp>
         <p:nvSpPr>
-          <p:cNvPr id="8" name="Rectangle 7"/>
+          <p:cNvPr id="15" name="Rectangle 14"/>
           <p:cNvSpPr/>
           <p:nvPr/>
         </p:nvSpPr>
         <p:spPr>
           <a:xfrm>
             <a:off x="5044287" y="1188720"/>
-            <a:ext cx="2103120" cy="3108960"/>
-          </a:xfrm>
-          <a:prstGeom prst="rect">
-            <a:avLst/>
-          </a:prstGeom>
-          <a:solidFill>
-            <a:srgbClr val="202035"/>
+            <a:ext cx="2103120" cy="3063240"/>
+          </a:xfrm>
+          <a:prstGeom prst="rect">
+            <a:avLst/>
+          </a:prstGeom>
+          <a:solidFill>
+            <a:srgbClr val="121222"/>
           </a:solidFill>
           <a:ln w="25400" cap="flat">
             <a:solidFill>
@@ -7857,7 +10815,7 @@
             <a:r>
               <a:rPr sz="1400" b="0">
                 <a:solidFill>
-                  <a:srgbClr val="AAAAAA"/>
+                  <a:srgbClr val="A8A8B0"/>
                 </a:solidFill>
                 <a:latin typeface="Arial"/>
                 <a:ea typeface="Arial"/>
@@ -7869,14 +10827,14 @@
       </p:sp>
       <p:sp>
         <p:nvSpPr>
-          <p:cNvPr id="9" name="TextBox 8"/>
+          <p:cNvPr id="16" name="TextBox 15"/>
           <p:cNvSpPr txBox="1"/>
           <p:nvPr/>
         </p:nvSpPr>
         <p:spPr>
           <a:xfrm>
-            <a:off x="4998567" y="4389120"/>
-            <a:ext cx="2194560" cy="365760"/>
+            <a:off x="4998567" y="4325112"/>
+            <a:ext cx="2194560" cy="347472"/>
           </a:xfrm>
           <a:prstGeom prst="rect">
             <a:avLst/>
@@ -7891,7 +10849,7 @@
           <a:p>
             <a:pPr algn="ctr"/>
             <a:r>
-              <a:rPr sz="1400" b="0">
+              <a:rPr sz="1300" b="0">
                 <a:solidFill>
                   <a:srgbClr val="D4AF37"/>
                 </a:solidFill>
@@ -7905,20 +10863,20 @@
       </p:sp>
       <p:sp>
         <p:nvSpPr>
-          <p:cNvPr id="10" name="Rectangle 9"/>
-          <p:cNvSpPr/>
-          <p:nvPr/>
-        </p:nvSpPr>
-        <p:spPr>
-          <a:xfrm>
-            <a:off x="7311999" y="1188720"/>
-            <a:ext cx="2103120" cy="3108960"/>
-          </a:xfrm>
-          <a:prstGeom prst="rect">
-            <a:avLst/>
-          </a:prstGeom>
-          <a:solidFill>
-            <a:srgbClr val="202035"/>
+          <p:cNvPr id="17" name="Rectangle 16"/>
+          <p:cNvSpPr/>
+          <p:nvPr/>
+        </p:nvSpPr>
+        <p:spPr>
+          <a:xfrm>
+            <a:off x="7293711" y="1188720"/>
+            <a:ext cx="2103120" cy="3063240"/>
+          </a:xfrm>
+          <a:prstGeom prst="rect">
+            <a:avLst/>
+          </a:prstGeom>
+          <a:solidFill>
+            <a:srgbClr val="121222"/>
           </a:solidFill>
           <a:ln w="25400" cap="flat">
             <a:solidFill>
@@ -7949,26 +10907,26 @@
             <a:r>
               <a:rPr sz="1400" b="0">
                 <a:solidFill>
-                  <a:srgbClr val="AAAAAA"/>
+                  <a:srgbClr val="A8A8B0"/>
                 </a:solidFill>
                 <a:latin typeface="Arial"/>
                 <a:ea typeface="Arial"/>
               </a:rPr>
-              <a:t>[图：近景-少年的你哭戏]</a:t>
-            </a:r>
-          </a:p>
-        </p:txBody>
-      </p:sp>
-      <p:sp>
-        <p:nvSpPr>
-          <p:cNvPr id="11" name="TextBox 10"/>
+              <a:t>[图：近景-少年的你周冬雨哭戏]</a:t>
+            </a:r>
+          </a:p>
+        </p:txBody>
+      </p:sp>
+      <p:sp>
+        <p:nvSpPr>
+          <p:cNvPr id="18" name="TextBox 17"/>
           <p:cNvSpPr txBox="1"/>
           <p:nvPr/>
         </p:nvSpPr>
         <p:spPr>
           <a:xfrm>
-            <a:off x="7266279" y="4389120"/>
-            <a:ext cx="2194560" cy="365760"/>
+            <a:off x="7247991" y="4325112"/>
+            <a:ext cx="2194560" cy="347472"/>
           </a:xfrm>
           <a:prstGeom prst="rect">
             <a:avLst/>
@@ -7983,7 +10941,7 @@
           <a:p>
             <a:pPr algn="ctr"/>
             <a:r>
-              <a:rPr sz="1400" b="0">
+              <a:rPr sz="1300" b="0">
                 <a:solidFill>
                   <a:srgbClr val="D4AF37"/>
                 </a:solidFill>
@@ -7997,20 +10955,20 @@
       </p:sp>
       <p:sp>
         <p:nvSpPr>
-          <p:cNvPr id="12" name="Rectangle 11"/>
-          <p:cNvSpPr/>
-          <p:nvPr/>
-        </p:nvSpPr>
-        <p:spPr>
-          <a:xfrm>
-            <a:off x="9579711" y="1188720"/>
-            <a:ext cx="2103120" cy="3108960"/>
-          </a:xfrm>
-          <a:prstGeom prst="rect">
-            <a:avLst/>
-          </a:prstGeom>
-          <a:solidFill>
-            <a:srgbClr val="202035"/>
+          <p:cNvPr id="19" name="Rectangle 18"/>
+          <p:cNvSpPr/>
+          <p:nvPr/>
+        </p:nvSpPr>
+        <p:spPr>
+          <a:xfrm>
+            <a:off x="9543135" y="1188720"/>
+            <a:ext cx="2103120" cy="3063240"/>
+          </a:xfrm>
+          <a:prstGeom prst="rect">
+            <a:avLst/>
+          </a:prstGeom>
+          <a:solidFill>
+            <a:srgbClr val="121222"/>
           </a:solidFill>
           <a:ln w="25400" cap="flat">
             <a:solidFill>
@@ -8041,7 +10999,7 @@
             <a:r>
               <a:rPr sz="1400" b="0">
                 <a:solidFill>
-                  <a:srgbClr val="AAAAAA"/>
+                  <a:srgbClr val="A8A8B0"/>
                 </a:solidFill>
                 <a:latin typeface="Arial"/>
                 <a:ea typeface="Arial"/>
@@ -8053,14 +11011,14 @@
       </p:sp>
       <p:sp>
         <p:nvSpPr>
-          <p:cNvPr id="13" name="TextBox 12"/>
+          <p:cNvPr id="20" name="TextBox 19"/>
           <p:cNvSpPr txBox="1"/>
           <p:nvPr/>
         </p:nvSpPr>
         <p:spPr>
           <a:xfrm>
-            <a:off x="9533991" y="4389120"/>
-            <a:ext cx="2194560" cy="365760"/>
+            <a:off x="9497415" y="4325112"/>
+            <a:ext cx="2194560" cy="347472"/>
           </a:xfrm>
           <a:prstGeom prst="rect">
             <a:avLst/>
@@ -8075,7 +11033,7 @@
           <a:p>
             <a:pPr algn="ctr"/>
             <a:r>
-              <a:rPr sz="1400" b="0">
+              <a:rPr sz="1300" b="0">
                 <a:solidFill>
                   <a:srgbClr val="D4AF37"/>
                 </a:solidFill>
@@ -8089,14 +11047,14 @@
       </p:sp>
       <p:sp>
         <p:nvSpPr>
-          <p:cNvPr id="14" name="TextBox 13"/>
+          <p:cNvPr id="21" name="TextBox 20"/>
           <p:cNvSpPr txBox="1"/>
           <p:nvPr/>
         </p:nvSpPr>
         <p:spPr>
           <a:xfrm>
-            <a:off x="548640" y="5440680"/>
-            <a:ext cx="10972800" cy="502920"/>
+            <a:off x="640080" y="5394960"/>
+            <a:ext cx="10881360" cy="502920"/>
           </a:xfrm>
           <a:prstGeom prst="rect">
             <a:avLst/>
@@ -8125,14 +11083,57 @@
       </p:sp>
       <p:sp>
         <p:nvSpPr>
-          <p:cNvPr id="15" name="TextBox 14"/>
+          <p:cNvPr id="22" name="Rectangle 21"/>
+          <p:cNvSpPr/>
+          <p:nvPr/>
+        </p:nvSpPr>
+        <p:spPr>
+          <a:xfrm>
+            <a:off x="457200" y="6355080"/>
+            <a:ext cx="11247120" cy="12700"/>
+          </a:xfrm>
+          <a:prstGeom prst="rect">
+            <a:avLst/>
+          </a:prstGeom>
+          <a:solidFill>
+            <a:srgbClr val="D4AF37"/>
+          </a:solidFill>
+          <a:ln>
+            <a:noFill/>
+          </a:ln>
+        </p:spPr>
+        <p:style>
+          <a:lnRef idx="1">
+            <a:schemeClr val="accent1"/>
+          </a:lnRef>
+          <a:fillRef idx="3">
+            <a:schemeClr val="accent1"/>
+          </a:fillRef>
+          <a:effectRef idx="2">
+            <a:schemeClr val="accent1"/>
+          </a:effectRef>
+          <a:fontRef idx="minor">
+            <a:schemeClr val="lt1"/>
+          </a:fontRef>
+        </p:style>
+        <p:txBody>
+          <a:bodyPr rtlCol="0" anchor="ctr"/>
+          <a:lstStyle/>
+          <a:p>
+            <a:pPr algn="ctr"/>
+          </a:p>
+        </p:txBody>
+      </p:sp>
+      <p:sp>
+        <p:nvSpPr>
+          <p:cNvPr id="23" name="TextBox 22"/>
           <p:cNvSpPr txBox="1"/>
           <p:nvPr/>
         </p:nvSpPr>
         <p:spPr>
           <a:xfrm>
-            <a:off x="7772400" y="6446520"/>
-            <a:ext cx="4114800" cy="320040"/>
+            <a:off x="7589520" y="6419088"/>
+            <a:ext cx="4297680" cy="292608"/>
           </a:xfrm>
           <a:prstGeom prst="rect">
             <a:avLst/>
@@ -8149,56 +11150,13 @@
             <a:r>
               <a:rPr sz="1000" b="0">
                 <a:solidFill>
-                  <a:srgbClr val="AAAAAA"/>
+                  <a:srgbClr val="A8A8B0"/>
                 </a:solidFill>
                 <a:latin typeface="Arial"/>
                 <a:ea typeface="Arial"/>
               </a:rPr>
               <a:t>光影盟特训营  ·  3/14</a:t>
             </a:r>
-          </a:p>
-        </p:txBody>
-      </p:sp>
-      <p:sp>
-        <p:nvSpPr>
-          <p:cNvPr id="16" name="Rectangle 15"/>
-          <p:cNvSpPr/>
-          <p:nvPr/>
-        </p:nvSpPr>
-        <p:spPr>
-          <a:xfrm>
-            <a:off x="457200" y="6400800"/>
-            <a:ext cx="11247120" cy="12700"/>
-          </a:xfrm>
-          <a:prstGeom prst="rect">
-            <a:avLst/>
-          </a:prstGeom>
-          <a:solidFill>
-            <a:srgbClr val="D4AF37"/>
-          </a:solidFill>
-          <a:ln>
-            <a:noFill/>
-          </a:ln>
-        </p:spPr>
-        <p:style>
-          <a:lnRef idx="1">
-            <a:schemeClr val="accent1"/>
-          </a:lnRef>
-          <a:fillRef idx="3">
-            <a:schemeClr val="accent1"/>
-          </a:fillRef>
-          <a:effectRef idx="2">
-            <a:schemeClr val="accent1"/>
-          </a:effectRef>
-          <a:fontRef idx="minor">
-            <a:schemeClr val="lt1"/>
-          </a:fontRef>
-        </p:style>
-        <p:txBody>
-          <a:bodyPr rtlCol="0" anchor="ctr"/>
-          <a:lstStyle/>
-          <a:p>
-            <a:pPr algn="ctr"/>
           </a:p>
         </p:txBody>
       </p:sp>
@@ -8230,14 +11188,272 @@
       <p:grpSpPr/>
       <p:sp>
         <p:nvSpPr>
-          <p:cNvPr id="2" name="TextBox 1"/>
+          <p:cNvPr id="2" name="Rectangle 1"/>
+          <p:cNvSpPr/>
+          <p:nvPr/>
+        </p:nvSpPr>
+        <p:spPr>
+          <a:xfrm>
+            <a:off x="256032" y="201168"/>
+            <a:ext cx="11676888" cy="12700"/>
+          </a:xfrm>
+          <a:prstGeom prst="rect">
+            <a:avLst/>
+          </a:prstGeom>
+          <a:solidFill>
+            <a:srgbClr val="D4AF37"/>
+          </a:solidFill>
+          <a:ln>
+            <a:noFill/>
+          </a:ln>
+        </p:spPr>
+        <p:style>
+          <a:lnRef idx="1">
+            <a:schemeClr val="accent1"/>
+          </a:lnRef>
+          <a:fillRef idx="3">
+            <a:schemeClr val="accent1"/>
+          </a:fillRef>
+          <a:effectRef idx="2">
+            <a:schemeClr val="accent1"/>
+          </a:effectRef>
+          <a:fontRef idx="minor">
+            <a:schemeClr val="lt1"/>
+          </a:fontRef>
+        </p:style>
+        <p:txBody>
+          <a:bodyPr rtlCol="0" anchor="ctr"/>
+          <a:lstStyle/>
+          <a:p>
+            <a:pPr algn="ctr"/>
+          </a:p>
+        </p:txBody>
+      </p:sp>
+      <p:sp>
+        <p:nvSpPr>
+          <p:cNvPr id="3" name="Rectangle 2"/>
+          <p:cNvSpPr/>
+          <p:nvPr/>
+        </p:nvSpPr>
+        <p:spPr>
+          <a:xfrm>
+            <a:off x="256032" y="6565392"/>
+            <a:ext cx="11676888" cy="12700"/>
+          </a:xfrm>
+          <a:prstGeom prst="rect">
+            <a:avLst/>
+          </a:prstGeom>
+          <a:solidFill>
+            <a:srgbClr val="D4AF37"/>
+          </a:solidFill>
+          <a:ln>
+            <a:noFill/>
+          </a:ln>
+        </p:spPr>
+        <p:style>
+          <a:lnRef idx="1">
+            <a:schemeClr val="accent1"/>
+          </a:lnRef>
+          <a:fillRef idx="3">
+            <a:schemeClr val="accent1"/>
+          </a:fillRef>
+          <a:effectRef idx="2">
+            <a:schemeClr val="accent1"/>
+          </a:effectRef>
+          <a:fontRef idx="minor">
+            <a:schemeClr val="lt1"/>
+          </a:fontRef>
+        </p:style>
+        <p:txBody>
+          <a:bodyPr rtlCol="0" anchor="ctr"/>
+          <a:lstStyle/>
+          <a:p>
+            <a:pPr algn="ctr"/>
+          </a:p>
+        </p:txBody>
+      </p:sp>
+      <p:sp>
+        <p:nvSpPr>
+          <p:cNvPr id="4" name="Rectangle 3"/>
+          <p:cNvSpPr/>
+          <p:nvPr/>
+        </p:nvSpPr>
+        <p:spPr>
+          <a:xfrm>
+            <a:off x="256032" y="201168"/>
+            <a:ext cx="12700" cy="6364224"/>
+          </a:xfrm>
+          <a:prstGeom prst="rect">
+            <a:avLst/>
+          </a:prstGeom>
+          <a:solidFill>
+            <a:srgbClr val="D4AF37"/>
+          </a:solidFill>
+          <a:ln>
+            <a:noFill/>
+          </a:ln>
+        </p:spPr>
+        <p:style>
+          <a:lnRef idx="1">
+            <a:schemeClr val="accent1"/>
+          </a:lnRef>
+          <a:fillRef idx="3">
+            <a:schemeClr val="accent1"/>
+          </a:fillRef>
+          <a:effectRef idx="2">
+            <a:schemeClr val="accent1"/>
+          </a:effectRef>
+          <a:fontRef idx="minor">
+            <a:schemeClr val="lt1"/>
+          </a:fontRef>
+        </p:style>
+        <p:txBody>
+          <a:bodyPr rtlCol="0" anchor="ctr"/>
+          <a:lstStyle/>
+          <a:p>
+            <a:pPr algn="ctr"/>
+          </a:p>
+        </p:txBody>
+      </p:sp>
+      <p:sp>
+        <p:nvSpPr>
+          <p:cNvPr id="5" name="Rectangle 4"/>
+          <p:cNvSpPr/>
+          <p:nvPr/>
+        </p:nvSpPr>
+        <p:spPr>
+          <a:xfrm>
+            <a:off x="11932920" y="201168"/>
+            <a:ext cx="12700" cy="6364224"/>
+          </a:xfrm>
+          <a:prstGeom prst="rect">
+            <a:avLst/>
+          </a:prstGeom>
+          <a:solidFill>
+            <a:srgbClr val="D4AF37"/>
+          </a:solidFill>
+          <a:ln>
+            <a:noFill/>
+          </a:ln>
+        </p:spPr>
+        <p:style>
+          <a:lnRef idx="1">
+            <a:schemeClr val="accent1"/>
+          </a:lnRef>
+          <a:fillRef idx="3">
+            <a:schemeClr val="accent1"/>
+          </a:fillRef>
+          <a:effectRef idx="2">
+            <a:schemeClr val="accent1"/>
+          </a:effectRef>
+          <a:fontRef idx="minor">
+            <a:schemeClr val="lt1"/>
+          </a:fontRef>
+        </p:style>
+        <p:txBody>
+          <a:bodyPr rtlCol="0" anchor="ctr"/>
+          <a:lstStyle/>
+          <a:p>
+            <a:pPr algn="ctr"/>
+          </a:p>
+        </p:txBody>
+      </p:sp>
+      <p:sp>
+        <p:nvSpPr>
+          <p:cNvPr id="6" name="Rectangle 5"/>
+          <p:cNvSpPr/>
+          <p:nvPr/>
+        </p:nvSpPr>
+        <p:spPr>
+          <a:xfrm>
+            <a:off x="320040" y="365760"/>
+            <a:ext cx="54864" cy="5760720"/>
+          </a:xfrm>
+          <a:prstGeom prst="rect">
+            <a:avLst/>
+          </a:prstGeom>
+          <a:solidFill>
+            <a:srgbClr val="D4AF37"/>
+          </a:solidFill>
+          <a:ln>
+            <a:noFill/>
+          </a:ln>
+        </p:spPr>
+        <p:style>
+          <a:lnRef idx="1">
+            <a:schemeClr val="accent1"/>
+          </a:lnRef>
+          <a:fillRef idx="3">
+            <a:schemeClr val="accent1"/>
+          </a:fillRef>
+          <a:effectRef idx="2">
+            <a:schemeClr val="accent1"/>
+          </a:effectRef>
+          <a:fontRef idx="minor">
+            <a:schemeClr val="lt1"/>
+          </a:fontRef>
+        </p:style>
+        <p:txBody>
+          <a:bodyPr rtlCol="0" anchor="ctr"/>
+          <a:lstStyle/>
+          <a:p>
+            <a:pPr algn="ctr"/>
+          </a:p>
+        </p:txBody>
+      </p:sp>
+      <p:sp>
+        <p:nvSpPr>
+          <p:cNvPr id="7" name="Rectangle 6"/>
+          <p:cNvSpPr/>
+          <p:nvPr/>
+        </p:nvSpPr>
+        <p:spPr>
+          <a:xfrm>
+            <a:off x="448056" y="365760"/>
+            <a:ext cx="12700" cy="5760720"/>
+          </a:xfrm>
+          <a:prstGeom prst="rect">
+            <a:avLst/>
+          </a:prstGeom>
+          <a:solidFill>
+            <a:srgbClr val="2A2A3E"/>
+          </a:solidFill>
+          <a:ln>
+            <a:noFill/>
+          </a:ln>
+        </p:spPr>
+        <p:style>
+          <a:lnRef idx="1">
+            <a:schemeClr val="accent1"/>
+          </a:lnRef>
+          <a:fillRef idx="3">
+            <a:schemeClr val="accent1"/>
+          </a:fillRef>
+          <a:effectRef idx="2">
+            <a:schemeClr val="accent1"/>
+          </a:effectRef>
+          <a:fontRef idx="minor">
+            <a:schemeClr val="lt1"/>
+          </a:fontRef>
+        </p:style>
+        <p:txBody>
+          <a:bodyPr rtlCol="0" anchor="ctr"/>
+          <a:lstStyle/>
+          <a:p>
+            <a:pPr algn="ctr"/>
+          </a:p>
+        </p:txBody>
+      </p:sp>
+      <p:sp>
+        <p:nvSpPr>
+          <p:cNvPr id="8" name="TextBox 7"/>
           <p:cNvSpPr txBox="1"/>
           <p:nvPr/>
         </p:nvSpPr>
         <p:spPr>
           <a:xfrm>
-            <a:off x="548640" y="292608"/>
-            <a:ext cx="10972800" cy="640080"/>
+            <a:off x="640080" y="292608"/>
+            <a:ext cx="10789920" cy="594360"/>
           </a:xfrm>
           <a:prstGeom prst="rect">
             <a:avLst/>
@@ -8266,14 +11482,14 @@
       </p:sp>
       <p:sp>
         <p:nvSpPr>
-          <p:cNvPr id="3" name="Rectangle 2"/>
-          <p:cNvSpPr/>
-          <p:nvPr/>
-        </p:nvSpPr>
-        <p:spPr>
-          <a:xfrm>
-            <a:off x="548640" y="932688"/>
-            <a:ext cx="2011680" cy="31750"/>
+          <p:cNvPr id="9" name="Rectangle 8"/>
+          <p:cNvSpPr/>
+          <p:nvPr/>
+        </p:nvSpPr>
+        <p:spPr>
+          <a:xfrm>
+            <a:off x="640080" y="896112"/>
+            <a:ext cx="2194560" cy="31750"/>
           </a:xfrm>
           <a:prstGeom prst="rect">
             <a:avLst/>
@@ -8309,20 +11525,63 @@
       </p:sp>
       <p:sp>
         <p:nvSpPr>
-          <p:cNvPr id="4" name="Rectangle 3"/>
+          <p:cNvPr id="10" name="Rectangle 9"/>
+          <p:cNvSpPr/>
+          <p:nvPr/>
+        </p:nvSpPr>
+        <p:spPr>
+          <a:xfrm>
+            <a:off x="3017520" y="896112"/>
+            <a:ext cx="8503920" cy="9525"/>
+          </a:xfrm>
+          <a:prstGeom prst="rect">
+            <a:avLst/>
+          </a:prstGeom>
+          <a:solidFill>
+            <a:srgbClr val="D4AF37"/>
+          </a:solidFill>
+          <a:ln>
+            <a:noFill/>
+          </a:ln>
+        </p:spPr>
+        <p:style>
+          <a:lnRef idx="1">
+            <a:schemeClr val="accent1"/>
+          </a:lnRef>
+          <a:fillRef idx="3">
+            <a:schemeClr val="accent1"/>
+          </a:fillRef>
+          <a:effectRef idx="2">
+            <a:schemeClr val="accent1"/>
+          </a:effectRef>
+          <a:fontRef idx="minor">
+            <a:schemeClr val="lt1"/>
+          </a:fontRef>
+        </p:style>
+        <p:txBody>
+          <a:bodyPr rtlCol="0" anchor="ctr"/>
+          <a:lstStyle/>
+          <a:p>
+            <a:pPr algn="ctr"/>
+          </a:p>
+        </p:txBody>
+      </p:sp>
+      <p:sp>
+        <p:nvSpPr>
+          <p:cNvPr id="11" name="Rectangle 10"/>
           <p:cNvSpPr/>
           <p:nvPr/>
         </p:nvSpPr>
         <p:spPr>
           <a:xfrm>
             <a:off x="700887" y="1280160"/>
-            <a:ext cx="3383280" cy="3291840"/>
-          </a:xfrm>
-          <a:prstGeom prst="rect">
-            <a:avLst/>
-          </a:prstGeom>
-          <a:solidFill>
-            <a:srgbClr val="202035"/>
+            <a:ext cx="3383280" cy="3246120"/>
+          </a:xfrm>
+          <a:prstGeom prst="rect">
+            <a:avLst/>
+          </a:prstGeom>
+          <a:solidFill>
+            <a:srgbClr val="121222"/>
           </a:solidFill>
           <a:ln w="25400" cap="flat">
             <a:solidFill>
@@ -8353,7 +11612,7 @@
             <a:r>
               <a:rPr sz="1400" b="0">
                 <a:solidFill>
-                  <a:srgbClr val="AAAAAA"/>
+                  <a:srgbClr val="A8A8B0"/>
                 </a:solidFill>
                 <a:latin typeface="Arial"/>
                 <a:ea typeface="Arial"/>
@@ -8365,20 +11624,20 @@
       </p:sp>
       <p:sp>
         <p:nvSpPr>
-          <p:cNvPr id="5" name="Rectangle 4"/>
+          <p:cNvPr id="12" name="Rectangle 11"/>
           <p:cNvSpPr/>
           <p:nvPr/>
         </p:nvSpPr>
         <p:spPr>
           <a:xfrm>
             <a:off x="4404207" y="1280160"/>
-            <a:ext cx="3383280" cy="3291840"/>
-          </a:xfrm>
-          <a:prstGeom prst="rect">
-            <a:avLst/>
-          </a:prstGeom>
-          <a:solidFill>
-            <a:srgbClr val="202035"/>
+            <a:ext cx="3383280" cy="3246120"/>
+          </a:xfrm>
+          <a:prstGeom prst="rect">
+            <a:avLst/>
+          </a:prstGeom>
+          <a:solidFill>
+            <a:srgbClr val="121222"/>
           </a:solidFill>
           <a:ln w="25400" cap="flat">
             <a:solidFill>
@@ -8409,7 +11668,7 @@
             <a:r>
               <a:rPr sz="1400" b="0">
                 <a:solidFill>
-                  <a:srgbClr val="AAAAAA"/>
+                  <a:srgbClr val="A8A8B0"/>
                 </a:solidFill>
                 <a:latin typeface="Arial"/>
                 <a:ea typeface="Arial"/>
@@ -8421,20 +11680,20 @@
       </p:sp>
       <p:sp>
         <p:nvSpPr>
-          <p:cNvPr id="6" name="Rectangle 5"/>
+          <p:cNvPr id="13" name="Rectangle 12"/>
           <p:cNvSpPr/>
           <p:nvPr/>
         </p:nvSpPr>
         <p:spPr>
           <a:xfrm>
             <a:off x="8107527" y="1280160"/>
-            <a:ext cx="3383280" cy="3291840"/>
-          </a:xfrm>
-          <a:prstGeom prst="rect">
-            <a:avLst/>
-          </a:prstGeom>
-          <a:solidFill>
-            <a:srgbClr val="202035"/>
+            <a:ext cx="3383280" cy="3246120"/>
+          </a:xfrm>
+          <a:prstGeom prst="rect">
+            <a:avLst/>
+          </a:prstGeom>
+          <a:solidFill>
+            <a:srgbClr val="121222"/>
           </a:solidFill>
           <a:ln w="25400" cap="flat">
             <a:solidFill>
@@ -8465,7 +11724,7 @@
             <a:r>
               <a:rPr sz="1400" b="0">
                 <a:solidFill>
-                  <a:srgbClr val="AAAAAA"/>
+                  <a:srgbClr val="A8A8B0"/>
                 </a:solidFill>
                 <a:latin typeface="Arial"/>
                 <a:ea typeface="Arial"/>
@@ -8477,14 +11736,14 @@
       </p:sp>
       <p:sp>
         <p:nvSpPr>
-          <p:cNvPr id="7" name="TextBox 6"/>
+          <p:cNvPr id="14" name="TextBox 13"/>
           <p:cNvSpPr txBox="1"/>
           <p:nvPr/>
         </p:nvSpPr>
         <p:spPr>
           <a:xfrm>
-            <a:off x="548640" y="4937760"/>
-            <a:ext cx="10972800" cy="502920"/>
+            <a:off x="640080" y="4892040"/>
+            <a:ext cx="10881360" cy="502920"/>
           </a:xfrm>
           <a:prstGeom prst="rect">
             <a:avLst/>
@@ -8513,14 +11772,57 @@
       </p:sp>
       <p:sp>
         <p:nvSpPr>
-          <p:cNvPr id="8" name="TextBox 7"/>
+          <p:cNvPr id="15" name="Rectangle 14"/>
+          <p:cNvSpPr/>
+          <p:nvPr/>
+        </p:nvSpPr>
+        <p:spPr>
+          <a:xfrm>
+            <a:off x="457200" y="6355080"/>
+            <a:ext cx="11247120" cy="12700"/>
+          </a:xfrm>
+          <a:prstGeom prst="rect">
+            <a:avLst/>
+          </a:prstGeom>
+          <a:solidFill>
+            <a:srgbClr val="D4AF37"/>
+          </a:solidFill>
+          <a:ln>
+            <a:noFill/>
+          </a:ln>
+        </p:spPr>
+        <p:style>
+          <a:lnRef idx="1">
+            <a:schemeClr val="accent1"/>
+          </a:lnRef>
+          <a:fillRef idx="3">
+            <a:schemeClr val="accent1"/>
+          </a:fillRef>
+          <a:effectRef idx="2">
+            <a:schemeClr val="accent1"/>
+          </a:effectRef>
+          <a:fontRef idx="minor">
+            <a:schemeClr val="lt1"/>
+          </a:fontRef>
+        </p:style>
+        <p:txBody>
+          <a:bodyPr rtlCol="0" anchor="ctr"/>
+          <a:lstStyle/>
+          <a:p>
+            <a:pPr algn="ctr"/>
+          </a:p>
+        </p:txBody>
+      </p:sp>
+      <p:sp>
+        <p:nvSpPr>
+          <p:cNvPr id="16" name="TextBox 15"/>
           <p:cNvSpPr txBox="1"/>
           <p:nvPr/>
         </p:nvSpPr>
         <p:spPr>
           <a:xfrm>
-            <a:off x="7772400" y="6446520"/>
-            <a:ext cx="4114800" cy="320040"/>
+            <a:off x="7589520" y="6419088"/>
+            <a:ext cx="4297680" cy="292608"/>
           </a:xfrm>
           <a:prstGeom prst="rect">
             <a:avLst/>
@@ -8537,56 +11839,13 @@
             <a:r>
               <a:rPr sz="1000" b="0">
                 <a:solidFill>
-                  <a:srgbClr val="AAAAAA"/>
+                  <a:srgbClr val="A8A8B0"/>
                 </a:solidFill>
                 <a:latin typeface="Arial"/>
                 <a:ea typeface="Arial"/>
               </a:rPr>
               <a:t>光影盟特训营  ·  4/14</a:t>
             </a:r>
-          </a:p>
-        </p:txBody>
-      </p:sp>
-      <p:sp>
-        <p:nvSpPr>
-          <p:cNvPr id="9" name="Rectangle 8"/>
-          <p:cNvSpPr/>
-          <p:nvPr/>
-        </p:nvSpPr>
-        <p:spPr>
-          <a:xfrm>
-            <a:off x="457200" y="6400800"/>
-            <a:ext cx="11247120" cy="12700"/>
-          </a:xfrm>
-          <a:prstGeom prst="rect">
-            <a:avLst/>
-          </a:prstGeom>
-          <a:solidFill>
-            <a:srgbClr val="D4AF37"/>
-          </a:solidFill>
-          <a:ln>
-            <a:noFill/>
-          </a:ln>
-        </p:spPr>
-        <p:style>
-          <a:lnRef idx="1">
-            <a:schemeClr val="accent1"/>
-          </a:lnRef>
-          <a:fillRef idx="3">
-            <a:schemeClr val="accent1"/>
-          </a:fillRef>
-          <a:effectRef idx="2">
-            <a:schemeClr val="accent1"/>
-          </a:effectRef>
-          <a:fontRef idx="minor">
-            <a:schemeClr val="lt1"/>
-          </a:fontRef>
-        </p:style>
-        <p:txBody>
-          <a:bodyPr rtlCol="0" anchor="ctr"/>
-          <a:lstStyle/>
-          <a:p>
-            <a:pPr algn="ctr"/>
           </a:p>
         </p:txBody>
       </p:sp>
@@ -8618,14 +11877,272 @@
       <p:grpSpPr/>
       <p:sp>
         <p:nvSpPr>
-          <p:cNvPr id="2" name="TextBox 1"/>
+          <p:cNvPr id="2" name="Rectangle 1"/>
+          <p:cNvSpPr/>
+          <p:nvPr/>
+        </p:nvSpPr>
+        <p:spPr>
+          <a:xfrm>
+            <a:off x="256032" y="201168"/>
+            <a:ext cx="11676888" cy="12700"/>
+          </a:xfrm>
+          <a:prstGeom prst="rect">
+            <a:avLst/>
+          </a:prstGeom>
+          <a:solidFill>
+            <a:srgbClr val="D4AF37"/>
+          </a:solidFill>
+          <a:ln>
+            <a:noFill/>
+          </a:ln>
+        </p:spPr>
+        <p:style>
+          <a:lnRef idx="1">
+            <a:schemeClr val="accent1"/>
+          </a:lnRef>
+          <a:fillRef idx="3">
+            <a:schemeClr val="accent1"/>
+          </a:fillRef>
+          <a:effectRef idx="2">
+            <a:schemeClr val="accent1"/>
+          </a:effectRef>
+          <a:fontRef idx="minor">
+            <a:schemeClr val="lt1"/>
+          </a:fontRef>
+        </p:style>
+        <p:txBody>
+          <a:bodyPr rtlCol="0" anchor="ctr"/>
+          <a:lstStyle/>
+          <a:p>
+            <a:pPr algn="ctr"/>
+          </a:p>
+        </p:txBody>
+      </p:sp>
+      <p:sp>
+        <p:nvSpPr>
+          <p:cNvPr id="3" name="Rectangle 2"/>
+          <p:cNvSpPr/>
+          <p:nvPr/>
+        </p:nvSpPr>
+        <p:spPr>
+          <a:xfrm>
+            <a:off x="256032" y="6565392"/>
+            <a:ext cx="11676888" cy="12700"/>
+          </a:xfrm>
+          <a:prstGeom prst="rect">
+            <a:avLst/>
+          </a:prstGeom>
+          <a:solidFill>
+            <a:srgbClr val="D4AF37"/>
+          </a:solidFill>
+          <a:ln>
+            <a:noFill/>
+          </a:ln>
+        </p:spPr>
+        <p:style>
+          <a:lnRef idx="1">
+            <a:schemeClr val="accent1"/>
+          </a:lnRef>
+          <a:fillRef idx="3">
+            <a:schemeClr val="accent1"/>
+          </a:fillRef>
+          <a:effectRef idx="2">
+            <a:schemeClr val="accent1"/>
+          </a:effectRef>
+          <a:fontRef idx="minor">
+            <a:schemeClr val="lt1"/>
+          </a:fontRef>
+        </p:style>
+        <p:txBody>
+          <a:bodyPr rtlCol="0" anchor="ctr"/>
+          <a:lstStyle/>
+          <a:p>
+            <a:pPr algn="ctr"/>
+          </a:p>
+        </p:txBody>
+      </p:sp>
+      <p:sp>
+        <p:nvSpPr>
+          <p:cNvPr id="4" name="Rectangle 3"/>
+          <p:cNvSpPr/>
+          <p:nvPr/>
+        </p:nvSpPr>
+        <p:spPr>
+          <a:xfrm>
+            <a:off x="256032" y="201168"/>
+            <a:ext cx="12700" cy="6364224"/>
+          </a:xfrm>
+          <a:prstGeom prst="rect">
+            <a:avLst/>
+          </a:prstGeom>
+          <a:solidFill>
+            <a:srgbClr val="D4AF37"/>
+          </a:solidFill>
+          <a:ln>
+            <a:noFill/>
+          </a:ln>
+        </p:spPr>
+        <p:style>
+          <a:lnRef idx="1">
+            <a:schemeClr val="accent1"/>
+          </a:lnRef>
+          <a:fillRef idx="3">
+            <a:schemeClr val="accent1"/>
+          </a:fillRef>
+          <a:effectRef idx="2">
+            <a:schemeClr val="accent1"/>
+          </a:effectRef>
+          <a:fontRef idx="minor">
+            <a:schemeClr val="lt1"/>
+          </a:fontRef>
+        </p:style>
+        <p:txBody>
+          <a:bodyPr rtlCol="0" anchor="ctr"/>
+          <a:lstStyle/>
+          <a:p>
+            <a:pPr algn="ctr"/>
+          </a:p>
+        </p:txBody>
+      </p:sp>
+      <p:sp>
+        <p:nvSpPr>
+          <p:cNvPr id="5" name="Rectangle 4"/>
+          <p:cNvSpPr/>
+          <p:nvPr/>
+        </p:nvSpPr>
+        <p:spPr>
+          <a:xfrm>
+            <a:off x="11932920" y="201168"/>
+            <a:ext cx="12700" cy="6364224"/>
+          </a:xfrm>
+          <a:prstGeom prst="rect">
+            <a:avLst/>
+          </a:prstGeom>
+          <a:solidFill>
+            <a:srgbClr val="D4AF37"/>
+          </a:solidFill>
+          <a:ln>
+            <a:noFill/>
+          </a:ln>
+        </p:spPr>
+        <p:style>
+          <a:lnRef idx="1">
+            <a:schemeClr val="accent1"/>
+          </a:lnRef>
+          <a:fillRef idx="3">
+            <a:schemeClr val="accent1"/>
+          </a:fillRef>
+          <a:effectRef idx="2">
+            <a:schemeClr val="accent1"/>
+          </a:effectRef>
+          <a:fontRef idx="minor">
+            <a:schemeClr val="lt1"/>
+          </a:fontRef>
+        </p:style>
+        <p:txBody>
+          <a:bodyPr rtlCol="0" anchor="ctr"/>
+          <a:lstStyle/>
+          <a:p>
+            <a:pPr algn="ctr"/>
+          </a:p>
+        </p:txBody>
+      </p:sp>
+      <p:sp>
+        <p:nvSpPr>
+          <p:cNvPr id="6" name="Rectangle 5"/>
+          <p:cNvSpPr/>
+          <p:nvPr/>
+        </p:nvSpPr>
+        <p:spPr>
+          <a:xfrm>
+            <a:off x="320040" y="365760"/>
+            <a:ext cx="54864" cy="5760720"/>
+          </a:xfrm>
+          <a:prstGeom prst="rect">
+            <a:avLst/>
+          </a:prstGeom>
+          <a:solidFill>
+            <a:srgbClr val="D4AF37"/>
+          </a:solidFill>
+          <a:ln>
+            <a:noFill/>
+          </a:ln>
+        </p:spPr>
+        <p:style>
+          <a:lnRef idx="1">
+            <a:schemeClr val="accent1"/>
+          </a:lnRef>
+          <a:fillRef idx="3">
+            <a:schemeClr val="accent1"/>
+          </a:fillRef>
+          <a:effectRef idx="2">
+            <a:schemeClr val="accent1"/>
+          </a:effectRef>
+          <a:fontRef idx="minor">
+            <a:schemeClr val="lt1"/>
+          </a:fontRef>
+        </p:style>
+        <p:txBody>
+          <a:bodyPr rtlCol="0" anchor="ctr"/>
+          <a:lstStyle/>
+          <a:p>
+            <a:pPr algn="ctr"/>
+          </a:p>
+        </p:txBody>
+      </p:sp>
+      <p:sp>
+        <p:nvSpPr>
+          <p:cNvPr id="7" name="Rectangle 6"/>
+          <p:cNvSpPr/>
+          <p:nvPr/>
+        </p:nvSpPr>
+        <p:spPr>
+          <a:xfrm>
+            <a:off x="448056" y="365760"/>
+            <a:ext cx="12700" cy="5760720"/>
+          </a:xfrm>
+          <a:prstGeom prst="rect">
+            <a:avLst/>
+          </a:prstGeom>
+          <a:solidFill>
+            <a:srgbClr val="2A2A3E"/>
+          </a:solidFill>
+          <a:ln>
+            <a:noFill/>
+          </a:ln>
+        </p:spPr>
+        <p:style>
+          <a:lnRef idx="1">
+            <a:schemeClr val="accent1"/>
+          </a:lnRef>
+          <a:fillRef idx="3">
+            <a:schemeClr val="accent1"/>
+          </a:fillRef>
+          <a:effectRef idx="2">
+            <a:schemeClr val="accent1"/>
+          </a:effectRef>
+          <a:fontRef idx="minor">
+            <a:schemeClr val="lt1"/>
+          </a:fontRef>
+        </p:style>
+        <p:txBody>
+          <a:bodyPr rtlCol="0" anchor="ctr"/>
+          <a:lstStyle/>
+          <a:p>
+            <a:pPr algn="ctr"/>
+          </a:p>
+        </p:txBody>
+      </p:sp>
+      <p:sp>
+        <p:nvSpPr>
+          <p:cNvPr id="8" name="TextBox 7"/>
           <p:cNvSpPr txBox="1"/>
           <p:nvPr/>
         </p:nvSpPr>
         <p:spPr>
           <a:xfrm>
-            <a:off x="548640" y="292608"/>
-            <a:ext cx="10972800" cy="640080"/>
+            <a:off x="640080" y="292608"/>
+            <a:ext cx="10789920" cy="594360"/>
           </a:xfrm>
           <a:prstGeom prst="rect">
             <a:avLst/>
@@ -8654,14 +12171,14 @@
       </p:sp>
       <p:sp>
         <p:nvSpPr>
-          <p:cNvPr id="3" name="Rectangle 2"/>
-          <p:cNvSpPr/>
-          <p:nvPr/>
-        </p:nvSpPr>
-        <p:spPr>
-          <a:xfrm>
-            <a:off x="548640" y="932688"/>
-            <a:ext cx="2011680" cy="31750"/>
+          <p:cNvPr id="9" name="Rectangle 8"/>
+          <p:cNvSpPr/>
+          <p:nvPr/>
+        </p:nvSpPr>
+        <p:spPr>
+          <a:xfrm>
+            <a:off x="640080" y="896112"/>
+            <a:ext cx="2194560" cy="31750"/>
           </a:xfrm>
           <a:prstGeom prst="rect">
             <a:avLst/>
@@ -8697,7 +12214,136 @@
       </p:sp>
       <p:sp>
         <p:nvSpPr>
-          <p:cNvPr id="4" name="TextBox 3"/>
+          <p:cNvPr id="10" name="Rectangle 9"/>
+          <p:cNvSpPr/>
+          <p:nvPr/>
+        </p:nvSpPr>
+        <p:spPr>
+          <a:xfrm>
+            <a:off x="3017520" y="896112"/>
+            <a:ext cx="8503920" cy="9525"/>
+          </a:xfrm>
+          <a:prstGeom prst="rect">
+            <a:avLst/>
+          </a:prstGeom>
+          <a:solidFill>
+            <a:srgbClr val="D4AF37"/>
+          </a:solidFill>
+          <a:ln>
+            <a:noFill/>
+          </a:ln>
+        </p:spPr>
+        <p:style>
+          <a:lnRef idx="1">
+            <a:schemeClr val="accent1"/>
+          </a:lnRef>
+          <a:fillRef idx="3">
+            <a:schemeClr val="accent1"/>
+          </a:fillRef>
+          <a:effectRef idx="2">
+            <a:schemeClr val="accent1"/>
+          </a:effectRef>
+          <a:fontRef idx="minor">
+            <a:schemeClr val="lt1"/>
+          </a:fontRef>
+        </p:style>
+        <p:txBody>
+          <a:bodyPr rtlCol="0" anchor="ctr"/>
+          <a:lstStyle/>
+          <a:p>
+            <a:pPr algn="ctr"/>
+          </a:p>
+        </p:txBody>
+      </p:sp>
+      <p:sp>
+        <p:nvSpPr>
+          <p:cNvPr id="11" name="Rectangle 10"/>
+          <p:cNvSpPr/>
+          <p:nvPr/>
+        </p:nvSpPr>
+        <p:spPr>
+          <a:xfrm>
+            <a:off x="1371600" y="2103120"/>
+            <a:ext cx="9418320" cy="1645920"/>
+          </a:xfrm>
+          <a:prstGeom prst="rect">
+            <a:avLst/>
+          </a:prstGeom>
+          <a:solidFill>
+            <a:srgbClr val="2A2A3E"/>
+          </a:solidFill>
+          <a:ln>
+            <a:noFill/>
+          </a:ln>
+        </p:spPr>
+        <p:style>
+          <a:lnRef idx="1">
+            <a:schemeClr val="accent1"/>
+          </a:lnRef>
+          <a:fillRef idx="3">
+            <a:schemeClr val="accent1"/>
+          </a:fillRef>
+          <a:effectRef idx="2">
+            <a:schemeClr val="accent1"/>
+          </a:effectRef>
+          <a:fontRef idx="minor">
+            <a:schemeClr val="lt1"/>
+          </a:fontRef>
+        </p:style>
+        <p:txBody>
+          <a:bodyPr rtlCol="0" anchor="ctr"/>
+          <a:lstStyle/>
+          <a:p>
+            <a:pPr algn="ctr"/>
+          </a:p>
+        </p:txBody>
+      </p:sp>
+      <p:sp>
+        <p:nvSpPr>
+          <p:cNvPr id="12" name="Rectangle 11"/>
+          <p:cNvSpPr/>
+          <p:nvPr/>
+        </p:nvSpPr>
+        <p:spPr>
+          <a:xfrm>
+            <a:off x="1371600" y="2103120"/>
+            <a:ext cx="9418320" cy="25400"/>
+          </a:xfrm>
+          <a:prstGeom prst="rect">
+            <a:avLst/>
+          </a:prstGeom>
+          <a:solidFill>
+            <a:srgbClr val="D4AF37"/>
+          </a:solidFill>
+          <a:ln>
+            <a:noFill/>
+          </a:ln>
+        </p:spPr>
+        <p:style>
+          <a:lnRef idx="1">
+            <a:schemeClr val="accent1"/>
+          </a:lnRef>
+          <a:fillRef idx="3">
+            <a:schemeClr val="accent1"/>
+          </a:fillRef>
+          <a:effectRef idx="2">
+            <a:schemeClr val="accent1"/>
+          </a:effectRef>
+          <a:fontRef idx="minor">
+            <a:schemeClr val="lt1"/>
+          </a:fontRef>
+        </p:style>
+        <p:txBody>
+          <a:bodyPr rtlCol="0" anchor="ctr"/>
+          <a:lstStyle/>
+          <a:p>
+            <a:pPr algn="ctr"/>
+          </a:p>
+        </p:txBody>
+      </p:sp>
+      <p:sp>
+        <p:nvSpPr>
+          <p:cNvPr id="13" name="TextBox 12"/>
           <p:cNvSpPr txBox="1"/>
           <p:nvPr/>
         </p:nvSpPr>
@@ -8733,57 +12379,14 @@
       </p:sp>
       <p:sp>
         <p:nvSpPr>
-          <p:cNvPr id="5" name="Rectangle 4"/>
-          <p:cNvSpPr/>
-          <p:nvPr/>
-        </p:nvSpPr>
-        <p:spPr>
-          <a:xfrm>
-            <a:off x="3657600" y="3566160"/>
-            <a:ext cx="4846320" cy="25400"/>
-          </a:xfrm>
-          <a:prstGeom prst="rect">
-            <a:avLst/>
-          </a:prstGeom>
-          <a:solidFill>
-            <a:srgbClr val="D4AF37"/>
-          </a:solidFill>
-          <a:ln>
-            <a:noFill/>
-          </a:ln>
-        </p:spPr>
-        <p:style>
-          <a:lnRef idx="1">
-            <a:schemeClr val="accent1"/>
-          </a:lnRef>
-          <a:fillRef idx="3">
-            <a:schemeClr val="accent1"/>
-          </a:fillRef>
-          <a:effectRef idx="2">
-            <a:schemeClr val="accent1"/>
-          </a:effectRef>
-          <a:fontRef idx="minor">
-            <a:schemeClr val="lt1"/>
-          </a:fontRef>
-        </p:style>
-        <p:txBody>
-          <a:bodyPr rtlCol="0" anchor="ctr"/>
-          <a:lstStyle/>
-          <a:p>
-            <a:pPr algn="ctr"/>
-          </a:p>
-        </p:txBody>
-      </p:sp>
-      <p:sp>
-        <p:nvSpPr>
-          <p:cNvPr id="6" name="TextBox 5"/>
+          <p:cNvPr id="14" name="TextBox 13"/>
           <p:cNvSpPr txBox="1"/>
           <p:nvPr/>
         </p:nvSpPr>
         <p:spPr>
           <a:xfrm>
-            <a:off x="548640" y="4572000"/>
-            <a:ext cx="10972800" cy="502920"/>
+            <a:off x="640080" y="4572000"/>
+            <a:ext cx="10881360" cy="502920"/>
           </a:xfrm>
           <a:prstGeom prst="rect">
             <a:avLst/>
@@ -8812,14 +12415,57 @@
       </p:sp>
       <p:sp>
         <p:nvSpPr>
-          <p:cNvPr id="7" name="TextBox 6"/>
+          <p:cNvPr id="15" name="Rectangle 14"/>
+          <p:cNvSpPr/>
+          <p:nvPr/>
+        </p:nvSpPr>
+        <p:spPr>
+          <a:xfrm>
+            <a:off x="457200" y="6355080"/>
+            <a:ext cx="11247120" cy="12700"/>
+          </a:xfrm>
+          <a:prstGeom prst="rect">
+            <a:avLst/>
+          </a:prstGeom>
+          <a:solidFill>
+            <a:srgbClr val="D4AF37"/>
+          </a:solidFill>
+          <a:ln>
+            <a:noFill/>
+          </a:ln>
+        </p:spPr>
+        <p:style>
+          <a:lnRef idx="1">
+            <a:schemeClr val="accent1"/>
+          </a:lnRef>
+          <a:fillRef idx="3">
+            <a:schemeClr val="accent1"/>
+          </a:fillRef>
+          <a:effectRef idx="2">
+            <a:schemeClr val="accent1"/>
+          </a:effectRef>
+          <a:fontRef idx="minor">
+            <a:schemeClr val="lt1"/>
+          </a:fontRef>
+        </p:style>
+        <p:txBody>
+          <a:bodyPr rtlCol="0" anchor="ctr"/>
+          <a:lstStyle/>
+          <a:p>
+            <a:pPr algn="ctr"/>
+          </a:p>
+        </p:txBody>
+      </p:sp>
+      <p:sp>
+        <p:nvSpPr>
+          <p:cNvPr id="16" name="TextBox 15"/>
           <p:cNvSpPr txBox="1"/>
           <p:nvPr/>
         </p:nvSpPr>
         <p:spPr>
           <a:xfrm>
-            <a:off x="7772400" y="6446520"/>
-            <a:ext cx="4114800" cy="320040"/>
+            <a:off x="7589520" y="6419088"/>
+            <a:ext cx="4297680" cy="292608"/>
           </a:xfrm>
           <a:prstGeom prst="rect">
             <a:avLst/>
@@ -8836,56 +12482,13 @@
             <a:r>
               <a:rPr sz="1000" b="0">
                 <a:solidFill>
-                  <a:srgbClr val="AAAAAA"/>
+                  <a:srgbClr val="A8A8B0"/>
                 </a:solidFill>
                 <a:latin typeface="Arial"/>
                 <a:ea typeface="Arial"/>
               </a:rPr>
               <a:t>光影盟特训营  ·  5/14</a:t>
             </a:r>
-          </a:p>
-        </p:txBody>
-      </p:sp>
-      <p:sp>
-        <p:nvSpPr>
-          <p:cNvPr id="8" name="Rectangle 7"/>
-          <p:cNvSpPr/>
-          <p:nvPr/>
-        </p:nvSpPr>
-        <p:spPr>
-          <a:xfrm>
-            <a:off x="457200" y="6400800"/>
-            <a:ext cx="11247120" cy="12700"/>
-          </a:xfrm>
-          <a:prstGeom prst="rect">
-            <a:avLst/>
-          </a:prstGeom>
-          <a:solidFill>
-            <a:srgbClr val="D4AF37"/>
-          </a:solidFill>
-          <a:ln>
-            <a:noFill/>
-          </a:ln>
-        </p:spPr>
-        <p:style>
-          <a:lnRef idx="1">
-            <a:schemeClr val="accent1"/>
-          </a:lnRef>
-          <a:fillRef idx="3">
-            <a:schemeClr val="accent1"/>
-          </a:fillRef>
-          <a:effectRef idx="2">
-            <a:schemeClr val="accent1"/>
-          </a:effectRef>
-          <a:fontRef idx="minor">
-            <a:schemeClr val="lt1"/>
-          </a:fontRef>
-        </p:style>
-        <p:txBody>
-          <a:bodyPr rtlCol="0" anchor="ctr"/>
-          <a:lstStyle/>
-          <a:p>
-            <a:pPr algn="ctr"/>
           </a:p>
         </p:txBody>
       </p:sp>
@@ -8917,14 +12520,272 @@
       <p:grpSpPr/>
       <p:sp>
         <p:nvSpPr>
-          <p:cNvPr id="2" name="TextBox 1"/>
+          <p:cNvPr id="2" name="Rectangle 1"/>
+          <p:cNvSpPr/>
+          <p:nvPr/>
+        </p:nvSpPr>
+        <p:spPr>
+          <a:xfrm>
+            <a:off x="256032" y="201168"/>
+            <a:ext cx="11676888" cy="12700"/>
+          </a:xfrm>
+          <a:prstGeom prst="rect">
+            <a:avLst/>
+          </a:prstGeom>
+          <a:solidFill>
+            <a:srgbClr val="D4AF37"/>
+          </a:solidFill>
+          <a:ln>
+            <a:noFill/>
+          </a:ln>
+        </p:spPr>
+        <p:style>
+          <a:lnRef idx="1">
+            <a:schemeClr val="accent1"/>
+          </a:lnRef>
+          <a:fillRef idx="3">
+            <a:schemeClr val="accent1"/>
+          </a:fillRef>
+          <a:effectRef idx="2">
+            <a:schemeClr val="accent1"/>
+          </a:effectRef>
+          <a:fontRef idx="minor">
+            <a:schemeClr val="lt1"/>
+          </a:fontRef>
+        </p:style>
+        <p:txBody>
+          <a:bodyPr rtlCol="0" anchor="ctr"/>
+          <a:lstStyle/>
+          <a:p>
+            <a:pPr algn="ctr"/>
+          </a:p>
+        </p:txBody>
+      </p:sp>
+      <p:sp>
+        <p:nvSpPr>
+          <p:cNvPr id="3" name="Rectangle 2"/>
+          <p:cNvSpPr/>
+          <p:nvPr/>
+        </p:nvSpPr>
+        <p:spPr>
+          <a:xfrm>
+            <a:off x="256032" y="6565392"/>
+            <a:ext cx="11676888" cy="12700"/>
+          </a:xfrm>
+          <a:prstGeom prst="rect">
+            <a:avLst/>
+          </a:prstGeom>
+          <a:solidFill>
+            <a:srgbClr val="D4AF37"/>
+          </a:solidFill>
+          <a:ln>
+            <a:noFill/>
+          </a:ln>
+        </p:spPr>
+        <p:style>
+          <a:lnRef idx="1">
+            <a:schemeClr val="accent1"/>
+          </a:lnRef>
+          <a:fillRef idx="3">
+            <a:schemeClr val="accent1"/>
+          </a:fillRef>
+          <a:effectRef idx="2">
+            <a:schemeClr val="accent1"/>
+          </a:effectRef>
+          <a:fontRef idx="minor">
+            <a:schemeClr val="lt1"/>
+          </a:fontRef>
+        </p:style>
+        <p:txBody>
+          <a:bodyPr rtlCol="0" anchor="ctr"/>
+          <a:lstStyle/>
+          <a:p>
+            <a:pPr algn="ctr"/>
+          </a:p>
+        </p:txBody>
+      </p:sp>
+      <p:sp>
+        <p:nvSpPr>
+          <p:cNvPr id="4" name="Rectangle 3"/>
+          <p:cNvSpPr/>
+          <p:nvPr/>
+        </p:nvSpPr>
+        <p:spPr>
+          <a:xfrm>
+            <a:off x="256032" y="201168"/>
+            <a:ext cx="12700" cy="6364224"/>
+          </a:xfrm>
+          <a:prstGeom prst="rect">
+            <a:avLst/>
+          </a:prstGeom>
+          <a:solidFill>
+            <a:srgbClr val="D4AF37"/>
+          </a:solidFill>
+          <a:ln>
+            <a:noFill/>
+          </a:ln>
+        </p:spPr>
+        <p:style>
+          <a:lnRef idx="1">
+            <a:schemeClr val="accent1"/>
+          </a:lnRef>
+          <a:fillRef idx="3">
+            <a:schemeClr val="accent1"/>
+          </a:fillRef>
+          <a:effectRef idx="2">
+            <a:schemeClr val="accent1"/>
+          </a:effectRef>
+          <a:fontRef idx="minor">
+            <a:schemeClr val="lt1"/>
+          </a:fontRef>
+        </p:style>
+        <p:txBody>
+          <a:bodyPr rtlCol="0" anchor="ctr"/>
+          <a:lstStyle/>
+          <a:p>
+            <a:pPr algn="ctr"/>
+          </a:p>
+        </p:txBody>
+      </p:sp>
+      <p:sp>
+        <p:nvSpPr>
+          <p:cNvPr id="5" name="Rectangle 4"/>
+          <p:cNvSpPr/>
+          <p:nvPr/>
+        </p:nvSpPr>
+        <p:spPr>
+          <a:xfrm>
+            <a:off x="11932920" y="201168"/>
+            <a:ext cx="12700" cy="6364224"/>
+          </a:xfrm>
+          <a:prstGeom prst="rect">
+            <a:avLst/>
+          </a:prstGeom>
+          <a:solidFill>
+            <a:srgbClr val="D4AF37"/>
+          </a:solidFill>
+          <a:ln>
+            <a:noFill/>
+          </a:ln>
+        </p:spPr>
+        <p:style>
+          <a:lnRef idx="1">
+            <a:schemeClr val="accent1"/>
+          </a:lnRef>
+          <a:fillRef idx="3">
+            <a:schemeClr val="accent1"/>
+          </a:fillRef>
+          <a:effectRef idx="2">
+            <a:schemeClr val="accent1"/>
+          </a:effectRef>
+          <a:fontRef idx="minor">
+            <a:schemeClr val="lt1"/>
+          </a:fontRef>
+        </p:style>
+        <p:txBody>
+          <a:bodyPr rtlCol="0" anchor="ctr"/>
+          <a:lstStyle/>
+          <a:p>
+            <a:pPr algn="ctr"/>
+          </a:p>
+        </p:txBody>
+      </p:sp>
+      <p:sp>
+        <p:nvSpPr>
+          <p:cNvPr id="6" name="Rectangle 5"/>
+          <p:cNvSpPr/>
+          <p:nvPr/>
+        </p:nvSpPr>
+        <p:spPr>
+          <a:xfrm>
+            <a:off x="320040" y="365760"/>
+            <a:ext cx="54864" cy="5760720"/>
+          </a:xfrm>
+          <a:prstGeom prst="rect">
+            <a:avLst/>
+          </a:prstGeom>
+          <a:solidFill>
+            <a:srgbClr val="D4AF37"/>
+          </a:solidFill>
+          <a:ln>
+            <a:noFill/>
+          </a:ln>
+        </p:spPr>
+        <p:style>
+          <a:lnRef idx="1">
+            <a:schemeClr val="accent1"/>
+          </a:lnRef>
+          <a:fillRef idx="3">
+            <a:schemeClr val="accent1"/>
+          </a:fillRef>
+          <a:effectRef idx="2">
+            <a:schemeClr val="accent1"/>
+          </a:effectRef>
+          <a:fontRef idx="minor">
+            <a:schemeClr val="lt1"/>
+          </a:fontRef>
+        </p:style>
+        <p:txBody>
+          <a:bodyPr rtlCol="0" anchor="ctr"/>
+          <a:lstStyle/>
+          <a:p>
+            <a:pPr algn="ctr"/>
+          </a:p>
+        </p:txBody>
+      </p:sp>
+      <p:sp>
+        <p:nvSpPr>
+          <p:cNvPr id="7" name="Rectangle 6"/>
+          <p:cNvSpPr/>
+          <p:nvPr/>
+        </p:nvSpPr>
+        <p:spPr>
+          <a:xfrm>
+            <a:off x="448056" y="365760"/>
+            <a:ext cx="12700" cy="5760720"/>
+          </a:xfrm>
+          <a:prstGeom prst="rect">
+            <a:avLst/>
+          </a:prstGeom>
+          <a:solidFill>
+            <a:srgbClr val="2A2A3E"/>
+          </a:solidFill>
+          <a:ln>
+            <a:noFill/>
+          </a:ln>
+        </p:spPr>
+        <p:style>
+          <a:lnRef idx="1">
+            <a:schemeClr val="accent1"/>
+          </a:lnRef>
+          <a:fillRef idx="3">
+            <a:schemeClr val="accent1"/>
+          </a:fillRef>
+          <a:effectRef idx="2">
+            <a:schemeClr val="accent1"/>
+          </a:effectRef>
+          <a:fontRef idx="minor">
+            <a:schemeClr val="lt1"/>
+          </a:fontRef>
+        </p:style>
+        <p:txBody>
+          <a:bodyPr rtlCol="0" anchor="ctr"/>
+          <a:lstStyle/>
+          <a:p>
+            <a:pPr algn="ctr"/>
+          </a:p>
+        </p:txBody>
+      </p:sp>
+      <p:sp>
+        <p:nvSpPr>
+          <p:cNvPr id="8" name="TextBox 7"/>
           <p:cNvSpPr txBox="1"/>
           <p:nvPr/>
         </p:nvSpPr>
         <p:spPr>
           <a:xfrm>
-            <a:off x="548640" y="292608"/>
-            <a:ext cx="10972800" cy="640080"/>
+            <a:off x="640080" y="292608"/>
+            <a:ext cx="10789920" cy="594360"/>
           </a:xfrm>
           <a:prstGeom prst="rect">
             <a:avLst/>
@@ -8953,14 +12814,14 @@
       </p:sp>
       <p:sp>
         <p:nvSpPr>
-          <p:cNvPr id="3" name="Rectangle 2"/>
-          <p:cNvSpPr/>
-          <p:nvPr/>
-        </p:nvSpPr>
-        <p:spPr>
-          <a:xfrm>
-            <a:off x="548640" y="932688"/>
-            <a:ext cx="2011680" cy="31750"/>
+          <p:cNvPr id="9" name="Rectangle 8"/>
+          <p:cNvSpPr/>
+          <p:nvPr/>
+        </p:nvSpPr>
+        <p:spPr>
+          <a:xfrm>
+            <a:off x="640080" y="896112"/>
+            <a:ext cx="2194560" cy="31750"/>
           </a:xfrm>
           <a:prstGeom prst="rect">
             <a:avLst/>
@@ -8996,20 +12857,63 @@
       </p:sp>
       <p:sp>
         <p:nvSpPr>
-          <p:cNvPr id="4" name="Rectangle 3"/>
+          <p:cNvPr id="10" name="Rectangle 9"/>
+          <p:cNvSpPr/>
+          <p:nvPr/>
+        </p:nvSpPr>
+        <p:spPr>
+          <a:xfrm>
+            <a:off x="3017520" y="896112"/>
+            <a:ext cx="8503920" cy="9525"/>
+          </a:xfrm>
+          <a:prstGeom prst="rect">
+            <a:avLst/>
+          </a:prstGeom>
+          <a:solidFill>
+            <a:srgbClr val="D4AF37"/>
+          </a:solidFill>
+          <a:ln>
+            <a:noFill/>
+          </a:ln>
+        </p:spPr>
+        <p:style>
+          <a:lnRef idx="1">
+            <a:schemeClr val="accent1"/>
+          </a:lnRef>
+          <a:fillRef idx="3">
+            <a:schemeClr val="accent1"/>
+          </a:fillRef>
+          <a:effectRef idx="2">
+            <a:schemeClr val="accent1"/>
+          </a:effectRef>
+          <a:fontRef idx="minor">
+            <a:schemeClr val="lt1"/>
+          </a:fontRef>
+        </p:style>
+        <p:txBody>
+          <a:bodyPr rtlCol="0" anchor="ctr"/>
+          <a:lstStyle/>
+          <a:p>
+            <a:pPr algn="ctr"/>
+          </a:p>
+        </p:txBody>
+      </p:sp>
+      <p:sp>
+        <p:nvSpPr>
+          <p:cNvPr id="11" name="Rectangle 10"/>
           <p:cNvSpPr/>
           <p:nvPr/>
         </p:nvSpPr>
         <p:spPr>
           <a:xfrm>
             <a:off x="746607" y="1280160"/>
-            <a:ext cx="3291840" cy="3200400"/>
-          </a:xfrm>
-          <a:prstGeom prst="rect">
-            <a:avLst/>
-          </a:prstGeom>
-          <a:solidFill>
-            <a:srgbClr val="202035"/>
+            <a:ext cx="3291840" cy="3154680"/>
+          </a:xfrm>
+          <a:prstGeom prst="rect">
+            <a:avLst/>
+          </a:prstGeom>
+          <a:solidFill>
+            <a:srgbClr val="121222"/>
           </a:solidFill>
           <a:ln w="25400" cap="flat">
             <a:solidFill>
@@ -9040,7 +12944,7 @@
             <a:r>
               <a:rPr sz="1400" b="0">
                 <a:solidFill>
-                  <a:srgbClr val="AAAAAA"/>
+                  <a:srgbClr val="A8A8B0"/>
                 </a:solidFill>
                 <a:latin typeface="Arial"/>
                 <a:ea typeface="Arial"/>
@@ -9052,13 +12956,13 @@
       </p:sp>
       <p:sp>
         <p:nvSpPr>
-          <p:cNvPr id="5" name="TextBox 4"/>
+          <p:cNvPr id="12" name="TextBox 11"/>
           <p:cNvSpPr txBox="1"/>
           <p:nvPr/>
         </p:nvSpPr>
         <p:spPr>
           <a:xfrm>
-            <a:off x="746607" y="4617720"/>
+            <a:off x="746607" y="4544568"/>
             <a:ext cx="3291840" cy="365760"/>
           </a:xfrm>
           <a:prstGeom prst="rect">
@@ -9088,20 +12992,20 @@
       </p:sp>
       <p:sp>
         <p:nvSpPr>
-          <p:cNvPr id="6" name="Rectangle 5"/>
+          <p:cNvPr id="13" name="Rectangle 12"/>
           <p:cNvSpPr/>
           <p:nvPr/>
         </p:nvSpPr>
         <p:spPr>
           <a:xfrm>
             <a:off x="4449927" y="1280160"/>
-            <a:ext cx="3291840" cy="3200400"/>
-          </a:xfrm>
-          <a:prstGeom prst="rect">
-            <a:avLst/>
-          </a:prstGeom>
-          <a:solidFill>
-            <a:srgbClr val="202035"/>
+            <a:ext cx="3291840" cy="3154680"/>
+          </a:xfrm>
+          <a:prstGeom prst="rect">
+            <a:avLst/>
+          </a:prstGeom>
+          <a:solidFill>
+            <a:srgbClr val="121222"/>
           </a:solidFill>
           <a:ln w="25400" cap="flat">
             <a:solidFill>
@@ -9132,7 +13036,7 @@
             <a:r>
               <a:rPr sz="1400" b="0">
                 <a:solidFill>
-                  <a:srgbClr val="AAAAAA"/>
+                  <a:srgbClr val="A8A8B0"/>
                 </a:solidFill>
                 <a:latin typeface="Arial"/>
                 <a:ea typeface="Arial"/>
@@ -9144,13 +13048,13 @@
       </p:sp>
       <p:sp>
         <p:nvSpPr>
-          <p:cNvPr id="7" name="TextBox 6"/>
+          <p:cNvPr id="14" name="TextBox 13"/>
           <p:cNvSpPr txBox="1"/>
           <p:nvPr/>
         </p:nvSpPr>
         <p:spPr>
           <a:xfrm>
-            <a:off x="4449927" y="4617720"/>
+            <a:off x="4449927" y="4544568"/>
             <a:ext cx="3291840" cy="365760"/>
           </a:xfrm>
           <a:prstGeom prst="rect">
@@ -9180,20 +13084,20 @@
       </p:sp>
       <p:sp>
         <p:nvSpPr>
-          <p:cNvPr id="8" name="Rectangle 7"/>
+          <p:cNvPr id="15" name="Rectangle 14"/>
           <p:cNvSpPr/>
           <p:nvPr/>
         </p:nvSpPr>
         <p:spPr>
           <a:xfrm>
             <a:off x="8153247" y="1280160"/>
-            <a:ext cx="3291840" cy="3200400"/>
-          </a:xfrm>
-          <a:prstGeom prst="rect">
-            <a:avLst/>
-          </a:prstGeom>
-          <a:solidFill>
-            <a:srgbClr val="202035"/>
+            <a:ext cx="3291840" cy="3154680"/>
+          </a:xfrm>
+          <a:prstGeom prst="rect">
+            <a:avLst/>
+          </a:prstGeom>
+          <a:solidFill>
+            <a:srgbClr val="121222"/>
           </a:solidFill>
           <a:ln w="25400" cap="flat">
             <a:solidFill>
@@ -9224,7 +13128,7 @@
             <a:r>
               <a:rPr sz="1400" b="0">
                 <a:solidFill>
-                  <a:srgbClr val="AAAAAA"/>
+                  <a:srgbClr val="A8A8B0"/>
                 </a:solidFill>
                 <a:latin typeface="Arial"/>
                 <a:ea typeface="Arial"/>
@@ -9236,13 +13140,13 @@
       </p:sp>
       <p:sp>
         <p:nvSpPr>
-          <p:cNvPr id="9" name="TextBox 8"/>
+          <p:cNvPr id="16" name="TextBox 15"/>
           <p:cNvSpPr txBox="1"/>
           <p:nvPr/>
         </p:nvSpPr>
         <p:spPr>
           <a:xfrm>
-            <a:off x="8153247" y="4617720"/>
+            <a:off x="8153247" y="4544568"/>
             <a:ext cx="3291840" cy="365760"/>
           </a:xfrm>
           <a:prstGeom prst="rect">
@@ -9272,14 +13176,57 @@
       </p:sp>
       <p:sp>
         <p:nvSpPr>
-          <p:cNvPr id="10" name="TextBox 9"/>
+          <p:cNvPr id="17" name="Rectangle 16"/>
+          <p:cNvSpPr/>
+          <p:nvPr/>
+        </p:nvSpPr>
+        <p:spPr>
+          <a:xfrm>
+            <a:off x="457200" y="6355080"/>
+            <a:ext cx="11247120" cy="12700"/>
+          </a:xfrm>
+          <a:prstGeom prst="rect">
+            <a:avLst/>
+          </a:prstGeom>
+          <a:solidFill>
+            <a:srgbClr val="D4AF37"/>
+          </a:solidFill>
+          <a:ln>
+            <a:noFill/>
+          </a:ln>
+        </p:spPr>
+        <p:style>
+          <a:lnRef idx="1">
+            <a:schemeClr val="accent1"/>
+          </a:lnRef>
+          <a:fillRef idx="3">
+            <a:schemeClr val="accent1"/>
+          </a:fillRef>
+          <a:effectRef idx="2">
+            <a:schemeClr val="accent1"/>
+          </a:effectRef>
+          <a:fontRef idx="minor">
+            <a:schemeClr val="lt1"/>
+          </a:fontRef>
+        </p:style>
+        <p:txBody>
+          <a:bodyPr rtlCol="0" anchor="ctr"/>
+          <a:lstStyle/>
+          <a:p>
+            <a:pPr algn="ctr"/>
+          </a:p>
+        </p:txBody>
+      </p:sp>
+      <p:sp>
+        <p:nvSpPr>
+          <p:cNvPr id="18" name="TextBox 17"/>
           <p:cNvSpPr txBox="1"/>
           <p:nvPr/>
         </p:nvSpPr>
         <p:spPr>
           <a:xfrm>
-            <a:off x="7772400" y="6446520"/>
-            <a:ext cx="4114800" cy="320040"/>
+            <a:off x="7589520" y="6419088"/>
+            <a:ext cx="4297680" cy="292608"/>
           </a:xfrm>
           <a:prstGeom prst="rect">
             <a:avLst/>
@@ -9296,56 +13243,13 @@
             <a:r>
               <a:rPr sz="1000" b="0">
                 <a:solidFill>
-                  <a:srgbClr val="AAAAAA"/>
+                  <a:srgbClr val="A8A8B0"/>
                 </a:solidFill>
                 <a:latin typeface="Arial"/>
                 <a:ea typeface="Arial"/>
               </a:rPr>
               <a:t>光影盟特训营  ·  6/14</a:t>
             </a:r>
-          </a:p>
-        </p:txBody>
-      </p:sp>
-      <p:sp>
-        <p:nvSpPr>
-          <p:cNvPr id="11" name="Rectangle 10"/>
-          <p:cNvSpPr/>
-          <p:nvPr/>
-        </p:nvSpPr>
-        <p:spPr>
-          <a:xfrm>
-            <a:off x="457200" y="6400800"/>
-            <a:ext cx="11247120" cy="12700"/>
-          </a:xfrm>
-          <a:prstGeom prst="rect">
-            <a:avLst/>
-          </a:prstGeom>
-          <a:solidFill>
-            <a:srgbClr val="D4AF37"/>
-          </a:solidFill>
-          <a:ln>
-            <a:noFill/>
-          </a:ln>
-        </p:spPr>
-        <p:style>
-          <a:lnRef idx="1">
-            <a:schemeClr val="accent1"/>
-          </a:lnRef>
-          <a:fillRef idx="3">
-            <a:schemeClr val="accent1"/>
-          </a:fillRef>
-          <a:effectRef idx="2">
-            <a:schemeClr val="accent1"/>
-          </a:effectRef>
-          <a:fontRef idx="minor">
-            <a:schemeClr val="lt1"/>
-          </a:fontRef>
-        </p:style>
-        <p:txBody>
-          <a:bodyPr rtlCol="0" anchor="ctr"/>
-          <a:lstStyle/>
-          <a:p>
-            <a:pPr algn="ctr"/>
           </a:p>
         </p:txBody>
       </p:sp>
@@ -9377,14 +13281,272 @@
       <p:grpSpPr/>
       <p:sp>
         <p:nvSpPr>
-          <p:cNvPr id="2" name="TextBox 1"/>
+          <p:cNvPr id="2" name="Rectangle 1"/>
+          <p:cNvSpPr/>
+          <p:nvPr/>
+        </p:nvSpPr>
+        <p:spPr>
+          <a:xfrm>
+            <a:off x="256032" y="201168"/>
+            <a:ext cx="11676888" cy="12700"/>
+          </a:xfrm>
+          <a:prstGeom prst="rect">
+            <a:avLst/>
+          </a:prstGeom>
+          <a:solidFill>
+            <a:srgbClr val="D4AF37"/>
+          </a:solidFill>
+          <a:ln>
+            <a:noFill/>
+          </a:ln>
+        </p:spPr>
+        <p:style>
+          <a:lnRef idx="1">
+            <a:schemeClr val="accent1"/>
+          </a:lnRef>
+          <a:fillRef idx="3">
+            <a:schemeClr val="accent1"/>
+          </a:fillRef>
+          <a:effectRef idx="2">
+            <a:schemeClr val="accent1"/>
+          </a:effectRef>
+          <a:fontRef idx="minor">
+            <a:schemeClr val="lt1"/>
+          </a:fontRef>
+        </p:style>
+        <p:txBody>
+          <a:bodyPr rtlCol="0" anchor="ctr"/>
+          <a:lstStyle/>
+          <a:p>
+            <a:pPr algn="ctr"/>
+          </a:p>
+        </p:txBody>
+      </p:sp>
+      <p:sp>
+        <p:nvSpPr>
+          <p:cNvPr id="3" name="Rectangle 2"/>
+          <p:cNvSpPr/>
+          <p:nvPr/>
+        </p:nvSpPr>
+        <p:spPr>
+          <a:xfrm>
+            <a:off x="256032" y="6565392"/>
+            <a:ext cx="11676888" cy="12700"/>
+          </a:xfrm>
+          <a:prstGeom prst="rect">
+            <a:avLst/>
+          </a:prstGeom>
+          <a:solidFill>
+            <a:srgbClr val="D4AF37"/>
+          </a:solidFill>
+          <a:ln>
+            <a:noFill/>
+          </a:ln>
+        </p:spPr>
+        <p:style>
+          <a:lnRef idx="1">
+            <a:schemeClr val="accent1"/>
+          </a:lnRef>
+          <a:fillRef idx="3">
+            <a:schemeClr val="accent1"/>
+          </a:fillRef>
+          <a:effectRef idx="2">
+            <a:schemeClr val="accent1"/>
+          </a:effectRef>
+          <a:fontRef idx="minor">
+            <a:schemeClr val="lt1"/>
+          </a:fontRef>
+        </p:style>
+        <p:txBody>
+          <a:bodyPr rtlCol="0" anchor="ctr"/>
+          <a:lstStyle/>
+          <a:p>
+            <a:pPr algn="ctr"/>
+          </a:p>
+        </p:txBody>
+      </p:sp>
+      <p:sp>
+        <p:nvSpPr>
+          <p:cNvPr id="4" name="Rectangle 3"/>
+          <p:cNvSpPr/>
+          <p:nvPr/>
+        </p:nvSpPr>
+        <p:spPr>
+          <a:xfrm>
+            <a:off x="256032" y="201168"/>
+            <a:ext cx="12700" cy="6364224"/>
+          </a:xfrm>
+          <a:prstGeom prst="rect">
+            <a:avLst/>
+          </a:prstGeom>
+          <a:solidFill>
+            <a:srgbClr val="D4AF37"/>
+          </a:solidFill>
+          <a:ln>
+            <a:noFill/>
+          </a:ln>
+        </p:spPr>
+        <p:style>
+          <a:lnRef idx="1">
+            <a:schemeClr val="accent1"/>
+          </a:lnRef>
+          <a:fillRef idx="3">
+            <a:schemeClr val="accent1"/>
+          </a:fillRef>
+          <a:effectRef idx="2">
+            <a:schemeClr val="accent1"/>
+          </a:effectRef>
+          <a:fontRef idx="minor">
+            <a:schemeClr val="lt1"/>
+          </a:fontRef>
+        </p:style>
+        <p:txBody>
+          <a:bodyPr rtlCol="0" anchor="ctr"/>
+          <a:lstStyle/>
+          <a:p>
+            <a:pPr algn="ctr"/>
+          </a:p>
+        </p:txBody>
+      </p:sp>
+      <p:sp>
+        <p:nvSpPr>
+          <p:cNvPr id="5" name="Rectangle 4"/>
+          <p:cNvSpPr/>
+          <p:nvPr/>
+        </p:nvSpPr>
+        <p:spPr>
+          <a:xfrm>
+            <a:off x="11932920" y="201168"/>
+            <a:ext cx="12700" cy="6364224"/>
+          </a:xfrm>
+          <a:prstGeom prst="rect">
+            <a:avLst/>
+          </a:prstGeom>
+          <a:solidFill>
+            <a:srgbClr val="D4AF37"/>
+          </a:solidFill>
+          <a:ln>
+            <a:noFill/>
+          </a:ln>
+        </p:spPr>
+        <p:style>
+          <a:lnRef idx="1">
+            <a:schemeClr val="accent1"/>
+          </a:lnRef>
+          <a:fillRef idx="3">
+            <a:schemeClr val="accent1"/>
+          </a:fillRef>
+          <a:effectRef idx="2">
+            <a:schemeClr val="accent1"/>
+          </a:effectRef>
+          <a:fontRef idx="minor">
+            <a:schemeClr val="lt1"/>
+          </a:fontRef>
+        </p:style>
+        <p:txBody>
+          <a:bodyPr rtlCol="0" anchor="ctr"/>
+          <a:lstStyle/>
+          <a:p>
+            <a:pPr algn="ctr"/>
+          </a:p>
+        </p:txBody>
+      </p:sp>
+      <p:sp>
+        <p:nvSpPr>
+          <p:cNvPr id="6" name="Rectangle 5"/>
+          <p:cNvSpPr/>
+          <p:nvPr/>
+        </p:nvSpPr>
+        <p:spPr>
+          <a:xfrm>
+            <a:off x="320040" y="365760"/>
+            <a:ext cx="54864" cy="5760720"/>
+          </a:xfrm>
+          <a:prstGeom prst="rect">
+            <a:avLst/>
+          </a:prstGeom>
+          <a:solidFill>
+            <a:srgbClr val="D4AF37"/>
+          </a:solidFill>
+          <a:ln>
+            <a:noFill/>
+          </a:ln>
+        </p:spPr>
+        <p:style>
+          <a:lnRef idx="1">
+            <a:schemeClr val="accent1"/>
+          </a:lnRef>
+          <a:fillRef idx="3">
+            <a:schemeClr val="accent1"/>
+          </a:fillRef>
+          <a:effectRef idx="2">
+            <a:schemeClr val="accent1"/>
+          </a:effectRef>
+          <a:fontRef idx="minor">
+            <a:schemeClr val="lt1"/>
+          </a:fontRef>
+        </p:style>
+        <p:txBody>
+          <a:bodyPr rtlCol="0" anchor="ctr"/>
+          <a:lstStyle/>
+          <a:p>
+            <a:pPr algn="ctr"/>
+          </a:p>
+        </p:txBody>
+      </p:sp>
+      <p:sp>
+        <p:nvSpPr>
+          <p:cNvPr id="7" name="Rectangle 6"/>
+          <p:cNvSpPr/>
+          <p:nvPr/>
+        </p:nvSpPr>
+        <p:spPr>
+          <a:xfrm>
+            <a:off x="448056" y="365760"/>
+            <a:ext cx="12700" cy="5760720"/>
+          </a:xfrm>
+          <a:prstGeom prst="rect">
+            <a:avLst/>
+          </a:prstGeom>
+          <a:solidFill>
+            <a:srgbClr val="2A2A3E"/>
+          </a:solidFill>
+          <a:ln>
+            <a:noFill/>
+          </a:ln>
+        </p:spPr>
+        <p:style>
+          <a:lnRef idx="1">
+            <a:schemeClr val="accent1"/>
+          </a:lnRef>
+          <a:fillRef idx="3">
+            <a:schemeClr val="accent1"/>
+          </a:fillRef>
+          <a:effectRef idx="2">
+            <a:schemeClr val="accent1"/>
+          </a:effectRef>
+          <a:fontRef idx="minor">
+            <a:schemeClr val="lt1"/>
+          </a:fontRef>
+        </p:style>
+        <p:txBody>
+          <a:bodyPr rtlCol="0" anchor="ctr"/>
+          <a:lstStyle/>
+          <a:p>
+            <a:pPr algn="ctr"/>
+          </a:p>
+        </p:txBody>
+      </p:sp>
+      <p:sp>
+        <p:nvSpPr>
+          <p:cNvPr id="8" name="TextBox 7"/>
           <p:cNvSpPr txBox="1"/>
           <p:nvPr/>
         </p:nvSpPr>
         <p:spPr>
           <a:xfrm>
-            <a:off x="548640" y="292608"/>
-            <a:ext cx="10972800" cy="640080"/>
+            <a:off x="640080" y="292608"/>
+            <a:ext cx="10789920" cy="594360"/>
           </a:xfrm>
           <a:prstGeom prst="rect">
             <a:avLst/>
@@ -9413,14 +13575,14 @@
       </p:sp>
       <p:sp>
         <p:nvSpPr>
-          <p:cNvPr id="3" name="Rectangle 2"/>
-          <p:cNvSpPr/>
-          <p:nvPr/>
-        </p:nvSpPr>
-        <p:spPr>
-          <a:xfrm>
-            <a:off x="548640" y="932688"/>
-            <a:ext cx="2011680" cy="31750"/>
+          <p:cNvPr id="9" name="Rectangle 8"/>
+          <p:cNvSpPr/>
+          <p:nvPr/>
+        </p:nvSpPr>
+        <p:spPr>
+          <a:xfrm>
+            <a:off x="640080" y="896112"/>
+            <a:ext cx="2194560" cy="31750"/>
           </a:xfrm>
           <a:prstGeom prst="rect">
             <a:avLst/>
@@ -9456,20 +13618,63 @@
       </p:sp>
       <p:sp>
         <p:nvSpPr>
-          <p:cNvPr id="4" name="Rectangle 3"/>
+          <p:cNvPr id="10" name="Rectangle 9"/>
+          <p:cNvSpPr/>
+          <p:nvPr/>
+        </p:nvSpPr>
+        <p:spPr>
+          <a:xfrm>
+            <a:off x="3017520" y="896112"/>
+            <a:ext cx="8503920" cy="9525"/>
+          </a:xfrm>
+          <a:prstGeom prst="rect">
+            <a:avLst/>
+          </a:prstGeom>
+          <a:solidFill>
+            <a:srgbClr val="D4AF37"/>
+          </a:solidFill>
+          <a:ln>
+            <a:noFill/>
+          </a:ln>
+        </p:spPr>
+        <p:style>
+          <a:lnRef idx="1">
+            <a:schemeClr val="accent1"/>
+          </a:lnRef>
+          <a:fillRef idx="3">
+            <a:schemeClr val="accent1"/>
+          </a:fillRef>
+          <a:effectRef idx="2">
+            <a:schemeClr val="accent1"/>
+          </a:effectRef>
+          <a:fontRef idx="minor">
+            <a:schemeClr val="lt1"/>
+          </a:fontRef>
+        </p:style>
+        <p:txBody>
+          <a:bodyPr rtlCol="0" anchor="ctr"/>
+          <a:lstStyle/>
+          <a:p>
+            <a:pPr algn="ctr"/>
+          </a:p>
+        </p:txBody>
+      </p:sp>
+      <p:sp>
+        <p:nvSpPr>
+          <p:cNvPr id="11" name="Rectangle 10"/>
           <p:cNvSpPr/>
           <p:nvPr/>
         </p:nvSpPr>
         <p:spPr>
           <a:xfrm>
             <a:off x="700887" y="1280160"/>
-            <a:ext cx="3383280" cy="3474720"/>
-          </a:xfrm>
-          <a:prstGeom prst="rect">
-            <a:avLst/>
-          </a:prstGeom>
-          <a:solidFill>
-            <a:srgbClr val="202035"/>
+            <a:ext cx="3383280" cy="3520440"/>
+          </a:xfrm>
+          <a:prstGeom prst="rect">
+            <a:avLst/>
+          </a:prstGeom>
+          <a:solidFill>
+            <a:srgbClr val="121222"/>
           </a:solidFill>
           <a:ln w="25400" cap="flat">
             <a:solidFill>
@@ -9500,7 +13705,7 @@
             <a:r>
               <a:rPr sz="1400" b="0">
                 <a:solidFill>
-                  <a:srgbClr val="AAAAAA"/>
+                  <a:srgbClr val="A8A8B0"/>
                 </a:solidFill>
                 <a:latin typeface="Arial"/>
                 <a:ea typeface="Arial"/>
@@ -9512,20 +13717,20 @@
       </p:sp>
       <p:sp>
         <p:nvSpPr>
-          <p:cNvPr id="5" name="Rectangle 4"/>
+          <p:cNvPr id="12" name="Rectangle 11"/>
           <p:cNvSpPr/>
           <p:nvPr/>
         </p:nvSpPr>
         <p:spPr>
           <a:xfrm>
             <a:off x="4404207" y="1280160"/>
-            <a:ext cx="3383280" cy="3474720"/>
-          </a:xfrm>
-          <a:prstGeom prst="rect">
-            <a:avLst/>
-          </a:prstGeom>
-          <a:solidFill>
-            <a:srgbClr val="202035"/>
+            <a:ext cx="3383280" cy="3520440"/>
+          </a:xfrm>
+          <a:prstGeom prst="rect">
+            <a:avLst/>
+          </a:prstGeom>
+          <a:solidFill>
+            <a:srgbClr val="121222"/>
           </a:solidFill>
           <a:ln w="25400" cap="flat">
             <a:solidFill>
@@ -9556,7 +13761,7 @@
             <a:r>
               <a:rPr sz="1400" b="0">
                 <a:solidFill>
-                  <a:srgbClr val="AAAAAA"/>
+                  <a:srgbClr val="A8A8B0"/>
                 </a:solidFill>
                 <a:latin typeface="Arial"/>
                 <a:ea typeface="Arial"/>
@@ -9568,20 +13773,20 @@
       </p:sp>
       <p:sp>
         <p:nvSpPr>
-          <p:cNvPr id="6" name="Rectangle 5"/>
+          <p:cNvPr id="13" name="Rectangle 12"/>
           <p:cNvSpPr/>
           <p:nvPr/>
         </p:nvSpPr>
         <p:spPr>
           <a:xfrm>
             <a:off x="8107527" y="1280160"/>
-            <a:ext cx="3383280" cy="3474720"/>
-          </a:xfrm>
-          <a:prstGeom prst="rect">
-            <a:avLst/>
-          </a:prstGeom>
-          <a:solidFill>
-            <a:srgbClr val="202035"/>
+            <a:ext cx="3383280" cy="3520440"/>
+          </a:xfrm>
+          <a:prstGeom prst="rect">
+            <a:avLst/>
+          </a:prstGeom>
+          <a:solidFill>
+            <a:srgbClr val="121222"/>
           </a:solidFill>
           <a:ln w="25400" cap="flat">
             <a:solidFill>
@@ -9612,7 +13817,7 @@
             <a:r>
               <a:rPr sz="1400" b="0">
                 <a:solidFill>
-                  <a:srgbClr val="AAAAAA"/>
+                  <a:srgbClr val="A8A8B0"/>
                 </a:solidFill>
                 <a:latin typeface="Arial"/>
                 <a:ea typeface="Arial"/>
@@ -9624,14 +13829,57 @@
       </p:sp>
       <p:sp>
         <p:nvSpPr>
-          <p:cNvPr id="7" name="TextBox 6"/>
+          <p:cNvPr id="14" name="Rectangle 13"/>
+          <p:cNvSpPr/>
+          <p:nvPr/>
+        </p:nvSpPr>
+        <p:spPr>
+          <a:xfrm>
+            <a:off x="457200" y="6355080"/>
+            <a:ext cx="11247120" cy="12700"/>
+          </a:xfrm>
+          <a:prstGeom prst="rect">
+            <a:avLst/>
+          </a:prstGeom>
+          <a:solidFill>
+            <a:srgbClr val="D4AF37"/>
+          </a:solidFill>
+          <a:ln>
+            <a:noFill/>
+          </a:ln>
+        </p:spPr>
+        <p:style>
+          <a:lnRef idx="1">
+            <a:schemeClr val="accent1"/>
+          </a:lnRef>
+          <a:fillRef idx="3">
+            <a:schemeClr val="accent1"/>
+          </a:fillRef>
+          <a:effectRef idx="2">
+            <a:schemeClr val="accent1"/>
+          </a:effectRef>
+          <a:fontRef idx="minor">
+            <a:schemeClr val="lt1"/>
+          </a:fontRef>
+        </p:style>
+        <p:txBody>
+          <a:bodyPr rtlCol="0" anchor="ctr"/>
+          <a:lstStyle/>
+          <a:p>
+            <a:pPr algn="ctr"/>
+          </a:p>
+        </p:txBody>
+      </p:sp>
+      <p:sp>
+        <p:nvSpPr>
+          <p:cNvPr id="15" name="TextBox 14"/>
           <p:cNvSpPr txBox="1"/>
           <p:nvPr/>
         </p:nvSpPr>
         <p:spPr>
           <a:xfrm>
-            <a:off x="7772400" y="6446520"/>
-            <a:ext cx="4114800" cy="320040"/>
+            <a:off x="7589520" y="6419088"/>
+            <a:ext cx="4297680" cy="292608"/>
           </a:xfrm>
           <a:prstGeom prst="rect">
             <a:avLst/>
@@ -9648,56 +13896,13 @@
             <a:r>
               <a:rPr sz="1000" b="0">
                 <a:solidFill>
-                  <a:srgbClr val="AAAAAA"/>
+                  <a:srgbClr val="A8A8B0"/>
                 </a:solidFill>
                 <a:latin typeface="Arial"/>
                 <a:ea typeface="Arial"/>
               </a:rPr>
               <a:t>光影盟特训营  ·  7/14</a:t>
             </a:r>
-          </a:p>
-        </p:txBody>
-      </p:sp>
-      <p:sp>
-        <p:nvSpPr>
-          <p:cNvPr id="8" name="Rectangle 7"/>
-          <p:cNvSpPr/>
-          <p:nvPr/>
-        </p:nvSpPr>
-        <p:spPr>
-          <a:xfrm>
-            <a:off x="457200" y="6400800"/>
-            <a:ext cx="11247120" cy="12700"/>
-          </a:xfrm>
-          <a:prstGeom prst="rect">
-            <a:avLst/>
-          </a:prstGeom>
-          <a:solidFill>
-            <a:srgbClr val="D4AF37"/>
-          </a:solidFill>
-          <a:ln>
-            <a:noFill/>
-          </a:ln>
-        </p:spPr>
-        <p:style>
-          <a:lnRef idx="1">
-            <a:schemeClr val="accent1"/>
-          </a:lnRef>
-          <a:fillRef idx="3">
-            <a:schemeClr val="accent1"/>
-          </a:fillRef>
-          <a:effectRef idx="2">
-            <a:schemeClr val="accent1"/>
-          </a:effectRef>
-          <a:fontRef idx="minor">
-            <a:schemeClr val="lt1"/>
-          </a:fontRef>
-        </p:style>
-        <p:txBody>
-          <a:bodyPr rtlCol="0" anchor="ctr"/>
-          <a:lstStyle/>
-          <a:p>
-            <a:pPr algn="ctr"/>
           </a:p>
         </p:txBody>
       </p:sp>
@@ -9729,14 +13934,272 @@
       <p:grpSpPr/>
       <p:sp>
         <p:nvSpPr>
-          <p:cNvPr id="2" name="TextBox 1"/>
+          <p:cNvPr id="2" name="Rectangle 1"/>
+          <p:cNvSpPr/>
+          <p:nvPr/>
+        </p:nvSpPr>
+        <p:spPr>
+          <a:xfrm>
+            <a:off x="256032" y="201168"/>
+            <a:ext cx="11676888" cy="12700"/>
+          </a:xfrm>
+          <a:prstGeom prst="rect">
+            <a:avLst/>
+          </a:prstGeom>
+          <a:solidFill>
+            <a:srgbClr val="D4AF37"/>
+          </a:solidFill>
+          <a:ln>
+            <a:noFill/>
+          </a:ln>
+        </p:spPr>
+        <p:style>
+          <a:lnRef idx="1">
+            <a:schemeClr val="accent1"/>
+          </a:lnRef>
+          <a:fillRef idx="3">
+            <a:schemeClr val="accent1"/>
+          </a:fillRef>
+          <a:effectRef idx="2">
+            <a:schemeClr val="accent1"/>
+          </a:effectRef>
+          <a:fontRef idx="minor">
+            <a:schemeClr val="lt1"/>
+          </a:fontRef>
+        </p:style>
+        <p:txBody>
+          <a:bodyPr rtlCol="0" anchor="ctr"/>
+          <a:lstStyle/>
+          <a:p>
+            <a:pPr algn="ctr"/>
+          </a:p>
+        </p:txBody>
+      </p:sp>
+      <p:sp>
+        <p:nvSpPr>
+          <p:cNvPr id="3" name="Rectangle 2"/>
+          <p:cNvSpPr/>
+          <p:nvPr/>
+        </p:nvSpPr>
+        <p:spPr>
+          <a:xfrm>
+            <a:off x="256032" y="6565392"/>
+            <a:ext cx="11676888" cy="12700"/>
+          </a:xfrm>
+          <a:prstGeom prst="rect">
+            <a:avLst/>
+          </a:prstGeom>
+          <a:solidFill>
+            <a:srgbClr val="D4AF37"/>
+          </a:solidFill>
+          <a:ln>
+            <a:noFill/>
+          </a:ln>
+        </p:spPr>
+        <p:style>
+          <a:lnRef idx="1">
+            <a:schemeClr val="accent1"/>
+          </a:lnRef>
+          <a:fillRef idx="3">
+            <a:schemeClr val="accent1"/>
+          </a:fillRef>
+          <a:effectRef idx="2">
+            <a:schemeClr val="accent1"/>
+          </a:effectRef>
+          <a:fontRef idx="minor">
+            <a:schemeClr val="lt1"/>
+          </a:fontRef>
+        </p:style>
+        <p:txBody>
+          <a:bodyPr rtlCol="0" anchor="ctr"/>
+          <a:lstStyle/>
+          <a:p>
+            <a:pPr algn="ctr"/>
+          </a:p>
+        </p:txBody>
+      </p:sp>
+      <p:sp>
+        <p:nvSpPr>
+          <p:cNvPr id="4" name="Rectangle 3"/>
+          <p:cNvSpPr/>
+          <p:nvPr/>
+        </p:nvSpPr>
+        <p:spPr>
+          <a:xfrm>
+            <a:off x="256032" y="201168"/>
+            <a:ext cx="12700" cy="6364224"/>
+          </a:xfrm>
+          <a:prstGeom prst="rect">
+            <a:avLst/>
+          </a:prstGeom>
+          <a:solidFill>
+            <a:srgbClr val="D4AF37"/>
+          </a:solidFill>
+          <a:ln>
+            <a:noFill/>
+          </a:ln>
+        </p:spPr>
+        <p:style>
+          <a:lnRef idx="1">
+            <a:schemeClr val="accent1"/>
+          </a:lnRef>
+          <a:fillRef idx="3">
+            <a:schemeClr val="accent1"/>
+          </a:fillRef>
+          <a:effectRef idx="2">
+            <a:schemeClr val="accent1"/>
+          </a:effectRef>
+          <a:fontRef idx="minor">
+            <a:schemeClr val="lt1"/>
+          </a:fontRef>
+        </p:style>
+        <p:txBody>
+          <a:bodyPr rtlCol="0" anchor="ctr"/>
+          <a:lstStyle/>
+          <a:p>
+            <a:pPr algn="ctr"/>
+          </a:p>
+        </p:txBody>
+      </p:sp>
+      <p:sp>
+        <p:nvSpPr>
+          <p:cNvPr id="5" name="Rectangle 4"/>
+          <p:cNvSpPr/>
+          <p:nvPr/>
+        </p:nvSpPr>
+        <p:spPr>
+          <a:xfrm>
+            <a:off x="11932920" y="201168"/>
+            <a:ext cx="12700" cy="6364224"/>
+          </a:xfrm>
+          <a:prstGeom prst="rect">
+            <a:avLst/>
+          </a:prstGeom>
+          <a:solidFill>
+            <a:srgbClr val="D4AF37"/>
+          </a:solidFill>
+          <a:ln>
+            <a:noFill/>
+          </a:ln>
+        </p:spPr>
+        <p:style>
+          <a:lnRef idx="1">
+            <a:schemeClr val="accent1"/>
+          </a:lnRef>
+          <a:fillRef idx="3">
+            <a:schemeClr val="accent1"/>
+          </a:fillRef>
+          <a:effectRef idx="2">
+            <a:schemeClr val="accent1"/>
+          </a:effectRef>
+          <a:fontRef idx="minor">
+            <a:schemeClr val="lt1"/>
+          </a:fontRef>
+        </p:style>
+        <p:txBody>
+          <a:bodyPr rtlCol="0" anchor="ctr"/>
+          <a:lstStyle/>
+          <a:p>
+            <a:pPr algn="ctr"/>
+          </a:p>
+        </p:txBody>
+      </p:sp>
+      <p:sp>
+        <p:nvSpPr>
+          <p:cNvPr id="6" name="Rectangle 5"/>
+          <p:cNvSpPr/>
+          <p:nvPr/>
+        </p:nvSpPr>
+        <p:spPr>
+          <a:xfrm>
+            <a:off x="320040" y="365760"/>
+            <a:ext cx="54864" cy="5760720"/>
+          </a:xfrm>
+          <a:prstGeom prst="rect">
+            <a:avLst/>
+          </a:prstGeom>
+          <a:solidFill>
+            <a:srgbClr val="D4AF37"/>
+          </a:solidFill>
+          <a:ln>
+            <a:noFill/>
+          </a:ln>
+        </p:spPr>
+        <p:style>
+          <a:lnRef idx="1">
+            <a:schemeClr val="accent1"/>
+          </a:lnRef>
+          <a:fillRef idx="3">
+            <a:schemeClr val="accent1"/>
+          </a:fillRef>
+          <a:effectRef idx="2">
+            <a:schemeClr val="accent1"/>
+          </a:effectRef>
+          <a:fontRef idx="minor">
+            <a:schemeClr val="lt1"/>
+          </a:fontRef>
+        </p:style>
+        <p:txBody>
+          <a:bodyPr rtlCol="0" anchor="ctr"/>
+          <a:lstStyle/>
+          <a:p>
+            <a:pPr algn="ctr"/>
+          </a:p>
+        </p:txBody>
+      </p:sp>
+      <p:sp>
+        <p:nvSpPr>
+          <p:cNvPr id="7" name="Rectangle 6"/>
+          <p:cNvSpPr/>
+          <p:nvPr/>
+        </p:nvSpPr>
+        <p:spPr>
+          <a:xfrm>
+            <a:off x="448056" y="365760"/>
+            <a:ext cx="12700" cy="5760720"/>
+          </a:xfrm>
+          <a:prstGeom prst="rect">
+            <a:avLst/>
+          </a:prstGeom>
+          <a:solidFill>
+            <a:srgbClr val="2A2A3E"/>
+          </a:solidFill>
+          <a:ln>
+            <a:noFill/>
+          </a:ln>
+        </p:spPr>
+        <p:style>
+          <a:lnRef idx="1">
+            <a:schemeClr val="accent1"/>
+          </a:lnRef>
+          <a:fillRef idx="3">
+            <a:schemeClr val="accent1"/>
+          </a:fillRef>
+          <a:effectRef idx="2">
+            <a:schemeClr val="accent1"/>
+          </a:effectRef>
+          <a:fontRef idx="minor">
+            <a:schemeClr val="lt1"/>
+          </a:fontRef>
+        </p:style>
+        <p:txBody>
+          <a:bodyPr rtlCol="0" anchor="ctr"/>
+          <a:lstStyle/>
+          <a:p>
+            <a:pPr algn="ctr"/>
+          </a:p>
+        </p:txBody>
+      </p:sp>
+      <p:sp>
+        <p:nvSpPr>
+          <p:cNvPr id="8" name="TextBox 7"/>
           <p:cNvSpPr txBox="1"/>
           <p:nvPr/>
         </p:nvSpPr>
         <p:spPr>
           <a:xfrm>
-            <a:off x="548640" y="292608"/>
-            <a:ext cx="10972800" cy="640080"/>
+            <a:off x="640080" y="292608"/>
+            <a:ext cx="10789920" cy="594360"/>
           </a:xfrm>
           <a:prstGeom prst="rect">
             <a:avLst/>
@@ -9765,14 +14228,14 @@
       </p:sp>
       <p:sp>
         <p:nvSpPr>
-          <p:cNvPr id="3" name="Rectangle 2"/>
-          <p:cNvSpPr/>
-          <p:nvPr/>
-        </p:nvSpPr>
-        <p:spPr>
-          <a:xfrm>
-            <a:off x="548640" y="932688"/>
-            <a:ext cx="2011680" cy="31750"/>
+          <p:cNvPr id="9" name="Rectangle 8"/>
+          <p:cNvSpPr/>
+          <p:nvPr/>
+        </p:nvSpPr>
+        <p:spPr>
+          <a:xfrm>
+            <a:off x="640080" y="896112"/>
+            <a:ext cx="2194560" cy="31750"/>
           </a:xfrm>
           <a:prstGeom prst="rect">
             <a:avLst/>
@@ -9808,14 +14271,100 @@
       </p:sp>
       <p:sp>
         <p:nvSpPr>
-          <p:cNvPr id="4" name="TextBox 3"/>
+          <p:cNvPr id="10" name="Rectangle 9"/>
+          <p:cNvSpPr/>
+          <p:nvPr/>
+        </p:nvSpPr>
+        <p:spPr>
+          <a:xfrm>
+            <a:off x="3017520" y="896112"/>
+            <a:ext cx="8503920" cy="9525"/>
+          </a:xfrm>
+          <a:prstGeom prst="rect">
+            <a:avLst/>
+          </a:prstGeom>
+          <a:solidFill>
+            <a:srgbClr val="D4AF37"/>
+          </a:solidFill>
+          <a:ln>
+            <a:noFill/>
+          </a:ln>
+        </p:spPr>
+        <p:style>
+          <a:lnRef idx="1">
+            <a:schemeClr val="accent1"/>
+          </a:lnRef>
+          <a:fillRef idx="3">
+            <a:schemeClr val="accent1"/>
+          </a:fillRef>
+          <a:effectRef idx="2">
+            <a:schemeClr val="accent1"/>
+          </a:effectRef>
+          <a:fontRef idx="minor">
+            <a:schemeClr val="lt1"/>
+          </a:fontRef>
+        </p:style>
+        <p:txBody>
+          <a:bodyPr rtlCol="0" anchor="ctr"/>
+          <a:lstStyle/>
+          <a:p>
+            <a:pPr algn="ctr"/>
+          </a:p>
+        </p:txBody>
+      </p:sp>
+      <p:sp>
+        <p:nvSpPr>
+          <p:cNvPr id="11" name="Rectangle 10"/>
+          <p:cNvSpPr/>
+          <p:nvPr/>
+        </p:nvSpPr>
+        <p:spPr>
+          <a:xfrm>
+            <a:off x="1828800" y="1554480"/>
+            <a:ext cx="8503920" cy="1097280"/>
+          </a:xfrm>
+          <a:prstGeom prst="rect">
+            <a:avLst/>
+          </a:prstGeom>
+          <a:solidFill>
+            <a:srgbClr val="2A2A3E"/>
+          </a:solidFill>
+          <a:ln>
+            <a:noFill/>
+          </a:ln>
+        </p:spPr>
+        <p:style>
+          <a:lnRef idx="1">
+            <a:schemeClr val="accent1"/>
+          </a:lnRef>
+          <a:fillRef idx="3">
+            <a:schemeClr val="accent1"/>
+          </a:fillRef>
+          <a:effectRef idx="2">
+            <a:schemeClr val="accent1"/>
+          </a:effectRef>
+          <a:fontRef idx="minor">
+            <a:schemeClr val="lt1"/>
+          </a:fontRef>
+        </p:style>
+        <p:txBody>
+          <a:bodyPr rtlCol="0" anchor="ctr"/>
+          <a:lstStyle/>
+          <a:p>
+            <a:pPr algn="ctr"/>
+          </a:p>
+        </p:txBody>
+      </p:sp>
+      <p:sp>
+        <p:nvSpPr>
+          <p:cNvPr id="12" name="TextBox 11"/>
           <p:cNvSpPr txBox="1"/>
           <p:nvPr/>
         </p:nvSpPr>
         <p:spPr>
           <a:xfrm>
-            <a:off x="731520" y="1645920"/>
-            <a:ext cx="10698480" cy="914400"/>
+            <a:off x="731520" y="1691640"/>
+            <a:ext cx="10698480" cy="868680"/>
           </a:xfrm>
           <a:prstGeom prst="rect">
             <a:avLst/>
@@ -9844,14 +14393,14 @@
       </p:sp>
       <p:sp>
         <p:nvSpPr>
-          <p:cNvPr id="5" name="Rectangle 4"/>
-          <p:cNvSpPr/>
-          <p:nvPr/>
-        </p:nvSpPr>
-        <p:spPr>
-          <a:xfrm>
-            <a:off x="4114800" y="2651760"/>
-            <a:ext cx="3931920" cy="31750"/>
+          <p:cNvPr id="13" name="Rectangle 12"/>
+          <p:cNvSpPr/>
+          <p:nvPr/>
+        </p:nvSpPr>
+        <p:spPr>
+          <a:xfrm>
+            <a:off x="4206240" y="2880360"/>
+            <a:ext cx="3749039" cy="25400"/>
           </a:xfrm>
           <a:prstGeom prst="rect">
             <a:avLst/>
@@ -9887,13 +14436,13 @@
       </p:sp>
       <p:sp>
         <p:nvSpPr>
-          <p:cNvPr id="6" name="TextBox 5"/>
+          <p:cNvPr id="14" name="TextBox 13"/>
           <p:cNvSpPr txBox="1"/>
           <p:nvPr/>
         </p:nvSpPr>
         <p:spPr>
           <a:xfrm>
-            <a:off x="2286000" y="3108960"/>
+            <a:off x="2286000" y="3200400"/>
             <a:ext cx="7589520" cy="2011680"/>
           </a:xfrm>
           <a:prstGeom prst="rect">
@@ -9909,7 +14458,7 @@
           <a:p>
             <a:pPr algn="ctr">
               <a:spcAft>
-                <a:spcPts val="1000"/>
+                <a:spcPts val="1400"/>
               </a:spcAft>
             </a:pPr>
             <a:r>
@@ -9926,7 +14475,7 @@
           <a:p>
             <a:pPr algn="ctr">
               <a:spcAft>
-                <a:spcPts val="1000"/>
+                <a:spcPts val="1400"/>
               </a:spcAft>
             </a:pPr>
             <a:r>
@@ -9943,7 +14492,7 @@
           <a:p>
             <a:pPr algn="ctr">
               <a:spcAft>
-                <a:spcPts val="1000"/>
+                <a:spcPts val="1400"/>
               </a:spcAft>
             </a:pPr>
             <a:r>
@@ -9961,14 +14510,57 @@
       </p:sp>
       <p:sp>
         <p:nvSpPr>
-          <p:cNvPr id="7" name="TextBox 6"/>
+          <p:cNvPr id="15" name="Rectangle 14"/>
+          <p:cNvSpPr/>
+          <p:nvPr/>
+        </p:nvSpPr>
+        <p:spPr>
+          <a:xfrm>
+            <a:off x="457200" y="6355080"/>
+            <a:ext cx="11247120" cy="12700"/>
+          </a:xfrm>
+          <a:prstGeom prst="rect">
+            <a:avLst/>
+          </a:prstGeom>
+          <a:solidFill>
+            <a:srgbClr val="D4AF37"/>
+          </a:solidFill>
+          <a:ln>
+            <a:noFill/>
+          </a:ln>
+        </p:spPr>
+        <p:style>
+          <a:lnRef idx="1">
+            <a:schemeClr val="accent1"/>
+          </a:lnRef>
+          <a:fillRef idx="3">
+            <a:schemeClr val="accent1"/>
+          </a:fillRef>
+          <a:effectRef idx="2">
+            <a:schemeClr val="accent1"/>
+          </a:effectRef>
+          <a:fontRef idx="minor">
+            <a:schemeClr val="lt1"/>
+          </a:fontRef>
+        </p:style>
+        <p:txBody>
+          <a:bodyPr rtlCol="0" anchor="ctr"/>
+          <a:lstStyle/>
+          <a:p>
+            <a:pPr algn="ctr"/>
+          </a:p>
+        </p:txBody>
+      </p:sp>
+      <p:sp>
+        <p:nvSpPr>
+          <p:cNvPr id="16" name="TextBox 15"/>
           <p:cNvSpPr txBox="1"/>
           <p:nvPr/>
         </p:nvSpPr>
         <p:spPr>
           <a:xfrm>
-            <a:off x="7772400" y="6446520"/>
-            <a:ext cx="4114800" cy="320040"/>
+            <a:off x="7589520" y="6419088"/>
+            <a:ext cx="4297680" cy="292608"/>
           </a:xfrm>
           <a:prstGeom prst="rect">
             <a:avLst/>
@@ -9985,56 +14577,13 @@
             <a:r>
               <a:rPr sz="1000" b="0">
                 <a:solidFill>
-                  <a:srgbClr val="AAAAAA"/>
+                  <a:srgbClr val="A8A8B0"/>
                 </a:solidFill>
                 <a:latin typeface="Arial"/>
                 <a:ea typeface="Arial"/>
               </a:rPr>
               <a:t>光影盟特训营  ·  8/14</a:t>
             </a:r>
-          </a:p>
-        </p:txBody>
-      </p:sp>
-      <p:sp>
-        <p:nvSpPr>
-          <p:cNvPr id="8" name="Rectangle 7"/>
-          <p:cNvSpPr/>
-          <p:nvPr/>
-        </p:nvSpPr>
-        <p:spPr>
-          <a:xfrm>
-            <a:off x="457200" y="6400800"/>
-            <a:ext cx="11247120" cy="12700"/>
-          </a:xfrm>
-          <a:prstGeom prst="rect">
-            <a:avLst/>
-          </a:prstGeom>
-          <a:solidFill>
-            <a:srgbClr val="D4AF37"/>
-          </a:solidFill>
-          <a:ln>
-            <a:noFill/>
-          </a:ln>
-        </p:spPr>
-        <p:style>
-          <a:lnRef idx="1">
-            <a:schemeClr val="accent1"/>
-          </a:lnRef>
-          <a:fillRef idx="3">
-            <a:schemeClr val="accent1"/>
-          </a:fillRef>
-          <a:effectRef idx="2">
-            <a:schemeClr val="accent1"/>
-          </a:effectRef>
-          <a:fontRef idx="minor">
-            <a:schemeClr val="lt1"/>
-          </a:fontRef>
-        </p:style>
-        <p:txBody>
-          <a:bodyPr rtlCol="0" anchor="ctr"/>
-          <a:lstStyle/>
-          <a:p>
-            <a:pPr algn="ctr"/>
           </a:p>
         </p:txBody>
       </p:sp>
@@ -10066,14 +14615,272 @@
       <p:grpSpPr/>
       <p:sp>
         <p:nvSpPr>
-          <p:cNvPr id="2" name="TextBox 1"/>
+          <p:cNvPr id="2" name="Rectangle 1"/>
+          <p:cNvSpPr/>
+          <p:nvPr/>
+        </p:nvSpPr>
+        <p:spPr>
+          <a:xfrm>
+            <a:off x="256032" y="201168"/>
+            <a:ext cx="11676888" cy="12700"/>
+          </a:xfrm>
+          <a:prstGeom prst="rect">
+            <a:avLst/>
+          </a:prstGeom>
+          <a:solidFill>
+            <a:srgbClr val="D4AF37"/>
+          </a:solidFill>
+          <a:ln>
+            <a:noFill/>
+          </a:ln>
+        </p:spPr>
+        <p:style>
+          <a:lnRef idx="1">
+            <a:schemeClr val="accent1"/>
+          </a:lnRef>
+          <a:fillRef idx="3">
+            <a:schemeClr val="accent1"/>
+          </a:fillRef>
+          <a:effectRef idx="2">
+            <a:schemeClr val="accent1"/>
+          </a:effectRef>
+          <a:fontRef idx="minor">
+            <a:schemeClr val="lt1"/>
+          </a:fontRef>
+        </p:style>
+        <p:txBody>
+          <a:bodyPr rtlCol="0" anchor="ctr"/>
+          <a:lstStyle/>
+          <a:p>
+            <a:pPr algn="ctr"/>
+          </a:p>
+        </p:txBody>
+      </p:sp>
+      <p:sp>
+        <p:nvSpPr>
+          <p:cNvPr id="3" name="Rectangle 2"/>
+          <p:cNvSpPr/>
+          <p:nvPr/>
+        </p:nvSpPr>
+        <p:spPr>
+          <a:xfrm>
+            <a:off x="256032" y="6565392"/>
+            <a:ext cx="11676888" cy="12700"/>
+          </a:xfrm>
+          <a:prstGeom prst="rect">
+            <a:avLst/>
+          </a:prstGeom>
+          <a:solidFill>
+            <a:srgbClr val="D4AF37"/>
+          </a:solidFill>
+          <a:ln>
+            <a:noFill/>
+          </a:ln>
+        </p:spPr>
+        <p:style>
+          <a:lnRef idx="1">
+            <a:schemeClr val="accent1"/>
+          </a:lnRef>
+          <a:fillRef idx="3">
+            <a:schemeClr val="accent1"/>
+          </a:fillRef>
+          <a:effectRef idx="2">
+            <a:schemeClr val="accent1"/>
+          </a:effectRef>
+          <a:fontRef idx="minor">
+            <a:schemeClr val="lt1"/>
+          </a:fontRef>
+        </p:style>
+        <p:txBody>
+          <a:bodyPr rtlCol="0" anchor="ctr"/>
+          <a:lstStyle/>
+          <a:p>
+            <a:pPr algn="ctr"/>
+          </a:p>
+        </p:txBody>
+      </p:sp>
+      <p:sp>
+        <p:nvSpPr>
+          <p:cNvPr id="4" name="Rectangle 3"/>
+          <p:cNvSpPr/>
+          <p:nvPr/>
+        </p:nvSpPr>
+        <p:spPr>
+          <a:xfrm>
+            <a:off x="256032" y="201168"/>
+            <a:ext cx="12700" cy="6364224"/>
+          </a:xfrm>
+          <a:prstGeom prst="rect">
+            <a:avLst/>
+          </a:prstGeom>
+          <a:solidFill>
+            <a:srgbClr val="D4AF37"/>
+          </a:solidFill>
+          <a:ln>
+            <a:noFill/>
+          </a:ln>
+        </p:spPr>
+        <p:style>
+          <a:lnRef idx="1">
+            <a:schemeClr val="accent1"/>
+          </a:lnRef>
+          <a:fillRef idx="3">
+            <a:schemeClr val="accent1"/>
+          </a:fillRef>
+          <a:effectRef idx="2">
+            <a:schemeClr val="accent1"/>
+          </a:effectRef>
+          <a:fontRef idx="minor">
+            <a:schemeClr val="lt1"/>
+          </a:fontRef>
+        </p:style>
+        <p:txBody>
+          <a:bodyPr rtlCol="0" anchor="ctr"/>
+          <a:lstStyle/>
+          <a:p>
+            <a:pPr algn="ctr"/>
+          </a:p>
+        </p:txBody>
+      </p:sp>
+      <p:sp>
+        <p:nvSpPr>
+          <p:cNvPr id="5" name="Rectangle 4"/>
+          <p:cNvSpPr/>
+          <p:nvPr/>
+        </p:nvSpPr>
+        <p:spPr>
+          <a:xfrm>
+            <a:off x="11932920" y="201168"/>
+            <a:ext cx="12700" cy="6364224"/>
+          </a:xfrm>
+          <a:prstGeom prst="rect">
+            <a:avLst/>
+          </a:prstGeom>
+          <a:solidFill>
+            <a:srgbClr val="D4AF37"/>
+          </a:solidFill>
+          <a:ln>
+            <a:noFill/>
+          </a:ln>
+        </p:spPr>
+        <p:style>
+          <a:lnRef idx="1">
+            <a:schemeClr val="accent1"/>
+          </a:lnRef>
+          <a:fillRef idx="3">
+            <a:schemeClr val="accent1"/>
+          </a:fillRef>
+          <a:effectRef idx="2">
+            <a:schemeClr val="accent1"/>
+          </a:effectRef>
+          <a:fontRef idx="minor">
+            <a:schemeClr val="lt1"/>
+          </a:fontRef>
+        </p:style>
+        <p:txBody>
+          <a:bodyPr rtlCol="0" anchor="ctr"/>
+          <a:lstStyle/>
+          <a:p>
+            <a:pPr algn="ctr"/>
+          </a:p>
+        </p:txBody>
+      </p:sp>
+      <p:sp>
+        <p:nvSpPr>
+          <p:cNvPr id="6" name="Rectangle 5"/>
+          <p:cNvSpPr/>
+          <p:nvPr/>
+        </p:nvSpPr>
+        <p:spPr>
+          <a:xfrm>
+            <a:off x="320040" y="365760"/>
+            <a:ext cx="54864" cy="5760720"/>
+          </a:xfrm>
+          <a:prstGeom prst="rect">
+            <a:avLst/>
+          </a:prstGeom>
+          <a:solidFill>
+            <a:srgbClr val="D4AF37"/>
+          </a:solidFill>
+          <a:ln>
+            <a:noFill/>
+          </a:ln>
+        </p:spPr>
+        <p:style>
+          <a:lnRef idx="1">
+            <a:schemeClr val="accent1"/>
+          </a:lnRef>
+          <a:fillRef idx="3">
+            <a:schemeClr val="accent1"/>
+          </a:fillRef>
+          <a:effectRef idx="2">
+            <a:schemeClr val="accent1"/>
+          </a:effectRef>
+          <a:fontRef idx="minor">
+            <a:schemeClr val="lt1"/>
+          </a:fontRef>
+        </p:style>
+        <p:txBody>
+          <a:bodyPr rtlCol="0" anchor="ctr"/>
+          <a:lstStyle/>
+          <a:p>
+            <a:pPr algn="ctr"/>
+          </a:p>
+        </p:txBody>
+      </p:sp>
+      <p:sp>
+        <p:nvSpPr>
+          <p:cNvPr id="7" name="Rectangle 6"/>
+          <p:cNvSpPr/>
+          <p:nvPr/>
+        </p:nvSpPr>
+        <p:spPr>
+          <a:xfrm>
+            <a:off x="448056" y="365760"/>
+            <a:ext cx="12700" cy="5760720"/>
+          </a:xfrm>
+          <a:prstGeom prst="rect">
+            <a:avLst/>
+          </a:prstGeom>
+          <a:solidFill>
+            <a:srgbClr val="2A2A3E"/>
+          </a:solidFill>
+          <a:ln>
+            <a:noFill/>
+          </a:ln>
+        </p:spPr>
+        <p:style>
+          <a:lnRef idx="1">
+            <a:schemeClr val="accent1"/>
+          </a:lnRef>
+          <a:fillRef idx="3">
+            <a:schemeClr val="accent1"/>
+          </a:fillRef>
+          <a:effectRef idx="2">
+            <a:schemeClr val="accent1"/>
+          </a:effectRef>
+          <a:fontRef idx="minor">
+            <a:schemeClr val="lt1"/>
+          </a:fontRef>
+        </p:style>
+        <p:txBody>
+          <a:bodyPr rtlCol="0" anchor="ctr"/>
+          <a:lstStyle/>
+          <a:p>
+            <a:pPr algn="ctr"/>
+          </a:p>
+        </p:txBody>
+      </p:sp>
+      <p:sp>
+        <p:nvSpPr>
+          <p:cNvPr id="8" name="TextBox 7"/>
           <p:cNvSpPr txBox="1"/>
           <p:nvPr/>
         </p:nvSpPr>
         <p:spPr>
           <a:xfrm>
-            <a:off x="731520" y="457200"/>
-            <a:ext cx="10698480" cy="731520"/>
+            <a:off x="731520" y="502920"/>
+            <a:ext cx="10698480" cy="685800"/>
           </a:xfrm>
           <a:prstGeom prst="rect">
             <a:avLst/>
@@ -10102,7 +14909,7 @@
       </p:sp>
       <p:sp>
         <p:nvSpPr>
-          <p:cNvPr id="3" name="Rectangle 2"/>
+          <p:cNvPr id="9" name="Rectangle 8"/>
           <p:cNvSpPr/>
           <p:nvPr/>
         </p:nvSpPr>
@@ -10145,13 +14952,13 @@
       </p:sp>
       <p:sp>
         <p:nvSpPr>
-          <p:cNvPr id="4" name="Rounded Rectangle 3"/>
-          <p:cNvSpPr/>
-          <p:nvPr/>
-        </p:nvSpPr>
-        <p:spPr>
-          <a:xfrm>
-            <a:off x="2011680" y="1645920"/>
+          <p:cNvPr id="10" name="Rounded Rectangle 9"/>
+          <p:cNvSpPr/>
+          <p:nvPr/>
+        </p:nvSpPr>
+        <p:spPr>
+          <a:xfrm>
+            <a:off x="2011680" y="1691640"/>
             <a:ext cx="2743200" cy="3200400"/>
           </a:xfrm>
           <a:prstGeom prst="roundRect">
@@ -10191,7 +14998,7 @@
             <a:r>
               <a:rPr sz="1400" b="0">
                 <a:solidFill>
-                  <a:srgbClr val="AAAAAA"/>
+                  <a:srgbClr val="A8A8B0"/>
                 </a:solidFill>
                 <a:latin typeface="Arial"/>
                 <a:ea typeface="Arial"/>
@@ -10203,14 +15010,14 @@
       </p:sp>
       <p:sp>
         <p:nvSpPr>
-          <p:cNvPr id="5" name="Rectangle 4"/>
-          <p:cNvSpPr/>
-          <p:nvPr/>
-        </p:nvSpPr>
-        <p:spPr>
-          <a:xfrm>
-            <a:off x="2011680" y="1645920"/>
-            <a:ext cx="2743200" cy="256032"/>
+          <p:cNvPr id="11" name="Rectangle 10"/>
+          <p:cNvSpPr/>
+          <p:nvPr/>
+        </p:nvSpPr>
+        <p:spPr>
+          <a:xfrm>
+            <a:off x="2011680" y="1691640"/>
+            <a:ext cx="2743200" cy="237744"/>
           </a:xfrm>
           <a:prstGeom prst="rect">
             <a:avLst/>
@@ -10246,14 +15053,14 @@
       </p:sp>
       <p:sp>
         <p:nvSpPr>
-          <p:cNvPr id="6" name="TextBox 5"/>
+          <p:cNvPr id="12" name="TextBox 11"/>
           <p:cNvSpPr txBox="1"/>
           <p:nvPr/>
         </p:nvSpPr>
         <p:spPr>
           <a:xfrm>
-            <a:off x="2011680" y="4956048"/>
-            <a:ext cx="2743200" cy="365760"/>
+            <a:off x="2011680" y="4983480"/>
+            <a:ext cx="2743200" cy="320040"/>
           </a:xfrm>
           <a:prstGeom prst="rect">
             <a:avLst/>
@@ -10282,13 +15089,13 @@
       </p:sp>
       <p:sp>
         <p:nvSpPr>
-          <p:cNvPr id="7" name="TextBox 6"/>
+          <p:cNvPr id="13" name="TextBox 12"/>
           <p:cNvSpPr txBox="1"/>
           <p:nvPr/>
         </p:nvSpPr>
         <p:spPr>
           <a:xfrm>
-            <a:off x="5120640" y="2834640"/>
+            <a:off x="5120640" y="2880360"/>
             <a:ext cx="1828800" cy="548640"/>
           </a:xfrm>
           <a:prstGeom prst="rect">
@@ -10318,13 +15125,13 @@
       </p:sp>
       <p:sp>
         <p:nvSpPr>
-          <p:cNvPr id="8" name="Rounded Rectangle 7"/>
-          <p:cNvSpPr/>
-          <p:nvPr/>
-        </p:nvSpPr>
-        <p:spPr>
-          <a:xfrm>
-            <a:off x="7315200" y="1645920"/>
+          <p:cNvPr id="14" name="Rounded Rectangle 13"/>
+          <p:cNvSpPr/>
+          <p:nvPr/>
+        </p:nvSpPr>
+        <p:spPr>
+          <a:xfrm>
+            <a:off x="7315200" y="1691640"/>
             <a:ext cx="2743200" cy="3200400"/>
           </a:xfrm>
           <a:prstGeom prst="roundRect">
@@ -10364,7 +15171,7 @@
             <a:r>
               <a:rPr sz="1400" b="0">
                 <a:solidFill>
-                  <a:srgbClr val="AAAAAA"/>
+                  <a:srgbClr val="A8A8B0"/>
                 </a:solidFill>
                 <a:latin typeface="Arial"/>
                 <a:ea typeface="Arial"/>
@@ -10376,14 +15183,14 @@
       </p:sp>
       <p:sp>
         <p:nvSpPr>
-          <p:cNvPr id="9" name="Rectangle 8"/>
-          <p:cNvSpPr/>
-          <p:nvPr/>
-        </p:nvSpPr>
-        <p:spPr>
-          <a:xfrm>
-            <a:off x="7315200" y="1645920"/>
-            <a:ext cx="2743200" cy="256032"/>
+          <p:cNvPr id="15" name="Rectangle 14"/>
+          <p:cNvSpPr/>
+          <p:nvPr/>
+        </p:nvSpPr>
+        <p:spPr>
+          <a:xfrm>
+            <a:off x="7315200" y="1691640"/>
+            <a:ext cx="2743200" cy="237744"/>
           </a:xfrm>
           <a:prstGeom prst="rect">
             <a:avLst/>
@@ -10419,14 +15226,14 @@
       </p:sp>
       <p:sp>
         <p:nvSpPr>
-          <p:cNvPr id="10" name="TextBox 9"/>
+          <p:cNvPr id="16" name="TextBox 15"/>
           <p:cNvSpPr txBox="1"/>
           <p:nvPr/>
         </p:nvSpPr>
         <p:spPr>
           <a:xfrm>
-            <a:off x="7315200" y="4956048"/>
-            <a:ext cx="2743200" cy="365760"/>
+            <a:off x="7315200" y="4983480"/>
+            <a:ext cx="2743200" cy="320040"/>
           </a:xfrm>
           <a:prstGeom prst="rect">
             <a:avLst/>
@@ -10455,14 +15262,57 @@
       </p:sp>
       <p:sp>
         <p:nvSpPr>
-          <p:cNvPr id="11" name="TextBox 10"/>
+          <p:cNvPr id="17" name="Rectangle 16"/>
+          <p:cNvSpPr/>
+          <p:nvPr/>
+        </p:nvSpPr>
+        <p:spPr>
+          <a:xfrm>
+            <a:off x="457200" y="6355080"/>
+            <a:ext cx="11247120" cy="12700"/>
+          </a:xfrm>
+          <a:prstGeom prst="rect">
+            <a:avLst/>
+          </a:prstGeom>
+          <a:solidFill>
+            <a:srgbClr val="D4AF37"/>
+          </a:solidFill>
+          <a:ln>
+            <a:noFill/>
+          </a:ln>
+        </p:spPr>
+        <p:style>
+          <a:lnRef idx="1">
+            <a:schemeClr val="accent1"/>
+          </a:lnRef>
+          <a:fillRef idx="3">
+            <a:schemeClr val="accent1"/>
+          </a:fillRef>
+          <a:effectRef idx="2">
+            <a:schemeClr val="accent1"/>
+          </a:effectRef>
+          <a:fontRef idx="minor">
+            <a:schemeClr val="lt1"/>
+          </a:fontRef>
+        </p:style>
+        <p:txBody>
+          <a:bodyPr rtlCol="0" anchor="ctr"/>
+          <a:lstStyle/>
+          <a:p>
+            <a:pPr algn="ctr"/>
+          </a:p>
+        </p:txBody>
+      </p:sp>
+      <p:sp>
+        <p:nvSpPr>
+          <p:cNvPr id="18" name="TextBox 17"/>
           <p:cNvSpPr txBox="1"/>
           <p:nvPr/>
         </p:nvSpPr>
         <p:spPr>
           <a:xfrm>
-            <a:off x="7772400" y="6446520"/>
-            <a:ext cx="4114800" cy="320040"/>
+            <a:off x="7589520" y="6419088"/>
+            <a:ext cx="4297680" cy="292608"/>
           </a:xfrm>
           <a:prstGeom prst="rect">
             <a:avLst/>
@@ -10479,56 +15329,13 @@
             <a:r>
               <a:rPr sz="1000" b="0">
                 <a:solidFill>
-                  <a:srgbClr val="AAAAAA"/>
+                  <a:srgbClr val="A8A8B0"/>
                 </a:solidFill>
                 <a:latin typeface="Arial"/>
                 <a:ea typeface="Arial"/>
               </a:rPr>
               <a:t>光影盟特训营  ·  9/14</a:t>
             </a:r>
-          </a:p>
-        </p:txBody>
-      </p:sp>
-      <p:sp>
-        <p:nvSpPr>
-          <p:cNvPr id="12" name="Rectangle 11"/>
-          <p:cNvSpPr/>
-          <p:nvPr/>
-        </p:nvSpPr>
-        <p:spPr>
-          <a:xfrm>
-            <a:off x="457200" y="6400800"/>
-            <a:ext cx="11247120" cy="12700"/>
-          </a:xfrm>
-          <a:prstGeom prst="rect">
-            <a:avLst/>
-          </a:prstGeom>
-          <a:solidFill>
-            <a:srgbClr val="D4AF37"/>
-          </a:solidFill>
-          <a:ln>
-            <a:noFill/>
-          </a:ln>
-        </p:spPr>
-        <p:style>
-          <a:lnRef idx="1">
-            <a:schemeClr val="accent1"/>
-          </a:lnRef>
-          <a:fillRef idx="3">
-            <a:schemeClr val="accent1"/>
-          </a:fillRef>
-          <a:effectRef idx="2">
-            <a:schemeClr val="accent1"/>
-          </a:effectRef>
-          <a:fontRef idx="minor">
-            <a:schemeClr val="lt1"/>
-          </a:fontRef>
-        </p:style>
-        <p:txBody>
-          <a:bodyPr rtlCol="0" anchor="ctr"/>
-          <a:lstStyle/>
-          <a:p>
-            <a:pPr algn="ctr"/>
           </a:p>
         </p:txBody>
       </p:sp>
